--- a/output/wordlabs-duct-3day.pptx
+++ b/output/wordlabs-duct-3day.pptx
@@ -4240,7 +4240,7 @@
                 <a:ea typeface="Calibri" pitchFamily="34" charset="-122"/>
                 <a:cs typeface="Calibri" pitchFamily="34" charset="-120"/>
               </a:rPr>
-              <a:t>"to lead or carry"</a:t>
+              <a:t>"to lead or bring"</a:t>
             </a:r>
             <a:endParaRPr lang="en-US" sz="2200" dirty="0"/>
           </a:p>
@@ -5288,7 +5288,7 @@
                 <a:ea typeface="Calibri" pitchFamily="34" charset="-122"/>
                 <a:cs typeface="Calibri" pitchFamily="34" charset="-120"/>
               </a:rPr>
-              <a:t>Word Labs  •  wordlabs.app  •  Root: 'duct' = to lead or carry</a:t>
+              <a:t>Word Labs  •  wordlabs.app  •  Root: 'duct' = to lead or bring</a:t>
             </a:r>
             <a:endParaRPr lang="en-US" sz="800" dirty="0"/>
           </a:p>
@@ -5622,7 +5622,7 @@
                 <a:ea typeface="Trebuchet MS" pitchFamily="34" charset="-122"/>
                 <a:cs typeface="Trebuchet MS" pitchFamily="34" charset="-120"/>
               </a:rPr>
-              <a:t>0</a:t>
+              <a:t>1</a:t>
             </a:r>
             <a:pPr algn="ctr" indent="0" marL="0">
               <a:buNone/>
@@ -5928,7 +5928,7 @@
                 <a:ea typeface="Calibri" pitchFamily="34" charset="-122"/>
                 <a:cs typeface="Calibri" pitchFamily="34" charset="-120"/>
               </a:rPr>
-              <a:t>Word Labs  •  wordlabs.app  •  Root: 'duct' = to lead or carry</a:t>
+              <a:t>Word Labs  •  wordlabs.app  •  Root: 'duct' = to lead or bring</a:t>
             </a:r>
             <a:endParaRPr lang="en-US" sz="800" dirty="0"/>
           </a:p>
@@ -6040,7 +6040,7 @@
                 <a:ea typeface="Calibri" pitchFamily="34" charset="-122"/>
                 <a:cs typeface="Calibri" pitchFamily="34" charset="-120"/>
               </a:rPr>
-              <a:t>The new </a:t>
+              <a:t>The new student was </a:t>
             </a:r>
             <a:pPr algn="l" indent="0" marL="0">
               <a:buNone/>
@@ -6057,7 +6057,7 @@
                 <a:ea typeface="Calibri" pitchFamily="34" charset="-122"/>
                 <a:cs typeface="Calibri" pitchFamily="34" charset="-120"/>
               </a:rPr>
-              <a:t>conductor</a:t>
+              <a:t>inducted</a:t>
             </a:r>
             <a:pPr algn="l" indent="0" marL="0">
               <a:buNone/>
@@ -6071,7 +6071,7 @@
                 <a:ea typeface="Calibri" pitchFamily="34" charset="-122"/>
                 <a:cs typeface="Calibri" pitchFamily="34" charset="-120"/>
               </a:rPr>
-              <a:t> will </a:t>
+              <a:t> into the science club, where she learned about </a:t>
             </a:r>
             <a:pPr algn="l" indent="0" marL="0">
               <a:buNone/>
@@ -6088,7 +6088,7 @@
                 <a:ea typeface="Calibri" pitchFamily="34" charset="-122"/>
                 <a:cs typeface="Calibri" pitchFamily="34" charset="-120"/>
               </a:rPr>
-              <a:t>induct</a:t>
+              <a:t>conduction</a:t>
             </a:r>
             <a:pPr algn="l" indent="0" marL="0">
               <a:buNone/>
@@ -6102,7 +6102,7 @@
                 <a:ea typeface="Calibri" pitchFamily="34" charset="-122"/>
                 <a:cs typeface="Calibri" pitchFamily="34" charset="-120"/>
               </a:rPr>
-              <a:t> three young musicians into the prestigious youth orchestra.</a:t>
+              <a:t> of heat.</a:t>
             </a:r>
             <a:endParaRPr lang="en-US" sz="1800" dirty="0"/>
           </a:p>
@@ -6257,7 +6257,7 @@
                 <a:ea typeface="Trebuchet MS" pitchFamily="34" charset="-122"/>
                 <a:cs typeface="Trebuchet MS" pitchFamily="34" charset="-120"/>
               </a:rPr>
-              <a:t>conductor</a:t>
+              <a:t>inducted</a:t>
             </a:r>
             <a:endParaRPr lang="en-US" sz="1400" dirty="0"/>
           </a:p>
@@ -6385,7 +6385,7 @@
                 <a:ea typeface="Trebuchet MS" pitchFamily="34" charset="-122"/>
                 <a:cs typeface="Trebuchet MS" pitchFamily="34" charset="-120"/>
               </a:rPr>
-              <a:t>induct</a:t>
+              <a:t>conduction</a:t>
             </a:r>
             <a:endParaRPr lang="en-US" sz="1400" dirty="0"/>
           </a:p>
@@ -6716,7 +6716,7 @@
                 <a:ea typeface="Calibri" pitchFamily="34" charset="-122"/>
                 <a:cs typeface="Calibri" pitchFamily="34" charset="-120"/>
               </a:rPr>
-              <a:t>Word Labs  •  wordlabs.app  •  Root: 'duct' = to lead or carry</a:t>
+              <a:t>Word Labs  •  wordlabs.app  •  Root: 'duct' = to lead or bring</a:t>
             </a:r>
             <a:endParaRPr lang="en-US" sz="800" dirty="0"/>
           </a:p>
@@ -6855,7 +6855,7 @@
                 <a:ea typeface="Trebuchet MS" pitchFamily="34" charset="-122"/>
                 <a:cs typeface="Trebuchet MS" pitchFamily="34" charset="-120"/>
               </a:rPr>
-              <a:t>conductor</a:t>
+              <a:t>inducted</a:t>
             </a:r>
             <a:endParaRPr lang="en-US" sz="2800" dirty="0"/>
           </a:p>
@@ -7543,7 +7543,7 @@
                 <a:ea typeface="Calibri" pitchFamily="34" charset="-122"/>
                 <a:cs typeface="Calibri" pitchFamily="34" charset="-120"/>
               </a:rPr>
-              <a:t>Word Labs  •  wordlabs.app  •  Root: 'duct' = to lead or carry</a:t>
+              <a:t>Word Labs  •  wordlabs.app  •  Root: 'duct' = to lead or bring</a:t>
             </a:r>
             <a:endParaRPr lang="en-US" sz="800" dirty="0"/>
           </a:p>
@@ -7682,7 +7682,7 @@
                 <a:ea typeface="Trebuchet MS" pitchFamily="34" charset="-122"/>
                 <a:cs typeface="Trebuchet MS" pitchFamily="34" charset="-120"/>
               </a:rPr>
-              <a:t>conductor</a:t>
+              <a:t>inducted</a:t>
             </a:r>
             <a:endParaRPr lang="en-US" sz="2800" dirty="0"/>
           </a:p>
@@ -7821,7 +7821,7 @@
                 <a:ea typeface="Trebuchet MS" pitchFamily="34" charset="-122"/>
                 <a:cs typeface="Trebuchet MS" pitchFamily="34" charset="-120"/>
               </a:rPr>
-              <a:t>con</a:t>
+              <a:t>in</a:t>
             </a:r>
             <a:endParaRPr lang="en-US" sz="1300" dirty="0"/>
           </a:p>
@@ -7860,7 +7860,7 @@
                 <a:ea typeface="Calibri" pitchFamily="34" charset="-122"/>
                 <a:cs typeface="Calibri" pitchFamily="34" charset="-120"/>
               </a:rPr>
-              <a:t>together, with</a:t>
+              <a:t>into</a:t>
             </a:r>
             <a:endParaRPr lang="en-US" sz="850" dirty="0"/>
           </a:p>
@@ -7972,7 +7972,7 @@
                 <a:ea typeface="Calibri" pitchFamily="34" charset="-122"/>
                 <a:cs typeface="Calibri" pitchFamily="34" charset="-120"/>
               </a:rPr>
-              <a:t>to lead or carry</a:t>
+              <a:t>to lead</a:t>
             </a:r>
             <a:endParaRPr lang="en-US" sz="850" dirty="0"/>
           </a:p>
@@ -8045,7 +8045,7 @@
                 <a:ea typeface="Trebuchet MS" pitchFamily="34" charset="-122"/>
                 <a:cs typeface="Trebuchet MS" pitchFamily="34" charset="-120"/>
               </a:rPr>
-              <a:t>or</a:t>
+              <a:t>ed</a:t>
             </a:r>
             <a:endParaRPr lang="en-US" sz="1300" dirty="0"/>
           </a:p>
@@ -8084,7 +8084,7 @@
                 <a:ea typeface="Calibri" pitchFamily="34" charset="-122"/>
                 <a:cs typeface="Calibri" pitchFamily="34" charset="-120"/>
               </a:rPr>
-              <a:t>person who does something</a:t>
+              <a:t>past tense</a:t>
             </a:r>
             <a:endParaRPr lang="en-US" sz="850" dirty="0"/>
           </a:p>
@@ -8640,7 +8640,7 @@
                 <a:ea typeface="Calibri" pitchFamily="34" charset="-122"/>
                 <a:cs typeface="Calibri" pitchFamily="34" charset="-120"/>
               </a:rPr>
-              <a:t>Word Labs  •  wordlabs.app  •  Root: 'duct' = to lead or carry</a:t>
+              <a:t>Word Labs  •  wordlabs.app  •  Root: 'duct' = to lead or bring</a:t>
             </a:r>
             <a:endParaRPr lang="en-US" sz="800" dirty="0"/>
           </a:p>
@@ -8779,7 +8779,7 @@
                 <a:ea typeface="Trebuchet MS" pitchFamily="34" charset="-122"/>
                 <a:cs typeface="Trebuchet MS" pitchFamily="34" charset="-120"/>
               </a:rPr>
-              <a:t>conductor</a:t>
+              <a:t>inducted</a:t>
             </a:r>
             <a:endParaRPr lang="en-US" sz="2800" dirty="0"/>
           </a:p>
@@ -8918,7 +8918,7 @@
                 <a:ea typeface="Trebuchet MS" pitchFamily="34" charset="-122"/>
                 <a:cs typeface="Trebuchet MS" pitchFamily="34" charset="-120"/>
               </a:rPr>
-              <a:t>con</a:t>
+              <a:t>in</a:t>
             </a:r>
             <a:endParaRPr lang="en-US" sz="1300" dirty="0"/>
           </a:p>
@@ -8957,7 +8957,7 @@
                 <a:ea typeface="Calibri" pitchFamily="34" charset="-122"/>
                 <a:cs typeface="Calibri" pitchFamily="34" charset="-120"/>
               </a:rPr>
-              <a:t>together, with</a:t>
+              <a:t>into</a:t>
             </a:r>
             <a:endParaRPr lang="en-US" sz="850" dirty="0"/>
           </a:p>
@@ -9069,7 +9069,7 @@
                 <a:ea typeface="Calibri" pitchFamily="34" charset="-122"/>
                 <a:cs typeface="Calibri" pitchFamily="34" charset="-120"/>
               </a:rPr>
-              <a:t>to lead or carry</a:t>
+              <a:t>to lead</a:t>
             </a:r>
             <a:endParaRPr lang="en-US" sz="850" dirty="0"/>
           </a:p>
@@ -9142,7 +9142,7 @@
                 <a:ea typeface="Trebuchet MS" pitchFamily="34" charset="-122"/>
                 <a:cs typeface="Trebuchet MS" pitchFamily="34" charset="-120"/>
               </a:rPr>
-              <a:t>or</a:t>
+              <a:t>ed</a:t>
             </a:r>
             <a:endParaRPr lang="en-US" sz="1300" dirty="0"/>
           </a:p>
@@ -9181,7 +9181,7 @@
                 <a:ea typeface="Calibri" pitchFamily="34" charset="-122"/>
                 <a:cs typeface="Calibri" pitchFamily="34" charset="-120"/>
               </a:rPr>
-              <a:t>person who does something</a:t>
+              <a:t>past tense</a:t>
             </a:r>
             <a:endParaRPr lang="en-US" sz="850" dirty="0"/>
           </a:p>
@@ -9340,7 +9340,7 @@
                 <a:ea typeface="Trebuchet MS" pitchFamily="34" charset="-122"/>
                 <a:cs typeface="Trebuchet MS" pitchFamily="34" charset="-120"/>
               </a:rPr>
-              <a:t>con</a:t>
+              <a:t>in</a:t>
             </a:r>
             <a:endParaRPr lang="en-US" sz="1400" dirty="0"/>
           </a:p>
@@ -9445,7 +9445,7 @@
                 <a:ea typeface="Trebuchet MS" pitchFamily="34" charset="-122"/>
                 <a:cs typeface="Trebuchet MS" pitchFamily="34" charset="-120"/>
               </a:rPr>
-              <a:t>duc</a:t>
+              <a:t>duct</a:t>
             </a:r>
             <a:endParaRPr lang="en-US" sz="1400" dirty="0"/>
           </a:p>
@@ -9550,7 +9550,7 @@
                 <a:ea typeface="Trebuchet MS" pitchFamily="34" charset="-122"/>
                 <a:cs typeface="Trebuchet MS" pitchFamily="34" charset="-120"/>
               </a:rPr>
-              <a:t>tor</a:t>
+              <a:t>ed</a:t>
             </a:r>
             <a:endParaRPr lang="en-US" sz="1400" dirty="0"/>
           </a:p>
@@ -9974,7 +9974,7 @@
                 <a:ea typeface="Calibri" pitchFamily="34" charset="-122"/>
                 <a:cs typeface="Calibri" pitchFamily="34" charset="-120"/>
               </a:rPr>
-              <a:t>Word Labs  •  wordlabs.app  •  Root: 'duct' = to lead or carry</a:t>
+              <a:t>Word Labs  •  wordlabs.app  •  Root: 'duct' = to lead or bring</a:t>
             </a:r>
             <a:endParaRPr lang="en-US" sz="800" dirty="0"/>
           </a:p>
@@ -10113,7 +10113,7 @@
                 <a:ea typeface="Trebuchet MS" pitchFamily="34" charset="-122"/>
                 <a:cs typeface="Trebuchet MS" pitchFamily="34" charset="-120"/>
               </a:rPr>
-              <a:t>conductor</a:t>
+              <a:t>inducted</a:t>
             </a:r>
             <a:endParaRPr lang="en-US" sz="2800" dirty="0"/>
           </a:p>
@@ -10252,7 +10252,7 @@
                 <a:ea typeface="Trebuchet MS" pitchFamily="34" charset="-122"/>
                 <a:cs typeface="Trebuchet MS" pitchFamily="34" charset="-120"/>
               </a:rPr>
-              <a:t>con</a:t>
+              <a:t>in</a:t>
             </a:r>
             <a:endParaRPr lang="en-US" sz="1300" dirty="0"/>
           </a:p>
@@ -10291,7 +10291,7 @@
                 <a:ea typeface="Calibri" pitchFamily="34" charset="-122"/>
                 <a:cs typeface="Calibri" pitchFamily="34" charset="-120"/>
               </a:rPr>
-              <a:t>together, with</a:t>
+              <a:t>into</a:t>
             </a:r>
             <a:endParaRPr lang="en-US" sz="850" dirty="0"/>
           </a:p>
@@ -10403,7 +10403,7 @@
                 <a:ea typeface="Calibri" pitchFamily="34" charset="-122"/>
                 <a:cs typeface="Calibri" pitchFamily="34" charset="-120"/>
               </a:rPr>
-              <a:t>to lead or carry</a:t>
+              <a:t>to lead</a:t>
             </a:r>
             <a:endParaRPr lang="en-US" sz="850" dirty="0"/>
           </a:p>
@@ -10476,7 +10476,7 @@
                 <a:ea typeface="Trebuchet MS" pitchFamily="34" charset="-122"/>
                 <a:cs typeface="Trebuchet MS" pitchFamily="34" charset="-120"/>
               </a:rPr>
-              <a:t>or</a:t>
+              <a:t>ed</a:t>
             </a:r>
             <a:endParaRPr lang="en-US" sz="1300" dirty="0"/>
           </a:p>
@@ -10515,7 +10515,7 @@
                 <a:ea typeface="Calibri" pitchFamily="34" charset="-122"/>
                 <a:cs typeface="Calibri" pitchFamily="34" charset="-120"/>
               </a:rPr>
-              <a:t>person who does something</a:t>
+              <a:t>past tense</a:t>
             </a:r>
             <a:endParaRPr lang="en-US" sz="850" dirty="0"/>
           </a:p>
@@ -10674,7 +10674,7 @@
                 <a:ea typeface="Trebuchet MS" pitchFamily="34" charset="-122"/>
                 <a:cs typeface="Trebuchet MS" pitchFamily="34" charset="-120"/>
               </a:rPr>
-              <a:t>con</a:t>
+              <a:t>in</a:t>
             </a:r>
             <a:endParaRPr lang="en-US" sz="1400" dirty="0"/>
           </a:p>
@@ -10779,7 +10779,7 @@
                 <a:ea typeface="Trebuchet MS" pitchFamily="34" charset="-122"/>
                 <a:cs typeface="Trebuchet MS" pitchFamily="34" charset="-120"/>
               </a:rPr>
-              <a:t>duc</a:t>
+              <a:t>duct</a:t>
             </a:r>
             <a:endParaRPr lang="en-US" sz="1400" dirty="0"/>
           </a:p>
@@ -10884,7 +10884,7 @@
                 <a:ea typeface="Trebuchet MS" pitchFamily="34" charset="-122"/>
                 <a:cs typeface="Trebuchet MS" pitchFamily="34" charset="-120"/>
               </a:rPr>
-              <a:t>tor</a:t>
+              <a:t>ed</a:t>
             </a:r>
             <a:endParaRPr lang="en-US" sz="1400" dirty="0"/>
           </a:p>
@@ -10965,11 +10965,11 @@
         <p:spPr>
           <a:xfrm>
             <a:off x="1874520" y="4096512"/>
-            <a:ext cx="6903720" cy="804672"/>
+            <a:ext cx="6903720" cy="658368"/>
           </a:xfrm>
           <a:prstGeom prst="rect">
             <a:avLst>
-              <a:gd name="adj" fmla="val 6818"/>
+              <a:gd name="adj" fmla="val 8333"/>
             </a:avLst>
           </a:prstGeom>
           <a:solidFill>
@@ -10992,11 +10992,11 @@
         <p:spPr>
           <a:xfrm>
             <a:off x="2023872" y="4169664"/>
-            <a:ext cx="685800" cy="384048"/>
+            <a:ext cx="685800" cy="475488"/>
           </a:xfrm>
           <a:prstGeom prst="rect">
             <a:avLst>
-              <a:gd name="adj" fmla="val 9524"/>
+              <a:gd name="adj" fmla="val 7692"/>
             </a:avLst>
           </a:prstGeom>
           <a:solidFill>
@@ -11019,7 +11019,7 @@
         <p:spPr>
           <a:xfrm>
             <a:off x="2023872" y="4169664"/>
-            <a:ext cx="685800" cy="384048"/>
+            <a:ext cx="685800" cy="475488"/>
           </a:xfrm>
           <a:prstGeom prst="rect">
             <a:avLst/>
@@ -11043,7 +11043,7 @@
                 <a:ea typeface="Trebuchet MS" pitchFamily="34" charset="-122"/>
                 <a:cs typeface="Trebuchet MS" pitchFamily="34" charset="-120"/>
               </a:rPr>
-              <a:t>c</a:t>
+              <a:t>i</a:t>
             </a:r>
             <a:endParaRPr lang="en-US" sz="900" dirty="0"/>
           </a:p>
@@ -11051,57 +11051,18 @@
       </p:sp>
       <p:sp>
         <p:nvSpPr>
-          <p:cNvPr id="41" name="Text 39"/>
-          <p:cNvSpPr/>
-          <p:nvPr/>
-        </p:nvSpPr>
-        <p:spPr>
-          <a:xfrm>
-            <a:off x="2023872" y="4572000"/>
-            <a:ext cx="685800" cy="219456"/>
-          </a:xfrm>
-          <a:prstGeom prst="rect">
-            <a:avLst/>
-          </a:prstGeom>
-          <a:noFill/>
-          <a:ln/>
-        </p:spPr>
-        <p:txBody>
-          <a:bodyPr wrap="square" lIns="0" tIns="0" rIns="0" bIns="0" rtlCol="0" anchor="t"/>
-          <a:lstStyle/>
-          <a:p>
-            <a:pPr algn="ctr" indent="0" marL="0">
-              <a:buNone/>
-            </a:pPr>
-            <a:r>
-              <a:rPr lang="en-US" sz="750" i="1" dirty="0">
-                <a:solidFill>
-                  <a:srgbClr val="94A3B8"/>
-                </a:solidFill>
-                <a:latin typeface="Calibri" pitchFamily="34" charset="0"/>
-                <a:ea typeface="Calibri" pitchFamily="34" charset="-122"/>
-                <a:cs typeface="Calibri" pitchFamily="34" charset="-120"/>
-              </a:rPr>
-              <a:t>/k/</a:t>
-            </a:r>
-            <a:endParaRPr lang="en-US" sz="750" dirty="0"/>
-          </a:p>
-        </p:txBody>
-      </p:sp>
-      <p:sp>
-        <p:nvSpPr>
-          <p:cNvPr id="42" name="Shape 40"/>
+          <p:cNvPr id="41" name="Shape 39"/>
           <p:cNvSpPr/>
           <p:nvPr/>
         </p:nvSpPr>
         <p:spPr>
           <a:xfrm>
             <a:off x="2831592" y="4169664"/>
-            <a:ext cx="685800" cy="384048"/>
+            <a:ext cx="685800" cy="475488"/>
           </a:xfrm>
           <a:prstGeom prst="rect">
             <a:avLst>
-              <a:gd name="adj" fmla="val 9524"/>
+              <a:gd name="adj" fmla="val 7692"/>
             </a:avLst>
           </a:prstGeom>
           <a:solidFill>
@@ -11117,14 +11078,14 @@
       </p:sp>
       <p:sp>
         <p:nvSpPr>
-          <p:cNvPr id="43" name="Text 41"/>
+          <p:cNvPr id="42" name="Text 40"/>
           <p:cNvSpPr/>
           <p:nvPr/>
         </p:nvSpPr>
         <p:spPr>
           <a:xfrm>
             <a:off x="2831592" y="4169664"/>
-            <a:ext cx="685800" cy="384048"/>
+            <a:ext cx="685800" cy="475488"/>
           </a:xfrm>
           <a:prstGeom prst="rect">
             <a:avLst/>
@@ -11148,7 +11109,7 @@
                 <a:ea typeface="Trebuchet MS" pitchFamily="34" charset="-122"/>
                 <a:cs typeface="Trebuchet MS" pitchFamily="34" charset="-120"/>
               </a:rPr>
-              <a:t>o</a:t>
+              <a:t>n</a:t>
             </a:r>
             <a:endParaRPr lang="en-US" sz="900" dirty="0"/>
           </a:p>
@@ -11156,18 +11117,18 @@
       </p:sp>
       <p:sp>
         <p:nvSpPr>
-          <p:cNvPr id="44" name="Shape 42"/>
+          <p:cNvPr id="43" name="Shape 41"/>
           <p:cNvSpPr/>
           <p:nvPr/>
         </p:nvSpPr>
         <p:spPr>
           <a:xfrm>
             <a:off x="3639312" y="4169664"/>
-            <a:ext cx="685800" cy="384048"/>
+            <a:ext cx="685800" cy="475488"/>
           </a:xfrm>
           <a:prstGeom prst="rect">
             <a:avLst>
-              <a:gd name="adj" fmla="val 9524"/>
+              <a:gd name="adj" fmla="val 7692"/>
             </a:avLst>
           </a:prstGeom>
           <a:solidFill>
@@ -11183,14 +11144,14 @@
       </p:sp>
       <p:sp>
         <p:nvSpPr>
-          <p:cNvPr id="45" name="Text 43"/>
+          <p:cNvPr id="44" name="Text 42"/>
           <p:cNvSpPr/>
           <p:nvPr/>
         </p:nvSpPr>
         <p:spPr>
           <a:xfrm>
             <a:off x="3639312" y="4169664"/>
-            <a:ext cx="685800" cy="384048"/>
+            <a:ext cx="685800" cy="475488"/>
           </a:xfrm>
           <a:prstGeom prst="rect">
             <a:avLst/>
@@ -11214,7 +11175,7 @@
                 <a:ea typeface="Trebuchet MS" pitchFamily="34" charset="-122"/>
                 <a:cs typeface="Trebuchet MS" pitchFamily="34" charset="-120"/>
               </a:rPr>
-              <a:t>n</a:t>
+              <a:t>d</a:t>
             </a:r>
             <a:endParaRPr lang="en-US" sz="900" dirty="0"/>
           </a:p>
@@ -11222,18 +11183,18 @@
       </p:sp>
       <p:sp>
         <p:nvSpPr>
-          <p:cNvPr id="46" name="Shape 44"/>
+          <p:cNvPr id="45" name="Shape 43"/>
           <p:cNvSpPr/>
           <p:nvPr/>
         </p:nvSpPr>
         <p:spPr>
           <a:xfrm>
             <a:off x="4447032" y="4169664"/>
-            <a:ext cx="685800" cy="384048"/>
+            <a:ext cx="685800" cy="475488"/>
           </a:xfrm>
           <a:prstGeom prst="rect">
             <a:avLst>
-              <a:gd name="adj" fmla="val 9524"/>
+              <a:gd name="adj" fmla="val 7692"/>
             </a:avLst>
           </a:prstGeom>
           <a:solidFill>
@@ -11249,14 +11210,14 @@
       </p:sp>
       <p:sp>
         <p:nvSpPr>
-          <p:cNvPr id="47" name="Text 45"/>
+          <p:cNvPr id="46" name="Text 44"/>
           <p:cNvSpPr/>
           <p:nvPr/>
         </p:nvSpPr>
         <p:spPr>
           <a:xfrm>
             <a:off x="4447032" y="4169664"/>
-            <a:ext cx="685800" cy="384048"/>
+            <a:ext cx="685800" cy="475488"/>
           </a:xfrm>
           <a:prstGeom prst="rect">
             <a:avLst/>
@@ -11280,7 +11241,7 @@
                 <a:ea typeface="Trebuchet MS" pitchFamily="34" charset="-122"/>
                 <a:cs typeface="Trebuchet MS" pitchFamily="34" charset="-120"/>
               </a:rPr>
-              <a:t>d</a:t>
+              <a:t>u</a:t>
             </a:r>
             <a:endParaRPr lang="en-US" sz="900" dirty="0"/>
           </a:p>
@@ -11288,18 +11249,18 @@
       </p:sp>
       <p:sp>
         <p:nvSpPr>
-          <p:cNvPr id="48" name="Shape 46"/>
+          <p:cNvPr id="47" name="Shape 45"/>
           <p:cNvSpPr/>
           <p:nvPr/>
         </p:nvSpPr>
         <p:spPr>
           <a:xfrm>
             <a:off x="5254752" y="4169664"/>
-            <a:ext cx="685800" cy="384048"/>
+            <a:ext cx="685800" cy="475488"/>
           </a:xfrm>
           <a:prstGeom prst="rect">
             <a:avLst>
-              <a:gd name="adj" fmla="val 9524"/>
+              <a:gd name="adj" fmla="val 7692"/>
             </a:avLst>
           </a:prstGeom>
           <a:solidFill>
@@ -11315,14 +11276,14 @@
       </p:sp>
       <p:sp>
         <p:nvSpPr>
-          <p:cNvPr id="49" name="Text 47"/>
+          <p:cNvPr id="48" name="Text 46"/>
           <p:cNvSpPr/>
           <p:nvPr/>
         </p:nvSpPr>
         <p:spPr>
           <a:xfrm>
             <a:off x="5254752" y="4169664"/>
-            <a:ext cx="685800" cy="384048"/>
+            <a:ext cx="685800" cy="475488"/>
           </a:xfrm>
           <a:prstGeom prst="rect">
             <a:avLst/>
@@ -11346,7 +11307,7 @@
                 <a:ea typeface="Trebuchet MS" pitchFamily="34" charset="-122"/>
                 <a:cs typeface="Trebuchet MS" pitchFamily="34" charset="-120"/>
               </a:rPr>
-              <a:t>u</a:t>
+              <a:t>c</a:t>
             </a:r>
             <a:endParaRPr lang="en-US" sz="900" dirty="0"/>
           </a:p>
@@ -11354,18 +11315,18 @@
       </p:sp>
       <p:sp>
         <p:nvSpPr>
-          <p:cNvPr id="50" name="Shape 48"/>
+          <p:cNvPr id="49" name="Shape 47"/>
           <p:cNvSpPr/>
           <p:nvPr/>
         </p:nvSpPr>
         <p:spPr>
           <a:xfrm>
             <a:off x="6062472" y="4169664"/>
-            <a:ext cx="685800" cy="384048"/>
+            <a:ext cx="685800" cy="475488"/>
           </a:xfrm>
           <a:prstGeom prst="rect">
             <a:avLst>
-              <a:gd name="adj" fmla="val 9524"/>
+              <a:gd name="adj" fmla="val 7692"/>
             </a:avLst>
           </a:prstGeom>
           <a:solidFill>
@@ -11381,14 +11342,14 @@
       </p:sp>
       <p:sp>
         <p:nvSpPr>
-          <p:cNvPr id="51" name="Text 49"/>
+          <p:cNvPr id="50" name="Text 48"/>
           <p:cNvSpPr/>
           <p:nvPr/>
         </p:nvSpPr>
         <p:spPr>
           <a:xfrm>
             <a:off x="6062472" y="4169664"/>
-            <a:ext cx="685800" cy="384048"/>
+            <a:ext cx="685800" cy="475488"/>
           </a:xfrm>
           <a:prstGeom prst="rect">
             <a:avLst/>
@@ -11412,7 +11373,7 @@
                 <a:ea typeface="Trebuchet MS" pitchFamily="34" charset="-122"/>
                 <a:cs typeface="Trebuchet MS" pitchFamily="34" charset="-120"/>
               </a:rPr>
-              <a:t>c</a:t>
+              <a:t>t</a:t>
             </a:r>
             <a:endParaRPr lang="en-US" sz="900" dirty="0"/>
           </a:p>
@@ -11420,80 +11381,41 @@
       </p:sp>
       <p:sp>
         <p:nvSpPr>
+          <p:cNvPr id="51" name="Shape 49"/>
+          <p:cNvSpPr/>
+          <p:nvPr/>
+        </p:nvSpPr>
+        <p:spPr>
+          <a:xfrm>
+            <a:off x="6870192" y="4169664"/>
+            <a:ext cx="685800" cy="475488"/>
+          </a:xfrm>
+          <a:prstGeom prst="rect">
+            <a:avLst>
+              <a:gd name="adj" fmla="val 7692"/>
+            </a:avLst>
+          </a:prstGeom>
+          <a:solidFill>
+            <a:srgbClr val="FFFFFF"/>
+          </a:solidFill>
+          <a:ln w="12700">
+            <a:solidFill>
+              <a:srgbClr val="DB2777"/>
+            </a:solidFill>
+            <a:prstDash val="solid"/>
+          </a:ln>
+        </p:spPr>
+      </p:sp>
+      <p:sp>
+        <p:nvSpPr>
           <p:cNvPr id="52" name="Text 50"/>
           <p:cNvSpPr/>
           <p:nvPr/>
         </p:nvSpPr>
         <p:spPr>
           <a:xfrm>
-            <a:off x="6062472" y="4572000"/>
-            <a:ext cx="685800" cy="219456"/>
-          </a:xfrm>
-          <a:prstGeom prst="rect">
-            <a:avLst/>
-          </a:prstGeom>
-          <a:noFill/>
-          <a:ln/>
-        </p:spPr>
-        <p:txBody>
-          <a:bodyPr wrap="square" lIns="0" tIns="0" rIns="0" bIns="0" rtlCol="0" anchor="t"/>
-          <a:lstStyle/>
-          <a:p>
-            <a:pPr algn="ctr" indent="0" marL="0">
-              <a:buNone/>
-            </a:pPr>
-            <a:r>
-              <a:rPr lang="en-US" sz="750" i="1" dirty="0">
-                <a:solidFill>
-                  <a:srgbClr val="94A3B8"/>
-                </a:solidFill>
-                <a:latin typeface="Calibri" pitchFamily="34" charset="0"/>
-                <a:ea typeface="Calibri" pitchFamily="34" charset="-122"/>
-                <a:cs typeface="Calibri" pitchFamily="34" charset="-120"/>
-              </a:rPr>
-              <a:t>/k/</a:t>
-            </a:r>
-            <a:endParaRPr lang="en-US" sz="750" dirty="0"/>
-          </a:p>
-        </p:txBody>
-      </p:sp>
-      <p:sp>
-        <p:nvSpPr>
-          <p:cNvPr id="53" name="Shape 51"/>
-          <p:cNvSpPr/>
-          <p:nvPr/>
-        </p:nvSpPr>
-        <p:spPr>
-          <a:xfrm>
             <a:off x="6870192" y="4169664"/>
-            <a:ext cx="685800" cy="384048"/>
-          </a:xfrm>
-          <a:prstGeom prst="rect">
-            <a:avLst>
-              <a:gd name="adj" fmla="val 9524"/>
-            </a:avLst>
-          </a:prstGeom>
-          <a:solidFill>
-            <a:srgbClr val="FFFFFF"/>
-          </a:solidFill>
-          <a:ln w="12700">
-            <a:solidFill>
-              <a:srgbClr val="DB2777"/>
-            </a:solidFill>
-            <a:prstDash val="solid"/>
-          </a:ln>
-        </p:spPr>
-      </p:sp>
-      <p:sp>
-        <p:nvSpPr>
-          <p:cNvPr id="54" name="Text 52"/>
-          <p:cNvSpPr/>
-          <p:nvPr/>
-        </p:nvSpPr>
-        <p:spPr>
-          <a:xfrm>
-            <a:off x="6870192" y="4169664"/>
-            <a:ext cx="685800" cy="384048"/>
+            <a:ext cx="685800" cy="475488"/>
           </a:xfrm>
           <a:prstGeom prst="rect">
             <a:avLst/>
@@ -11517,7 +11439,7 @@
                 <a:ea typeface="Trebuchet MS" pitchFamily="34" charset="-122"/>
                 <a:cs typeface="Trebuchet MS" pitchFamily="34" charset="-120"/>
               </a:rPr>
-              <a:t>t</a:t>
+              <a:t>e</a:t>
             </a:r>
             <a:endParaRPr lang="en-US" sz="900" dirty="0"/>
           </a:p>
@@ -11525,18 +11447,18 @@
       </p:sp>
       <p:sp>
         <p:nvSpPr>
-          <p:cNvPr id="55" name="Shape 53"/>
+          <p:cNvPr id="53" name="Shape 51"/>
           <p:cNvSpPr/>
           <p:nvPr/>
         </p:nvSpPr>
         <p:spPr>
           <a:xfrm>
             <a:off x="7677912" y="4169664"/>
-            <a:ext cx="685800" cy="384048"/>
+            <a:ext cx="685800" cy="475488"/>
           </a:xfrm>
           <a:prstGeom prst="rect">
             <a:avLst>
-              <a:gd name="adj" fmla="val 9524"/>
+              <a:gd name="adj" fmla="val 7692"/>
             </a:avLst>
           </a:prstGeom>
           <a:solidFill>
@@ -11552,14 +11474,14 @@
       </p:sp>
       <p:sp>
         <p:nvSpPr>
-          <p:cNvPr id="56" name="Text 54"/>
+          <p:cNvPr id="54" name="Text 52"/>
           <p:cNvSpPr/>
           <p:nvPr/>
         </p:nvSpPr>
         <p:spPr>
           <a:xfrm>
             <a:off x="7677912" y="4169664"/>
-            <a:ext cx="685800" cy="384048"/>
+            <a:ext cx="685800" cy="475488"/>
           </a:xfrm>
           <a:prstGeom prst="rect">
             <a:avLst/>
@@ -11583,7 +11505,7 @@
                 <a:ea typeface="Trebuchet MS" pitchFamily="34" charset="-122"/>
                 <a:cs typeface="Trebuchet MS" pitchFamily="34" charset="-120"/>
               </a:rPr>
-              <a:t>or</a:t>
+              <a:t>d</a:t>
             </a:r>
             <a:endParaRPr lang="en-US" sz="900" dirty="0"/>
           </a:p>
@@ -11875,7 +11797,7 @@
                 <a:ea typeface="Calibri" pitchFamily="34" charset="-122"/>
                 <a:cs typeface="Calibri" pitchFamily="34" charset="-120"/>
               </a:rPr>
-              <a:t>Word Labs  •  wordlabs.app  •  Root: 'duct' = to lead or carry</a:t>
+              <a:t>Word Labs  •  wordlabs.app  •  Root: 'duct' = to lead or bring</a:t>
             </a:r>
             <a:endParaRPr lang="en-US" sz="800" dirty="0"/>
           </a:p>
@@ -12014,7 +11936,7 @@
                 <a:ea typeface="Trebuchet MS" pitchFamily="34" charset="-122"/>
                 <a:cs typeface="Trebuchet MS" pitchFamily="34" charset="-120"/>
               </a:rPr>
-              <a:t>induct</a:t>
+              <a:t>conduction</a:t>
             </a:r>
             <a:endParaRPr lang="en-US" sz="2800" dirty="0"/>
           </a:p>
@@ -12702,7 +12624,7 @@
                 <a:ea typeface="Calibri" pitchFamily="34" charset="-122"/>
                 <a:cs typeface="Calibri" pitchFamily="34" charset="-120"/>
               </a:rPr>
-              <a:t>Word Labs  •  wordlabs.app  •  Root: 'duct' = to lead or carry</a:t>
+              <a:t>Word Labs  •  wordlabs.app  •  Root: 'duct' = to lead or bring</a:t>
             </a:r>
             <a:endParaRPr lang="en-US" sz="800" dirty="0"/>
           </a:p>
@@ -12841,7 +12763,7 @@
                 <a:ea typeface="Trebuchet MS" pitchFamily="34" charset="-122"/>
                 <a:cs typeface="Trebuchet MS" pitchFamily="34" charset="-120"/>
               </a:rPr>
-              <a:t>induct</a:t>
+              <a:t>conduction</a:t>
             </a:r>
             <a:endParaRPr lang="en-US" sz="2800" dirty="0"/>
           </a:p>
@@ -12921,7 +12843,7 @@
         </p:nvSpPr>
         <p:spPr>
           <a:xfrm>
-            <a:off x="2938272" y="2258568"/>
+            <a:off x="2221992" y="2258568"/>
             <a:ext cx="1828800" cy="292608"/>
           </a:xfrm>
           <a:prstGeom prst="rect">
@@ -12955,7 +12877,7 @@
         </p:nvSpPr>
         <p:spPr>
           <a:xfrm>
-            <a:off x="2938272" y="2258568"/>
+            <a:off x="2221992" y="2258568"/>
             <a:ext cx="1828800" cy="292608"/>
           </a:xfrm>
           <a:prstGeom prst="rect">
@@ -12980,7 +12902,7 @@
                 <a:ea typeface="Trebuchet MS" pitchFamily="34" charset="-122"/>
                 <a:cs typeface="Trebuchet MS" pitchFamily="34" charset="-120"/>
               </a:rPr>
-              <a:t>in</a:t>
+              <a:t>con</a:t>
             </a:r>
             <a:endParaRPr lang="en-US" sz="1300" dirty="0"/>
           </a:p>
@@ -12994,7 +12916,7 @@
         </p:nvSpPr>
         <p:spPr>
           <a:xfrm>
-            <a:off x="2938272" y="2569464"/>
+            <a:off x="2221992" y="2569464"/>
             <a:ext cx="1828800" cy="201168"/>
           </a:xfrm>
           <a:prstGeom prst="rect">
@@ -13019,7 +12941,7 @@
                 <a:ea typeface="Calibri" pitchFamily="34" charset="-122"/>
                 <a:cs typeface="Calibri" pitchFamily="34" charset="-120"/>
               </a:rPr>
-              <a:t>into</a:t>
+              <a:t>together, with</a:t>
             </a:r>
             <a:endParaRPr lang="en-US" sz="850" dirty="0"/>
           </a:p>
@@ -13033,7 +12955,7 @@
         </p:nvSpPr>
         <p:spPr>
           <a:xfrm>
-            <a:off x="5803392" y="2258568"/>
+            <a:off x="4370832" y="2258568"/>
             <a:ext cx="1828800" cy="292608"/>
           </a:xfrm>
           <a:prstGeom prst="rect">
@@ -13067,7 +12989,7 @@
         </p:nvSpPr>
         <p:spPr>
           <a:xfrm>
-            <a:off x="5803392" y="2258568"/>
+            <a:off x="4370832" y="2258568"/>
             <a:ext cx="1828800" cy="292608"/>
           </a:xfrm>
           <a:prstGeom prst="rect">
@@ -13106,7 +13028,7 @@
         </p:nvSpPr>
         <p:spPr>
           <a:xfrm>
-            <a:off x="5803392" y="2569464"/>
+            <a:off x="4370832" y="2569464"/>
             <a:ext cx="1828800" cy="201168"/>
           </a:xfrm>
           <a:prstGeom prst="rect">
@@ -13131,7 +13053,7 @@
                 <a:ea typeface="Calibri" pitchFamily="34" charset="-122"/>
                 <a:cs typeface="Calibri" pitchFamily="34" charset="-120"/>
               </a:rPr>
-              <a:t>to lead or carry</a:t>
+              <a:t>to lead</a:t>
             </a:r>
             <a:endParaRPr lang="en-US" sz="850" dirty="0"/>
           </a:p>
@@ -13140,6 +13062,118 @@
       <p:sp>
         <p:nvSpPr>
           <p:cNvPr id="22" name="Shape 20"/>
+          <p:cNvSpPr/>
+          <p:nvPr/>
+        </p:nvSpPr>
+        <p:spPr>
+          <a:xfrm>
+            <a:off x="6519672" y="2258568"/>
+            <a:ext cx="1828800" cy="292608"/>
+          </a:xfrm>
+          <a:prstGeom prst="rect">
+            <a:avLst>
+              <a:gd name="adj" fmla="val 25000"/>
+            </a:avLst>
+          </a:prstGeom>
+          <a:solidFill>
+            <a:srgbClr val="FCE7F3"/>
+          </a:solidFill>
+          <a:ln w="19050">
+            <a:solidFill>
+              <a:srgbClr val="DB2777"/>
+            </a:solidFill>
+            <a:prstDash val="solid"/>
+          </a:ln>
+          <a:effectLst>
+            <a:outerShdw sx="100000" sy="100000" kx="0" ky="0" algn="bl" rotWithShape="0" blurRad="101600" dist="38100" dir="8100000">
+              <a:srgbClr val="000000">
+                <a:alpha val="12000"/>
+              </a:srgbClr>
+            </a:outerShdw>
+          </a:effectLst>
+        </p:spPr>
+      </p:sp>
+      <p:sp>
+        <p:nvSpPr>
+          <p:cNvPr id="23" name="Text 21"/>
+          <p:cNvSpPr/>
+          <p:nvPr/>
+        </p:nvSpPr>
+        <p:spPr>
+          <a:xfrm>
+            <a:off x="6519672" y="2258568"/>
+            <a:ext cx="1828800" cy="292608"/>
+          </a:xfrm>
+          <a:prstGeom prst="rect">
+            <a:avLst/>
+          </a:prstGeom>
+          <a:noFill/>
+          <a:ln/>
+        </p:spPr>
+        <p:txBody>
+          <a:bodyPr wrap="square" lIns="0" tIns="0" rIns="0" bIns="0" rtlCol="0" anchor="ctr"/>
+          <a:lstStyle/>
+          <a:p>
+            <a:pPr algn="ctr" indent="0" marL="0">
+              <a:buNone/>
+            </a:pPr>
+            <a:r>
+              <a:rPr lang="en-US" sz="1300" b="1" dirty="0">
+                <a:solidFill>
+                  <a:srgbClr val="9D174D"/>
+                </a:solidFill>
+                <a:latin typeface="Trebuchet MS" pitchFamily="34" charset="0"/>
+                <a:ea typeface="Trebuchet MS" pitchFamily="34" charset="-122"/>
+                <a:cs typeface="Trebuchet MS" pitchFamily="34" charset="-120"/>
+              </a:rPr>
+              <a:t>ion</a:t>
+            </a:r>
+            <a:endParaRPr lang="en-US" sz="1300" dirty="0"/>
+          </a:p>
+        </p:txBody>
+      </p:sp>
+      <p:sp>
+        <p:nvSpPr>
+          <p:cNvPr id="24" name="Text 22"/>
+          <p:cNvSpPr/>
+          <p:nvPr/>
+        </p:nvSpPr>
+        <p:spPr>
+          <a:xfrm>
+            <a:off x="6519672" y="2569464"/>
+            <a:ext cx="1828800" cy="201168"/>
+          </a:xfrm>
+          <a:prstGeom prst="rect">
+            <a:avLst/>
+          </a:prstGeom>
+          <a:noFill/>
+          <a:ln/>
+        </p:spPr>
+        <p:txBody>
+          <a:bodyPr wrap="square" lIns="0" tIns="0" rIns="0" bIns="0" rtlCol="0" anchor="t"/>
+          <a:lstStyle/>
+          <a:p>
+            <a:pPr algn="ctr" indent="0" marL="0">
+              <a:buNone/>
+            </a:pPr>
+            <a:r>
+              <a:rPr lang="en-US" sz="850" dirty="0">
+                <a:solidFill>
+                  <a:srgbClr val="475569"/>
+                </a:solidFill>
+                <a:latin typeface="Calibri" pitchFamily="34" charset="0"/>
+                <a:ea typeface="Calibri" pitchFamily="34" charset="-122"/>
+                <a:cs typeface="Calibri" pitchFamily="34" charset="-120"/>
+              </a:rPr>
+              <a:t>act or process of</a:t>
+            </a:r>
+            <a:endParaRPr lang="en-US" sz="850" dirty="0"/>
+          </a:p>
+        </p:txBody>
+      </p:sp>
+      <p:sp>
+        <p:nvSpPr>
+          <p:cNvPr id="25" name="Shape 23"/>
           <p:cNvSpPr/>
           <p:nvPr/>
         </p:nvSpPr>
@@ -13166,7 +13200,7 @@
       </p:sp>
       <p:sp>
         <p:nvSpPr>
-          <p:cNvPr id="23" name="Text 21"/>
+          <p:cNvPr id="26" name="Text 24"/>
           <p:cNvSpPr/>
           <p:nvPr/>
         </p:nvSpPr>
@@ -13205,7 +13239,7 @@
       </p:sp>
       <p:sp>
         <p:nvSpPr>
-          <p:cNvPr id="24" name="Shape 22"/>
+          <p:cNvPr id="27" name="Shape 25"/>
           <p:cNvSpPr/>
           <p:nvPr/>
         </p:nvSpPr>
@@ -13232,7 +13266,7 @@
       </p:sp>
       <p:sp>
         <p:nvSpPr>
-          <p:cNvPr id="25" name="Text 23"/>
+          <p:cNvPr id="28" name="Text 26"/>
           <p:cNvSpPr/>
           <p:nvPr/>
         </p:nvSpPr>
@@ -13271,7 +13305,7 @@
       </p:sp>
       <p:sp>
         <p:nvSpPr>
-          <p:cNvPr id="26" name="Shape 24"/>
+          <p:cNvPr id="29" name="Shape 27"/>
           <p:cNvSpPr/>
           <p:nvPr/>
         </p:nvSpPr>
@@ -13298,7 +13332,7 @@
       </p:sp>
       <p:sp>
         <p:nvSpPr>
-          <p:cNvPr id="27" name="Text 25"/>
+          <p:cNvPr id="30" name="Text 28"/>
           <p:cNvSpPr/>
           <p:nvPr/>
         </p:nvSpPr>
@@ -13337,7 +13371,7 @@
       </p:sp>
       <p:sp>
         <p:nvSpPr>
-          <p:cNvPr id="28" name="Shape 26"/>
+          <p:cNvPr id="31" name="Shape 29"/>
           <p:cNvSpPr/>
           <p:nvPr/>
         </p:nvSpPr>
@@ -13364,7 +13398,7 @@
       </p:sp>
       <p:sp>
         <p:nvSpPr>
-          <p:cNvPr id="29" name="Text 27"/>
+          <p:cNvPr id="32" name="Text 30"/>
           <p:cNvSpPr/>
           <p:nvPr/>
         </p:nvSpPr>
@@ -13687,7 +13721,7 @@
                 <a:ea typeface="Calibri" pitchFamily="34" charset="-122"/>
                 <a:cs typeface="Calibri" pitchFamily="34" charset="-120"/>
               </a:rPr>
-              <a:t>Word Labs  •  wordlabs.app  •  Root: 'duct' = to lead or carry</a:t>
+              <a:t>Word Labs  •  wordlabs.app  •  Root: 'duct' = to lead or bring</a:t>
             </a:r>
             <a:endParaRPr lang="en-US" sz="800" dirty="0"/>
           </a:p>
@@ -13826,7 +13860,7 @@
                 <a:ea typeface="Trebuchet MS" pitchFamily="34" charset="-122"/>
                 <a:cs typeface="Trebuchet MS" pitchFamily="34" charset="-120"/>
               </a:rPr>
-              <a:t>induct</a:t>
+              <a:t>conduction</a:t>
             </a:r>
             <a:endParaRPr lang="en-US" sz="2800" dirty="0"/>
           </a:p>
@@ -13906,7 +13940,7 @@
         </p:nvSpPr>
         <p:spPr>
           <a:xfrm>
-            <a:off x="2938272" y="2258568"/>
+            <a:off x="2221992" y="2258568"/>
             <a:ext cx="1828800" cy="292608"/>
           </a:xfrm>
           <a:prstGeom prst="rect">
@@ -13940,7 +13974,7 @@
         </p:nvSpPr>
         <p:spPr>
           <a:xfrm>
-            <a:off x="2938272" y="2258568"/>
+            <a:off x="2221992" y="2258568"/>
             <a:ext cx="1828800" cy="292608"/>
           </a:xfrm>
           <a:prstGeom prst="rect">
@@ -13965,7 +13999,7 @@
                 <a:ea typeface="Trebuchet MS" pitchFamily="34" charset="-122"/>
                 <a:cs typeface="Trebuchet MS" pitchFamily="34" charset="-120"/>
               </a:rPr>
-              <a:t>in</a:t>
+              <a:t>con</a:t>
             </a:r>
             <a:endParaRPr lang="en-US" sz="1300" dirty="0"/>
           </a:p>
@@ -13979,7 +14013,7 @@
         </p:nvSpPr>
         <p:spPr>
           <a:xfrm>
-            <a:off x="2938272" y="2569464"/>
+            <a:off x="2221992" y="2569464"/>
             <a:ext cx="1828800" cy="201168"/>
           </a:xfrm>
           <a:prstGeom prst="rect">
@@ -14004,7 +14038,7 @@
                 <a:ea typeface="Calibri" pitchFamily="34" charset="-122"/>
                 <a:cs typeface="Calibri" pitchFamily="34" charset="-120"/>
               </a:rPr>
-              <a:t>into</a:t>
+              <a:t>together, with</a:t>
             </a:r>
             <a:endParaRPr lang="en-US" sz="850" dirty="0"/>
           </a:p>
@@ -14018,7 +14052,7 @@
         </p:nvSpPr>
         <p:spPr>
           <a:xfrm>
-            <a:off x="5803392" y="2258568"/>
+            <a:off x="4370832" y="2258568"/>
             <a:ext cx="1828800" cy="292608"/>
           </a:xfrm>
           <a:prstGeom prst="rect">
@@ -14052,7 +14086,7 @@
         </p:nvSpPr>
         <p:spPr>
           <a:xfrm>
-            <a:off x="5803392" y="2258568"/>
+            <a:off x="4370832" y="2258568"/>
             <a:ext cx="1828800" cy="292608"/>
           </a:xfrm>
           <a:prstGeom prst="rect">
@@ -14091,7 +14125,7 @@
         </p:nvSpPr>
         <p:spPr>
           <a:xfrm>
-            <a:off x="5803392" y="2569464"/>
+            <a:off x="4370832" y="2569464"/>
             <a:ext cx="1828800" cy="201168"/>
           </a:xfrm>
           <a:prstGeom prst="rect">
@@ -14116,7 +14150,7 @@
                 <a:ea typeface="Calibri" pitchFamily="34" charset="-122"/>
                 <a:cs typeface="Calibri" pitchFamily="34" charset="-120"/>
               </a:rPr>
-              <a:t>to lead or carry</a:t>
+              <a:t>to lead</a:t>
             </a:r>
             <a:endParaRPr lang="en-US" sz="850" dirty="0"/>
           </a:p>
@@ -14125,6 +14159,118 @@
       <p:sp>
         <p:nvSpPr>
           <p:cNvPr id="22" name="Shape 20"/>
+          <p:cNvSpPr/>
+          <p:nvPr/>
+        </p:nvSpPr>
+        <p:spPr>
+          <a:xfrm>
+            <a:off x="6519672" y="2258568"/>
+            <a:ext cx="1828800" cy="292608"/>
+          </a:xfrm>
+          <a:prstGeom prst="rect">
+            <a:avLst>
+              <a:gd name="adj" fmla="val 25000"/>
+            </a:avLst>
+          </a:prstGeom>
+          <a:solidFill>
+            <a:srgbClr val="FCE7F3"/>
+          </a:solidFill>
+          <a:ln w="19050">
+            <a:solidFill>
+              <a:srgbClr val="DB2777"/>
+            </a:solidFill>
+            <a:prstDash val="solid"/>
+          </a:ln>
+          <a:effectLst>
+            <a:outerShdw sx="100000" sy="100000" kx="0" ky="0" algn="bl" rotWithShape="0" blurRad="101600" dist="38100" dir="8100000">
+              <a:srgbClr val="000000">
+                <a:alpha val="12000"/>
+              </a:srgbClr>
+            </a:outerShdw>
+          </a:effectLst>
+        </p:spPr>
+      </p:sp>
+      <p:sp>
+        <p:nvSpPr>
+          <p:cNvPr id="23" name="Text 21"/>
+          <p:cNvSpPr/>
+          <p:nvPr/>
+        </p:nvSpPr>
+        <p:spPr>
+          <a:xfrm>
+            <a:off x="6519672" y="2258568"/>
+            <a:ext cx="1828800" cy="292608"/>
+          </a:xfrm>
+          <a:prstGeom prst="rect">
+            <a:avLst/>
+          </a:prstGeom>
+          <a:noFill/>
+          <a:ln/>
+        </p:spPr>
+        <p:txBody>
+          <a:bodyPr wrap="square" lIns="0" tIns="0" rIns="0" bIns="0" rtlCol="0" anchor="ctr"/>
+          <a:lstStyle/>
+          <a:p>
+            <a:pPr algn="ctr" indent="0" marL="0">
+              <a:buNone/>
+            </a:pPr>
+            <a:r>
+              <a:rPr lang="en-US" sz="1300" b="1" dirty="0">
+                <a:solidFill>
+                  <a:srgbClr val="9D174D"/>
+                </a:solidFill>
+                <a:latin typeface="Trebuchet MS" pitchFamily="34" charset="0"/>
+                <a:ea typeface="Trebuchet MS" pitchFamily="34" charset="-122"/>
+                <a:cs typeface="Trebuchet MS" pitchFamily="34" charset="-120"/>
+              </a:rPr>
+              <a:t>ion</a:t>
+            </a:r>
+            <a:endParaRPr lang="en-US" sz="1300" dirty="0"/>
+          </a:p>
+        </p:txBody>
+      </p:sp>
+      <p:sp>
+        <p:nvSpPr>
+          <p:cNvPr id="24" name="Text 22"/>
+          <p:cNvSpPr/>
+          <p:nvPr/>
+        </p:nvSpPr>
+        <p:spPr>
+          <a:xfrm>
+            <a:off x="6519672" y="2569464"/>
+            <a:ext cx="1828800" cy="201168"/>
+          </a:xfrm>
+          <a:prstGeom prst="rect">
+            <a:avLst/>
+          </a:prstGeom>
+          <a:noFill/>
+          <a:ln/>
+        </p:spPr>
+        <p:txBody>
+          <a:bodyPr wrap="square" lIns="0" tIns="0" rIns="0" bIns="0" rtlCol="0" anchor="t"/>
+          <a:lstStyle/>
+          <a:p>
+            <a:pPr algn="ctr" indent="0" marL="0">
+              <a:buNone/>
+            </a:pPr>
+            <a:r>
+              <a:rPr lang="en-US" sz="850" dirty="0">
+                <a:solidFill>
+                  <a:srgbClr val="475569"/>
+                </a:solidFill>
+                <a:latin typeface="Calibri" pitchFamily="34" charset="0"/>
+                <a:ea typeface="Calibri" pitchFamily="34" charset="-122"/>
+                <a:cs typeface="Calibri" pitchFamily="34" charset="-120"/>
+              </a:rPr>
+              <a:t>act or process of</a:t>
+            </a:r>
+            <a:endParaRPr lang="en-US" sz="850" dirty="0"/>
+          </a:p>
+        </p:txBody>
+      </p:sp>
+      <p:sp>
+        <p:nvSpPr>
+          <p:cNvPr id="25" name="Shape 23"/>
           <p:cNvSpPr/>
           <p:nvPr/>
         </p:nvSpPr>
@@ -14151,7 +14297,7 @@
       </p:sp>
       <p:sp>
         <p:nvSpPr>
-          <p:cNvPr id="23" name="Text 21"/>
+          <p:cNvPr id="26" name="Text 24"/>
           <p:cNvSpPr/>
           <p:nvPr/>
         </p:nvSpPr>
@@ -14190,7 +14336,7 @@
       </p:sp>
       <p:sp>
         <p:nvSpPr>
-          <p:cNvPr id="24" name="Shape 22"/>
+          <p:cNvPr id="27" name="Shape 25"/>
           <p:cNvSpPr/>
           <p:nvPr/>
         </p:nvSpPr>
@@ -14217,13 +14363,13 @@
       </p:sp>
       <p:sp>
         <p:nvSpPr>
-          <p:cNvPr id="25" name="Shape 23"/>
-          <p:cNvSpPr/>
-          <p:nvPr/>
-        </p:nvSpPr>
-        <p:spPr>
-          <a:xfrm>
-            <a:off x="2999232" y="3364992"/>
+          <p:cNvPr id="28" name="Shape 26"/>
+          <p:cNvSpPr/>
+          <p:nvPr/>
+        </p:nvSpPr>
+        <p:spPr>
+          <a:xfrm>
+            <a:off x="2313432" y="3364992"/>
             <a:ext cx="1645920" cy="475488"/>
           </a:xfrm>
           <a:prstGeom prst="rect">
@@ -14244,13 +14390,13 @@
       </p:sp>
       <p:sp>
         <p:nvSpPr>
-          <p:cNvPr id="26" name="Text 24"/>
-          <p:cNvSpPr/>
-          <p:nvPr/>
-        </p:nvSpPr>
-        <p:spPr>
-          <a:xfrm>
-            <a:off x="2999232" y="3364992"/>
+          <p:cNvPr id="29" name="Text 27"/>
+          <p:cNvSpPr/>
+          <p:nvPr/>
+        </p:nvSpPr>
+        <p:spPr>
+          <a:xfrm>
+            <a:off x="2313432" y="3364992"/>
             <a:ext cx="1645920" cy="475488"/>
           </a:xfrm>
           <a:prstGeom prst="rect">
@@ -14275,7 +14421,7 @@
                 <a:ea typeface="Trebuchet MS" pitchFamily="34" charset="-122"/>
                 <a:cs typeface="Trebuchet MS" pitchFamily="34" charset="-120"/>
               </a:rPr>
-              <a:t>in</a:t>
+              <a:t>con</a:t>
             </a:r>
             <a:endParaRPr lang="en-US" sz="1400" dirty="0"/>
           </a:p>
@@ -14283,14 +14429,14 @@
       </p:sp>
       <p:sp>
         <p:nvSpPr>
-          <p:cNvPr id="27" name="Text 25"/>
-          <p:cNvSpPr/>
-          <p:nvPr/>
-        </p:nvSpPr>
-        <p:spPr>
-          <a:xfrm>
-            <a:off x="4645152" y="3364992"/>
-            <a:ext cx="1097280" cy="475488"/>
+          <p:cNvPr id="30" name="Text 28"/>
+          <p:cNvSpPr/>
+          <p:nvPr/>
+        </p:nvSpPr>
+        <p:spPr>
+          <a:xfrm>
+            <a:off x="3959352" y="3364992"/>
+            <a:ext cx="411480" cy="475488"/>
           </a:xfrm>
           <a:prstGeom prst="rect">
             <a:avLst/>
@@ -14322,13 +14468,13 @@
       </p:sp>
       <p:sp>
         <p:nvSpPr>
-          <p:cNvPr id="28" name="Shape 26"/>
-          <p:cNvSpPr/>
-          <p:nvPr/>
-        </p:nvSpPr>
-        <p:spPr>
-          <a:xfrm>
-            <a:off x="5742432" y="3364992"/>
+          <p:cNvPr id="31" name="Shape 29"/>
+          <p:cNvSpPr/>
+          <p:nvPr/>
+        </p:nvSpPr>
+        <p:spPr>
+          <a:xfrm>
+            <a:off x="4370832" y="3364992"/>
             <a:ext cx="1645920" cy="475488"/>
           </a:xfrm>
           <a:prstGeom prst="rect">
@@ -14349,13 +14495,13 @@
       </p:sp>
       <p:sp>
         <p:nvSpPr>
-          <p:cNvPr id="29" name="Text 27"/>
-          <p:cNvSpPr/>
-          <p:nvPr/>
-        </p:nvSpPr>
-        <p:spPr>
-          <a:xfrm>
-            <a:off x="5742432" y="3364992"/>
+          <p:cNvPr id="32" name="Text 30"/>
+          <p:cNvSpPr/>
+          <p:nvPr/>
+        </p:nvSpPr>
+        <p:spPr>
+          <a:xfrm>
+            <a:off x="4370832" y="3364992"/>
             <a:ext cx="1645920" cy="475488"/>
           </a:xfrm>
           <a:prstGeom prst="rect">
@@ -14380,7 +14526,7 @@
                 <a:ea typeface="Trebuchet MS" pitchFamily="34" charset="-122"/>
                 <a:cs typeface="Trebuchet MS" pitchFamily="34" charset="-120"/>
               </a:rPr>
-              <a:t>duct</a:t>
+              <a:t>duc</a:t>
             </a:r>
             <a:endParaRPr lang="en-US" sz="1400" dirty="0"/>
           </a:p>
@@ -14388,7 +14534,112 @@
       </p:sp>
       <p:sp>
         <p:nvSpPr>
-          <p:cNvPr id="30" name="Shape 28"/>
+          <p:cNvPr id="33" name="Text 31"/>
+          <p:cNvSpPr/>
+          <p:nvPr/>
+        </p:nvSpPr>
+        <p:spPr>
+          <a:xfrm>
+            <a:off x="6016752" y="3364992"/>
+            <a:ext cx="411480" cy="475488"/>
+          </a:xfrm>
+          <a:prstGeom prst="rect">
+            <a:avLst/>
+          </a:prstGeom>
+          <a:noFill/>
+          <a:ln/>
+        </p:spPr>
+        <p:txBody>
+          <a:bodyPr wrap="square" lIns="0" tIns="0" rIns="0" bIns="0" rtlCol="0" anchor="ctr"/>
+          <a:lstStyle/>
+          <a:p>
+            <a:pPr algn="ctr" indent="0" marL="0">
+              <a:buNone/>
+            </a:pPr>
+            <a:r>
+              <a:rPr lang="en-US" sz="1600" b="1" dirty="0">
+                <a:solidFill>
+                  <a:srgbClr val="0D9488"/>
+                </a:solidFill>
+                <a:latin typeface="Trebuchet MS" pitchFamily="34" charset="0"/>
+                <a:ea typeface="Trebuchet MS" pitchFamily="34" charset="-122"/>
+                <a:cs typeface="Trebuchet MS" pitchFamily="34" charset="-120"/>
+              </a:rPr>
+              <a:t>·</a:t>
+            </a:r>
+            <a:endParaRPr lang="en-US" sz="1600" dirty="0"/>
+          </a:p>
+        </p:txBody>
+      </p:sp>
+      <p:sp>
+        <p:nvSpPr>
+          <p:cNvPr id="34" name="Shape 32"/>
+          <p:cNvSpPr/>
+          <p:nvPr/>
+        </p:nvSpPr>
+        <p:spPr>
+          <a:xfrm>
+            <a:off x="6428232" y="3364992"/>
+            <a:ext cx="1645920" cy="475488"/>
+          </a:xfrm>
+          <a:prstGeom prst="rect">
+            <a:avLst>
+              <a:gd name="adj" fmla="val 9615"/>
+            </a:avLst>
+          </a:prstGeom>
+          <a:solidFill>
+            <a:srgbClr val="FFFFFF"/>
+          </a:solidFill>
+          <a:ln w="12700">
+            <a:solidFill>
+              <a:srgbClr val="0D9488"/>
+            </a:solidFill>
+            <a:prstDash val="solid"/>
+          </a:ln>
+        </p:spPr>
+      </p:sp>
+      <p:sp>
+        <p:nvSpPr>
+          <p:cNvPr id="35" name="Text 33"/>
+          <p:cNvSpPr/>
+          <p:nvPr/>
+        </p:nvSpPr>
+        <p:spPr>
+          <a:xfrm>
+            <a:off x="6428232" y="3364992"/>
+            <a:ext cx="1645920" cy="475488"/>
+          </a:xfrm>
+          <a:prstGeom prst="rect">
+            <a:avLst/>
+          </a:prstGeom>
+          <a:noFill/>
+          <a:ln/>
+        </p:spPr>
+        <p:txBody>
+          <a:bodyPr wrap="square" lIns="0" tIns="0" rIns="0" bIns="0" rtlCol="0" anchor="ctr"/>
+          <a:lstStyle/>
+          <a:p>
+            <a:pPr algn="ctr" indent="0" marL="0">
+              <a:buNone/>
+            </a:pPr>
+            <a:r>
+              <a:rPr lang="en-US" sz="1400" b="1" dirty="0">
+                <a:solidFill>
+                  <a:srgbClr val="0D9488"/>
+                </a:solidFill>
+                <a:latin typeface="Trebuchet MS" pitchFamily="34" charset="0"/>
+                <a:ea typeface="Trebuchet MS" pitchFamily="34" charset="-122"/>
+                <a:cs typeface="Trebuchet MS" pitchFamily="34" charset="-120"/>
+              </a:rPr>
+              <a:t>tion</a:t>
+            </a:r>
+            <a:endParaRPr lang="en-US" sz="1400" dirty="0"/>
+          </a:p>
+        </p:txBody>
+      </p:sp>
+      <p:sp>
+        <p:nvSpPr>
+          <p:cNvPr id="36" name="Shape 34"/>
           <p:cNvSpPr/>
           <p:nvPr/>
         </p:nvSpPr>
@@ -14415,7 +14666,7 @@
       </p:sp>
       <p:sp>
         <p:nvSpPr>
-          <p:cNvPr id="31" name="Text 29"/>
+          <p:cNvPr id="37" name="Text 35"/>
           <p:cNvSpPr/>
           <p:nvPr/>
         </p:nvSpPr>
@@ -14454,7 +14705,7 @@
       </p:sp>
       <p:sp>
         <p:nvSpPr>
-          <p:cNvPr id="32" name="Shape 30"/>
+          <p:cNvPr id="38" name="Shape 36"/>
           <p:cNvSpPr/>
           <p:nvPr/>
         </p:nvSpPr>
@@ -14481,7 +14732,7 @@
       </p:sp>
       <p:sp>
         <p:nvSpPr>
-          <p:cNvPr id="33" name="Text 31"/>
+          <p:cNvPr id="39" name="Text 37"/>
           <p:cNvSpPr/>
           <p:nvPr/>
         </p:nvSpPr>
@@ -14713,7 +14964,7 @@
                 <a:ea typeface="Calibri" pitchFamily="34" charset="-122"/>
                 <a:cs typeface="Calibri" pitchFamily="34" charset="-120"/>
               </a:rPr>
-              <a:t>Root 'duct' — to lead or carry</a:t>
+              <a:t>Root 'duct' — to lead or bring</a:t>
             </a:r>
             <a:endParaRPr lang="en-US" sz="1600" dirty="0"/>
           </a:p>
@@ -15069,7 +15320,7 @@
                 <a:ea typeface="Calibri" pitchFamily="34" charset="-122"/>
                 <a:cs typeface="Calibri" pitchFamily="34" charset="-120"/>
               </a:rPr>
-              <a:t>Word Labs  •  wordlabs.app  •  Root: 'duct' = to lead or carry</a:t>
+              <a:t>Word Labs  •  wordlabs.app  •  Root: 'duct' = to lead or bring</a:t>
             </a:r>
             <a:endParaRPr lang="en-US" sz="800" dirty="0"/>
           </a:p>
@@ -15208,7 +15459,7 @@
                 <a:ea typeface="Trebuchet MS" pitchFamily="34" charset="-122"/>
                 <a:cs typeface="Trebuchet MS" pitchFamily="34" charset="-120"/>
               </a:rPr>
-              <a:t>induct</a:t>
+              <a:t>conduction</a:t>
             </a:r>
             <a:endParaRPr lang="en-US" sz="2800" dirty="0"/>
           </a:p>
@@ -15288,7 +15539,7 @@
         </p:nvSpPr>
         <p:spPr>
           <a:xfrm>
-            <a:off x="2938272" y="2258568"/>
+            <a:off x="2221992" y="2258568"/>
             <a:ext cx="1828800" cy="292608"/>
           </a:xfrm>
           <a:prstGeom prst="rect">
@@ -15322,7 +15573,7 @@
         </p:nvSpPr>
         <p:spPr>
           <a:xfrm>
-            <a:off x="2938272" y="2258568"/>
+            <a:off x="2221992" y="2258568"/>
             <a:ext cx="1828800" cy="292608"/>
           </a:xfrm>
           <a:prstGeom prst="rect">
@@ -15347,7 +15598,7 @@
                 <a:ea typeface="Trebuchet MS" pitchFamily="34" charset="-122"/>
                 <a:cs typeface="Trebuchet MS" pitchFamily="34" charset="-120"/>
               </a:rPr>
-              <a:t>in</a:t>
+              <a:t>con</a:t>
             </a:r>
             <a:endParaRPr lang="en-US" sz="1300" dirty="0"/>
           </a:p>
@@ -15361,7 +15612,7 @@
         </p:nvSpPr>
         <p:spPr>
           <a:xfrm>
-            <a:off x="2938272" y="2569464"/>
+            <a:off x="2221992" y="2569464"/>
             <a:ext cx="1828800" cy="201168"/>
           </a:xfrm>
           <a:prstGeom prst="rect">
@@ -15386,7 +15637,7 @@
                 <a:ea typeface="Calibri" pitchFamily="34" charset="-122"/>
                 <a:cs typeface="Calibri" pitchFamily="34" charset="-120"/>
               </a:rPr>
-              <a:t>into</a:t>
+              <a:t>together, with</a:t>
             </a:r>
             <a:endParaRPr lang="en-US" sz="850" dirty="0"/>
           </a:p>
@@ -15400,7 +15651,7 @@
         </p:nvSpPr>
         <p:spPr>
           <a:xfrm>
-            <a:off x="5803392" y="2258568"/>
+            <a:off x="4370832" y="2258568"/>
             <a:ext cx="1828800" cy="292608"/>
           </a:xfrm>
           <a:prstGeom prst="rect">
@@ -15434,7 +15685,7 @@
         </p:nvSpPr>
         <p:spPr>
           <a:xfrm>
-            <a:off x="5803392" y="2258568"/>
+            <a:off x="4370832" y="2258568"/>
             <a:ext cx="1828800" cy="292608"/>
           </a:xfrm>
           <a:prstGeom prst="rect">
@@ -15473,7 +15724,7 @@
         </p:nvSpPr>
         <p:spPr>
           <a:xfrm>
-            <a:off x="5803392" y="2569464"/>
+            <a:off x="4370832" y="2569464"/>
             <a:ext cx="1828800" cy="201168"/>
           </a:xfrm>
           <a:prstGeom prst="rect">
@@ -15498,7 +15749,7 @@
                 <a:ea typeface="Calibri" pitchFamily="34" charset="-122"/>
                 <a:cs typeface="Calibri" pitchFamily="34" charset="-120"/>
               </a:rPr>
-              <a:t>to lead or carry</a:t>
+              <a:t>to lead</a:t>
             </a:r>
             <a:endParaRPr lang="en-US" sz="850" dirty="0"/>
           </a:p>
@@ -15507,6 +15758,118 @@
       <p:sp>
         <p:nvSpPr>
           <p:cNvPr id="22" name="Shape 20"/>
+          <p:cNvSpPr/>
+          <p:nvPr/>
+        </p:nvSpPr>
+        <p:spPr>
+          <a:xfrm>
+            <a:off x="6519672" y="2258568"/>
+            <a:ext cx="1828800" cy="292608"/>
+          </a:xfrm>
+          <a:prstGeom prst="rect">
+            <a:avLst>
+              <a:gd name="adj" fmla="val 25000"/>
+            </a:avLst>
+          </a:prstGeom>
+          <a:solidFill>
+            <a:srgbClr val="FCE7F3"/>
+          </a:solidFill>
+          <a:ln w="19050">
+            <a:solidFill>
+              <a:srgbClr val="DB2777"/>
+            </a:solidFill>
+            <a:prstDash val="solid"/>
+          </a:ln>
+          <a:effectLst>
+            <a:outerShdw sx="100000" sy="100000" kx="0" ky="0" algn="bl" rotWithShape="0" blurRad="101600" dist="38100" dir="8100000">
+              <a:srgbClr val="000000">
+                <a:alpha val="12000"/>
+              </a:srgbClr>
+            </a:outerShdw>
+          </a:effectLst>
+        </p:spPr>
+      </p:sp>
+      <p:sp>
+        <p:nvSpPr>
+          <p:cNvPr id="23" name="Text 21"/>
+          <p:cNvSpPr/>
+          <p:nvPr/>
+        </p:nvSpPr>
+        <p:spPr>
+          <a:xfrm>
+            <a:off x="6519672" y="2258568"/>
+            <a:ext cx="1828800" cy="292608"/>
+          </a:xfrm>
+          <a:prstGeom prst="rect">
+            <a:avLst/>
+          </a:prstGeom>
+          <a:noFill/>
+          <a:ln/>
+        </p:spPr>
+        <p:txBody>
+          <a:bodyPr wrap="square" lIns="0" tIns="0" rIns="0" bIns="0" rtlCol="0" anchor="ctr"/>
+          <a:lstStyle/>
+          <a:p>
+            <a:pPr algn="ctr" indent="0" marL="0">
+              <a:buNone/>
+            </a:pPr>
+            <a:r>
+              <a:rPr lang="en-US" sz="1300" b="1" dirty="0">
+                <a:solidFill>
+                  <a:srgbClr val="9D174D"/>
+                </a:solidFill>
+                <a:latin typeface="Trebuchet MS" pitchFamily="34" charset="0"/>
+                <a:ea typeface="Trebuchet MS" pitchFamily="34" charset="-122"/>
+                <a:cs typeface="Trebuchet MS" pitchFamily="34" charset="-120"/>
+              </a:rPr>
+              <a:t>ion</a:t>
+            </a:r>
+            <a:endParaRPr lang="en-US" sz="1300" dirty="0"/>
+          </a:p>
+        </p:txBody>
+      </p:sp>
+      <p:sp>
+        <p:nvSpPr>
+          <p:cNvPr id="24" name="Text 22"/>
+          <p:cNvSpPr/>
+          <p:nvPr/>
+        </p:nvSpPr>
+        <p:spPr>
+          <a:xfrm>
+            <a:off x="6519672" y="2569464"/>
+            <a:ext cx="1828800" cy="201168"/>
+          </a:xfrm>
+          <a:prstGeom prst="rect">
+            <a:avLst/>
+          </a:prstGeom>
+          <a:noFill/>
+          <a:ln/>
+        </p:spPr>
+        <p:txBody>
+          <a:bodyPr wrap="square" lIns="0" tIns="0" rIns="0" bIns="0" rtlCol="0" anchor="t"/>
+          <a:lstStyle/>
+          <a:p>
+            <a:pPr algn="ctr" indent="0" marL="0">
+              <a:buNone/>
+            </a:pPr>
+            <a:r>
+              <a:rPr lang="en-US" sz="850" dirty="0">
+                <a:solidFill>
+                  <a:srgbClr val="475569"/>
+                </a:solidFill>
+                <a:latin typeface="Calibri" pitchFamily="34" charset="0"/>
+                <a:ea typeface="Calibri" pitchFamily="34" charset="-122"/>
+                <a:cs typeface="Calibri" pitchFamily="34" charset="-120"/>
+              </a:rPr>
+              <a:t>act or process of</a:t>
+            </a:r>
+            <a:endParaRPr lang="en-US" sz="850" dirty="0"/>
+          </a:p>
+        </p:txBody>
+      </p:sp>
+      <p:sp>
+        <p:nvSpPr>
+          <p:cNvPr id="25" name="Shape 23"/>
           <p:cNvSpPr/>
           <p:nvPr/>
         </p:nvSpPr>
@@ -15533,7 +15896,7 @@
       </p:sp>
       <p:sp>
         <p:nvSpPr>
-          <p:cNvPr id="23" name="Text 21"/>
+          <p:cNvPr id="26" name="Text 24"/>
           <p:cNvSpPr/>
           <p:nvPr/>
         </p:nvSpPr>
@@ -15572,7 +15935,7 @@
       </p:sp>
       <p:sp>
         <p:nvSpPr>
-          <p:cNvPr id="24" name="Shape 22"/>
+          <p:cNvPr id="27" name="Shape 25"/>
           <p:cNvSpPr/>
           <p:nvPr/>
         </p:nvSpPr>
@@ -15599,13 +15962,13 @@
       </p:sp>
       <p:sp>
         <p:nvSpPr>
-          <p:cNvPr id="25" name="Shape 23"/>
-          <p:cNvSpPr/>
-          <p:nvPr/>
-        </p:nvSpPr>
-        <p:spPr>
-          <a:xfrm>
-            <a:off x="2999232" y="3364992"/>
+          <p:cNvPr id="28" name="Shape 26"/>
+          <p:cNvSpPr/>
+          <p:nvPr/>
+        </p:nvSpPr>
+        <p:spPr>
+          <a:xfrm>
+            <a:off x="2313432" y="3364992"/>
             <a:ext cx="1645920" cy="475488"/>
           </a:xfrm>
           <a:prstGeom prst="rect">
@@ -15626,13 +15989,13 @@
       </p:sp>
       <p:sp>
         <p:nvSpPr>
-          <p:cNvPr id="26" name="Text 24"/>
-          <p:cNvSpPr/>
-          <p:nvPr/>
-        </p:nvSpPr>
-        <p:spPr>
-          <a:xfrm>
-            <a:off x="2999232" y="3364992"/>
+          <p:cNvPr id="29" name="Text 27"/>
+          <p:cNvSpPr/>
+          <p:nvPr/>
+        </p:nvSpPr>
+        <p:spPr>
+          <a:xfrm>
+            <a:off x="2313432" y="3364992"/>
             <a:ext cx="1645920" cy="475488"/>
           </a:xfrm>
           <a:prstGeom prst="rect">
@@ -15657,7 +16020,7 @@
                 <a:ea typeface="Trebuchet MS" pitchFamily="34" charset="-122"/>
                 <a:cs typeface="Trebuchet MS" pitchFamily="34" charset="-120"/>
               </a:rPr>
-              <a:t>in</a:t>
+              <a:t>con</a:t>
             </a:r>
             <a:endParaRPr lang="en-US" sz="1400" dirty="0"/>
           </a:p>
@@ -15665,14 +16028,14 @@
       </p:sp>
       <p:sp>
         <p:nvSpPr>
-          <p:cNvPr id="27" name="Text 25"/>
-          <p:cNvSpPr/>
-          <p:nvPr/>
-        </p:nvSpPr>
-        <p:spPr>
-          <a:xfrm>
-            <a:off x="4645152" y="3364992"/>
-            <a:ext cx="1097280" cy="475488"/>
+          <p:cNvPr id="30" name="Text 28"/>
+          <p:cNvSpPr/>
+          <p:nvPr/>
+        </p:nvSpPr>
+        <p:spPr>
+          <a:xfrm>
+            <a:off x="3959352" y="3364992"/>
+            <a:ext cx="411480" cy="475488"/>
           </a:xfrm>
           <a:prstGeom prst="rect">
             <a:avLst/>
@@ -15704,13 +16067,13 @@
       </p:sp>
       <p:sp>
         <p:nvSpPr>
-          <p:cNvPr id="28" name="Shape 26"/>
-          <p:cNvSpPr/>
-          <p:nvPr/>
-        </p:nvSpPr>
-        <p:spPr>
-          <a:xfrm>
-            <a:off x="5742432" y="3364992"/>
+          <p:cNvPr id="31" name="Shape 29"/>
+          <p:cNvSpPr/>
+          <p:nvPr/>
+        </p:nvSpPr>
+        <p:spPr>
+          <a:xfrm>
+            <a:off x="4370832" y="3364992"/>
             <a:ext cx="1645920" cy="475488"/>
           </a:xfrm>
           <a:prstGeom prst="rect">
@@ -15731,13 +16094,13 @@
       </p:sp>
       <p:sp>
         <p:nvSpPr>
-          <p:cNvPr id="29" name="Text 27"/>
-          <p:cNvSpPr/>
-          <p:nvPr/>
-        </p:nvSpPr>
-        <p:spPr>
-          <a:xfrm>
-            <a:off x="5742432" y="3364992"/>
+          <p:cNvPr id="32" name="Text 30"/>
+          <p:cNvSpPr/>
+          <p:nvPr/>
+        </p:nvSpPr>
+        <p:spPr>
+          <a:xfrm>
+            <a:off x="4370832" y="3364992"/>
             <a:ext cx="1645920" cy="475488"/>
           </a:xfrm>
           <a:prstGeom prst="rect">
@@ -15762,7 +16125,7 @@
                 <a:ea typeface="Trebuchet MS" pitchFamily="34" charset="-122"/>
                 <a:cs typeface="Trebuchet MS" pitchFamily="34" charset="-120"/>
               </a:rPr>
-              <a:t>duct</a:t>
+              <a:t>duc</a:t>
             </a:r>
             <a:endParaRPr lang="en-US" sz="1400" dirty="0"/>
           </a:p>
@@ -15770,7 +16133,112 @@
       </p:sp>
       <p:sp>
         <p:nvSpPr>
-          <p:cNvPr id="30" name="Shape 28"/>
+          <p:cNvPr id="33" name="Text 31"/>
+          <p:cNvSpPr/>
+          <p:nvPr/>
+        </p:nvSpPr>
+        <p:spPr>
+          <a:xfrm>
+            <a:off x="6016752" y="3364992"/>
+            <a:ext cx="411480" cy="475488"/>
+          </a:xfrm>
+          <a:prstGeom prst="rect">
+            <a:avLst/>
+          </a:prstGeom>
+          <a:noFill/>
+          <a:ln/>
+        </p:spPr>
+        <p:txBody>
+          <a:bodyPr wrap="square" lIns="0" tIns="0" rIns="0" bIns="0" rtlCol="0" anchor="ctr"/>
+          <a:lstStyle/>
+          <a:p>
+            <a:pPr algn="ctr" indent="0" marL="0">
+              <a:buNone/>
+            </a:pPr>
+            <a:r>
+              <a:rPr lang="en-US" sz="1600" b="1" dirty="0">
+                <a:solidFill>
+                  <a:srgbClr val="0D9488"/>
+                </a:solidFill>
+                <a:latin typeface="Trebuchet MS" pitchFamily="34" charset="0"/>
+                <a:ea typeface="Trebuchet MS" pitchFamily="34" charset="-122"/>
+                <a:cs typeface="Trebuchet MS" pitchFamily="34" charset="-120"/>
+              </a:rPr>
+              <a:t>·</a:t>
+            </a:r>
+            <a:endParaRPr lang="en-US" sz="1600" dirty="0"/>
+          </a:p>
+        </p:txBody>
+      </p:sp>
+      <p:sp>
+        <p:nvSpPr>
+          <p:cNvPr id="34" name="Shape 32"/>
+          <p:cNvSpPr/>
+          <p:nvPr/>
+        </p:nvSpPr>
+        <p:spPr>
+          <a:xfrm>
+            <a:off x="6428232" y="3364992"/>
+            <a:ext cx="1645920" cy="475488"/>
+          </a:xfrm>
+          <a:prstGeom prst="rect">
+            <a:avLst>
+              <a:gd name="adj" fmla="val 9615"/>
+            </a:avLst>
+          </a:prstGeom>
+          <a:solidFill>
+            <a:srgbClr val="FFFFFF"/>
+          </a:solidFill>
+          <a:ln w="12700">
+            <a:solidFill>
+              <a:srgbClr val="0D9488"/>
+            </a:solidFill>
+            <a:prstDash val="solid"/>
+          </a:ln>
+        </p:spPr>
+      </p:sp>
+      <p:sp>
+        <p:nvSpPr>
+          <p:cNvPr id="35" name="Text 33"/>
+          <p:cNvSpPr/>
+          <p:nvPr/>
+        </p:nvSpPr>
+        <p:spPr>
+          <a:xfrm>
+            <a:off x="6428232" y="3364992"/>
+            <a:ext cx="1645920" cy="475488"/>
+          </a:xfrm>
+          <a:prstGeom prst="rect">
+            <a:avLst/>
+          </a:prstGeom>
+          <a:noFill/>
+          <a:ln/>
+        </p:spPr>
+        <p:txBody>
+          <a:bodyPr wrap="square" lIns="0" tIns="0" rIns="0" bIns="0" rtlCol="0" anchor="ctr"/>
+          <a:lstStyle/>
+          <a:p>
+            <a:pPr algn="ctr" indent="0" marL="0">
+              <a:buNone/>
+            </a:pPr>
+            <a:r>
+              <a:rPr lang="en-US" sz="1400" b="1" dirty="0">
+                <a:solidFill>
+                  <a:srgbClr val="0D9488"/>
+                </a:solidFill>
+                <a:latin typeface="Trebuchet MS" pitchFamily="34" charset="0"/>
+                <a:ea typeface="Trebuchet MS" pitchFamily="34" charset="-122"/>
+                <a:cs typeface="Trebuchet MS" pitchFamily="34" charset="-120"/>
+              </a:rPr>
+              <a:t>tion</a:t>
+            </a:r>
+            <a:endParaRPr lang="en-US" sz="1400" dirty="0"/>
+          </a:p>
+        </p:txBody>
+      </p:sp>
+      <p:sp>
+        <p:nvSpPr>
+          <p:cNvPr id="36" name="Shape 34"/>
           <p:cNvSpPr/>
           <p:nvPr/>
         </p:nvSpPr>
@@ -15797,7 +16265,7 @@
       </p:sp>
       <p:sp>
         <p:nvSpPr>
-          <p:cNvPr id="31" name="Text 29"/>
+          <p:cNvPr id="37" name="Text 35"/>
           <p:cNvSpPr/>
           <p:nvPr/>
         </p:nvSpPr>
@@ -15836,7 +16304,7 @@
       </p:sp>
       <p:sp>
         <p:nvSpPr>
-          <p:cNvPr id="32" name="Shape 30"/>
+          <p:cNvPr id="38" name="Shape 36"/>
           <p:cNvSpPr/>
           <p:nvPr/>
         </p:nvSpPr>
@@ -15863,14 +16331,14 @@
       </p:sp>
       <p:sp>
         <p:nvSpPr>
-          <p:cNvPr id="33" name="Shape 31"/>
-          <p:cNvSpPr/>
-          <p:nvPr/>
-        </p:nvSpPr>
-        <p:spPr>
-          <a:xfrm>
-            <a:off x="2254649" y="4169664"/>
-            <a:ext cx="685800" cy="384048"/>
+          <p:cNvPr id="39" name="Shape 37"/>
+          <p:cNvSpPr/>
+          <p:nvPr/>
+        </p:nvSpPr>
+        <p:spPr>
+          <a:xfrm>
+            <a:off x="1951330" y="4169664"/>
+            <a:ext cx="676656" cy="384048"/>
           </a:xfrm>
           <a:prstGeom prst="rect">
             <a:avLst>
@@ -15890,14 +16358,14 @@
       </p:sp>
       <p:sp>
         <p:nvSpPr>
-          <p:cNvPr id="34" name="Text 32"/>
-          <p:cNvSpPr/>
-          <p:nvPr/>
-        </p:nvSpPr>
-        <p:spPr>
-          <a:xfrm>
-            <a:off x="2254649" y="4169664"/>
-            <a:ext cx="685800" cy="384048"/>
+          <p:cNvPr id="40" name="Text 38"/>
+          <p:cNvSpPr/>
+          <p:nvPr/>
+        </p:nvSpPr>
+        <p:spPr>
+          <a:xfrm>
+            <a:off x="1951330" y="4169664"/>
+            <a:ext cx="676656" cy="384048"/>
           </a:xfrm>
           <a:prstGeom prst="rect">
             <a:avLst/>
@@ -15921,7 +16389,7 @@
                 <a:ea typeface="Trebuchet MS" pitchFamily="34" charset="-122"/>
                 <a:cs typeface="Trebuchet MS" pitchFamily="34" charset="-120"/>
               </a:rPr>
-              <a:t>i</a:t>
+              <a:t>c</a:t>
             </a:r>
             <a:endParaRPr lang="en-US" sz="900" dirty="0"/>
           </a:p>
@@ -15929,14 +16397,14 @@
       </p:sp>
       <p:sp>
         <p:nvSpPr>
-          <p:cNvPr id="35" name="Shape 33"/>
-          <p:cNvSpPr/>
-          <p:nvPr/>
-        </p:nvSpPr>
-        <p:spPr>
-          <a:xfrm>
-            <a:off x="3293146" y="4169664"/>
-            <a:ext cx="685800" cy="384048"/>
+          <p:cNvPr id="41" name="Shape 39"/>
+          <p:cNvSpPr/>
+          <p:nvPr/>
+        </p:nvSpPr>
+        <p:spPr>
+          <a:xfrm>
+            <a:off x="2677363" y="4169664"/>
+            <a:ext cx="676656" cy="384048"/>
           </a:xfrm>
           <a:prstGeom prst="rect">
             <a:avLst>
@@ -15956,14 +16424,14 @@
       </p:sp>
       <p:sp>
         <p:nvSpPr>
-          <p:cNvPr id="36" name="Text 34"/>
-          <p:cNvSpPr/>
-          <p:nvPr/>
-        </p:nvSpPr>
-        <p:spPr>
-          <a:xfrm>
-            <a:off x="3293146" y="4169664"/>
-            <a:ext cx="685800" cy="384048"/>
+          <p:cNvPr id="42" name="Text 40"/>
+          <p:cNvSpPr/>
+          <p:nvPr/>
+        </p:nvSpPr>
+        <p:spPr>
+          <a:xfrm>
+            <a:off x="2677363" y="4169664"/>
+            <a:ext cx="676656" cy="384048"/>
           </a:xfrm>
           <a:prstGeom prst="rect">
             <a:avLst/>
@@ -15987,7 +16455,7 @@
                 <a:ea typeface="Trebuchet MS" pitchFamily="34" charset="-122"/>
                 <a:cs typeface="Trebuchet MS" pitchFamily="34" charset="-120"/>
               </a:rPr>
-              <a:t>n</a:t>
+              <a:t>o</a:t>
             </a:r>
             <a:endParaRPr lang="en-US" sz="900" dirty="0"/>
           </a:p>
@@ -15995,14 +16463,14 @@
       </p:sp>
       <p:sp>
         <p:nvSpPr>
-          <p:cNvPr id="37" name="Shape 35"/>
-          <p:cNvSpPr/>
-          <p:nvPr/>
-        </p:nvSpPr>
-        <p:spPr>
-          <a:xfrm>
-            <a:off x="4331643" y="4169664"/>
-            <a:ext cx="685800" cy="384048"/>
+          <p:cNvPr id="43" name="Shape 41"/>
+          <p:cNvSpPr/>
+          <p:nvPr/>
+        </p:nvSpPr>
+        <p:spPr>
+          <a:xfrm>
+            <a:off x="3403397" y="4169664"/>
+            <a:ext cx="676656" cy="384048"/>
           </a:xfrm>
           <a:prstGeom prst="rect">
             <a:avLst>
@@ -16022,14 +16490,14 @@
       </p:sp>
       <p:sp>
         <p:nvSpPr>
-          <p:cNvPr id="38" name="Text 36"/>
-          <p:cNvSpPr/>
-          <p:nvPr/>
-        </p:nvSpPr>
-        <p:spPr>
-          <a:xfrm>
-            <a:off x="4331643" y="4169664"/>
-            <a:ext cx="685800" cy="384048"/>
+          <p:cNvPr id="44" name="Text 42"/>
+          <p:cNvSpPr/>
+          <p:nvPr/>
+        </p:nvSpPr>
+        <p:spPr>
+          <a:xfrm>
+            <a:off x="3403397" y="4169664"/>
+            <a:ext cx="676656" cy="384048"/>
           </a:xfrm>
           <a:prstGeom prst="rect">
             <a:avLst/>
@@ -16053,7 +16521,7 @@
                 <a:ea typeface="Trebuchet MS" pitchFamily="34" charset="-122"/>
                 <a:cs typeface="Trebuchet MS" pitchFamily="34" charset="-120"/>
               </a:rPr>
-              <a:t>d</a:t>
+              <a:t>n</a:t>
             </a:r>
             <a:endParaRPr lang="en-US" sz="900" dirty="0"/>
           </a:p>
@@ -16061,14 +16529,14 @@
       </p:sp>
       <p:sp>
         <p:nvSpPr>
-          <p:cNvPr id="39" name="Shape 37"/>
-          <p:cNvSpPr/>
-          <p:nvPr/>
-        </p:nvSpPr>
-        <p:spPr>
-          <a:xfrm>
-            <a:off x="5370141" y="4169664"/>
-            <a:ext cx="685800" cy="384048"/>
+          <p:cNvPr id="45" name="Shape 43"/>
+          <p:cNvSpPr/>
+          <p:nvPr/>
+        </p:nvSpPr>
+        <p:spPr>
+          <a:xfrm>
+            <a:off x="4129430" y="4169664"/>
+            <a:ext cx="676656" cy="384048"/>
           </a:xfrm>
           <a:prstGeom prst="rect">
             <a:avLst>
@@ -16088,14 +16556,14 @@
       </p:sp>
       <p:sp>
         <p:nvSpPr>
-          <p:cNvPr id="40" name="Text 38"/>
-          <p:cNvSpPr/>
-          <p:nvPr/>
-        </p:nvSpPr>
-        <p:spPr>
-          <a:xfrm>
-            <a:off x="5370141" y="4169664"/>
-            <a:ext cx="685800" cy="384048"/>
+          <p:cNvPr id="46" name="Text 44"/>
+          <p:cNvSpPr/>
+          <p:nvPr/>
+        </p:nvSpPr>
+        <p:spPr>
+          <a:xfrm>
+            <a:off x="4129430" y="4169664"/>
+            <a:ext cx="676656" cy="384048"/>
           </a:xfrm>
           <a:prstGeom prst="rect">
             <a:avLst/>
@@ -16119,7 +16587,7 @@
                 <a:ea typeface="Trebuchet MS" pitchFamily="34" charset="-122"/>
                 <a:cs typeface="Trebuchet MS" pitchFamily="34" charset="-120"/>
               </a:rPr>
-              <a:t>u</a:t>
+              <a:t>d</a:t>
             </a:r>
             <a:endParaRPr lang="en-US" sz="900" dirty="0"/>
           </a:p>
@@ -16127,14 +16595,14 @@
       </p:sp>
       <p:sp>
         <p:nvSpPr>
-          <p:cNvPr id="41" name="Shape 39"/>
-          <p:cNvSpPr/>
-          <p:nvPr/>
-        </p:nvSpPr>
-        <p:spPr>
-          <a:xfrm>
-            <a:off x="6408638" y="4169664"/>
-            <a:ext cx="685800" cy="384048"/>
+          <p:cNvPr id="47" name="Shape 45"/>
+          <p:cNvSpPr/>
+          <p:nvPr/>
+        </p:nvSpPr>
+        <p:spPr>
+          <a:xfrm>
+            <a:off x="4855464" y="4169664"/>
+            <a:ext cx="676656" cy="384048"/>
           </a:xfrm>
           <a:prstGeom prst="rect">
             <a:avLst>
@@ -16154,14 +16622,14 @@
       </p:sp>
       <p:sp>
         <p:nvSpPr>
-          <p:cNvPr id="42" name="Text 40"/>
-          <p:cNvSpPr/>
-          <p:nvPr/>
-        </p:nvSpPr>
-        <p:spPr>
-          <a:xfrm>
-            <a:off x="6408638" y="4169664"/>
-            <a:ext cx="685800" cy="384048"/>
+          <p:cNvPr id="48" name="Text 46"/>
+          <p:cNvSpPr/>
+          <p:nvPr/>
+        </p:nvSpPr>
+        <p:spPr>
+          <a:xfrm>
+            <a:off x="4855464" y="4169664"/>
+            <a:ext cx="676656" cy="384048"/>
           </a:xfrm>
           <a:prstGeom prst="rect">
             <a:avLst/>
@@ -16185,6 +16653,72 @@
                 <a:ea typeface="Trebuchet MS" pitchFamily="34" charset="-122"/>
                 <a:cs typeface="Trebuchet MS" pitchFamily="34" charset="-120"/>
               </a:rPr>
+              <a:t>u</a:t>
+            </a:r>
+            <a:endParaRPr lang="en-US" sz="900" dirty="0"/>
+          </a:p>
+        </p:txBody>
+      </p:sp>
+      <p:sp>
+        <p:nvSpPr>
+          <p:cNvPr id="49" name="Shape 47"/>
+          <p:cNvSpPr/>
+          <p:nvPr/>
+        </p:nvSpPr>
+        <p:spPr>
+          <a:xfrm>
+            <a:off x="5581498" y="4169664"/>
+            <a:ext cx="676656" cy="384048"/>
+          </a:xfrm>
+          <a:prstGeom prst="rect">
+            <a:avLst>
+              <a:gd name="adj" fmla="val 9524"/>
+            </a:avLst>
+          </a:prstGeom>
+          <a:solidFill>
+            <a:srgbClr val="FFFFFF"/>
+          </a:solidFill>
+          <a:ln w="12700">
+            <a:solidFill>
+              <a:srgbClr val="DB2777"/>
+            </a:solidFill>
+            <a:prstDash val="solid"/>
+          </a:ln>
+        </p:spPr>
+      </p:sp>
+      <p:sp>
+        <p:nvSpPr>
+          <p:cNvPr id="50" name="Text 48"/>
+          <p:cNvSpPr/>
+          <p:nvPr/>
+        </p:nvSpPr>
+        <p:spPr>
+          <a:xfrm>
+            <a:off x="5581498" y="4169664"/>
+            <a:ext cx="676656" cy="384048"/>
+          </a:xfrm>
+          <a:prstGeom prst="rect">
+            <a:avLst/>
+          </a:prstGeom>
+          <a:noFill/>
+          <a:ln/>
+        </p:spPr>
+        <p:txBody>
+          <a:bodyPr wrap="square" lIns="0" tIns="0" rIns="0" bIns="0" rtlCol="0" anchor="ctr"/>
+          <a:lstStyle/>
+          <a:p>
+            <a:pPr algn="ctr" indent="0" marL="0">
+              <a:buNone/>
+            </a:pPr>
+            <a:r>
+              <a:rPr lang="en-US" sz="900" b="1" dirty="0">
+                <a:solidFill>
+                  <a:srgbClr val="9D174D"/>
+                </a:solidFill>
+                <a:latin typeface="Trebuchet MS" pitchFamily="34" charset="0"/>
+                <a:ea typeface="Trebuchet MS" pitchFamily="34" charset="-122"/>
+                <a:cs typeface="Trebuchet MS" pitchFamily="34" charset="-120"/>
+              </a:rPr>
               <a:t>c</a:t>
             </a:r>
             <a:endParaRPr lang="en-US" sz="900" dirty="0"/>
@@ -16193,14 +16727,80 @@
       </p:sp>
       <p:sp>
         <p:nvSpPr>
-          <p:cNvPr id="43" name="Text 41"/>
-          <p:cNvSpPr/>
-          <p:nvPr/>
-        </p:nvSpPr>
-        <p:spPr>
-          <a:xfrm>
-            <a:off x="6408638" y="4572000"/>
-            <a:ext cx="685800" cy="219456"/>
+          <p:cNvPr id="51" name="Shape 49"/>
+          <p:cNvSpPr/>
+          <p:nvPr/>
+        </p:nvSpPr>
+        <p:spPr>
+          <a:xfrm>
+            <a:off x="6307531" y="4169664"/>
+            <a:ext cx="676656" cy="384048"/>
+          </a:xfrm>
+          <a:prstGeom prst="rect">
+            <a:avLst>
+              <a:gd name="adj" fmla="val 9524"/>
+            </a:avLst>
+          </a:prstGeom>
+          <a:solidFill>
+            <a:srgbClr val="FFFFFF"/>
+          </a:solidFill>
+          <a:ln w="12700">
+            <a:solidFill>
+              <a:srgbClr val="DB2777"/>
+            </a:solidFill>
+            <a:prstDash val="solid"/>
+          </a:ln>
+        </p:spPr>
+      </p:sp>
+      <p:sp>
+        <p:nvSpPr>
+          <p:cNvPr id="52" name="Text 50"/>
+          <p:cNvSpPr/>
+          <p:nvPr/>
+        </p:nvSpPr>
+        <p:spPr>
+          <a:xfrm>
+            <a:off x="6307531" y="4169664"/>
+            <a:ext cx="676656" cy="384048"/>
+          </a:xfrm>
+          <a:prstGeom prst="rect">
+            <a:avLst/>
+          </a:prstGeom>
+          <a:noFill/>
+          <a:ln/>
+        </p:spPr>
+        <p:txBody>
+          <a:bodyPr wrap="square" lIns="0" tIns="0" rIns="0" bIns="0" rtlCol="0" anchor="ctr"/>
+          <a:lstStyle/>
+          <a:p>
+            <a:pPr algn="ctr" indent="0" marL="0">
+              <a:buNone/>
+            </a:pPr>
+            <a:r>
+              <a:rPr lang="en-US" sz="900" b="1" dirty="0">
+                <a:solidFill>
+                  <a:srgbClr val="9D174D"/>
+                </a:solidFill>
+                <a:latin typeface="Trebuchet MS" pitchFamily="34" charset="0"/>
+                <a:ea typeface="Trebuchet MS" pitchFamily="34" charset="-122"/>
+                <a:cs typeface="Trebuchet MS" pitchFamily="34" charset="-120"/>
+              </a:rPr>
+              <a:t>t</a:t>
+            </a:r>
+            <a:endParaRPr lang="en-US" sz="900" dirty="0"/>
+          </a:p>
+        </p:txBody>
+      </p:sp>
+      <p:sp>
+        <p:nvSpPr>
+          <p:cNvPr id="53" name="Text 51"/>
+          <p:cNvSpPr/>
+          <p:nvPr/>
+        </p:nvSpPr>
+        <p:spPr>
+          <a:xfrm>
+            <a:off x="6307531" y="4572000"/>
+            <a:ext cx="676656" cy="219456"/>
           </a:xfrm>
           <a:prstGeom prst="rect">
             <a:avLst/>
@@ -16224,7 +16824,7 @@
                 <a:ea typeface="Calibri" pitchFamily="34" charset="-122"/>
                 <a:cs typeface="Calibri" pitchFamily="34" charset="-120"/>
               </a:rPr>
-              <a:t>/k/</a:t>
+              <a:t>/sh/</a:t>
             </a:r>
             <a:endParaRPr lang="en-US" sz="750" dirty="0"/>
           </a:p>
@@ -16232,14 +16832,14 @@
       </p:sp>
       <p:sp>
         <p:nvSpPr>
-          <p:cNvPr id="44" name="Shape 42"/>
-          <p:cNvSpPr/>
-          <p:nvPr/>
-        </p:nvSpPr>
-        <p:spPr>
-          <a:xfrm>
-            <a:off x="7447135" y="4169664"/>
-            <a:ext cx="685800" cy="384048"/>
+          <p:cNvPr id="54" name="Shape 52"/>
+          <p:cNvSpPr/>
+          <p:nvPr/>
+        </p:nvSpPr>
+        <p:spPr>
+          <a:xfrm>
+            <a:off x="7033565" y="4169664"/>
+            <a:ext cx="676656" cy="384048"/>
           </a:xfrm>
           <a:prstGeom prst="rect">
             <a:avLst>
@@ -16259,14 +16859,14 @@
       </p:sp>
       <p:sp>
         <p:nvSpPr>
-          <p:cNvPr id="45" name="Text 43"/>
-          <p:cNvSpPr/>
-          <p:nvPr/>
-        </p:nvSpPr>
-        <p:spPr>
-          <a:xfrm>
-            <a:off x="7447135" y="4169664"/>
-            <a:ext cx="685800" cy="384048"/>
+          <p:cNvPr id="55" name="Text 53"/>
+          <p:cNvSpPr/>
+          <p:nvPr/>
+        </p:nvSpPr>
+        <p:spPr>
+          <a:xfrm>
+            <a:off x="7033565" y="4169664"/>
+            <a:ext cx="676656" cy="384048"/>
           </a:xfrm>
           <a:prstGeom prst="rect">
             <a:avLst/>
@@ -16290,7 +16890,73 @@
                 <a:ea typeface="Trebuchet MS" pitchFamily="34" charset="-122"/>
                 <a:cs typeface="Trebuchet MS" pitchFamily="34" charset="-120"/>
               </a:rPr>
-              <a:t>t</a:t>
+              <a:t>io</a:t>
+            </a:r>
+            <a:endParaRPr lang="en-US" sz="900" dirty="0"/>
+          </a:p>
+        </p:txBody>
+      </p:sp>
+      <p:sp>
+        <p:nvSpPr>
+          <p:cNvPr id="56" name="Shape 54"/>
+          <p:cNvSpPr/>
+          <p:nvPr/>
+        </p:nvSpPr>
+        <p:spPr>
+          <a:xfrm>
+            <a:off x="7759598" y="4169664"/>
+            <a:ext cx="676656" cy="384048"/>
+          </a:xfrm>
+          <a:prstGeom prst="rect">
+            <a:avLst>
+              <a:gd name="adj" fmla="val 9524"/>
+            </a:avLst>
+          </a:prstGeom>
+          <a:solidFill>
+            <a:srgbClr val="FFFFFF"/>
+          </a:solidFill>
+          <a:ln w="12700">
+            <a:solidFill>
+              <a:srgbClr val="DB2777"/>
+            </a:solidFill>
+            <a:prstDash val="solid"/>
+          </a:ln>
+        </p:spPr>
+      </p:sp>
+      <p:sp>
+        <p:nvSpPr>
+          <p:cNvPr id="57" name="Text 55"/>
+          <p:cNvSpPr/>
+          <p:nvPr/>
+        </p:nvSpPr>
+        <p:spPr>
+          <a:xfrm>
+            <a:off x="7759598" y="4169664"/>
+            <a:ext cx="676656" cy="384048"/>
+          </a:xfrm>
+          <a:prstGeom prst="rect">
+            <a:avLst/>
+          </a:prstGeom>
+          <a:noFill/>
+          <a:ln/>
+        </p:spPr>
+        <p:txBody>
+          <a:bodyPr wrap="square" lIns="0" tIns="0" rIns="0" bIns="0" rtlCol="0" anchor="ctr"/>
+          <a:lstStyle/>
+          <a:p>
+            <a:pPr algn="ctr" indent="0" marL="0">
+              <a:buNone/>
+            </a:pPr>
+            <a:r>
+              <a:rPr lang="en-US" sz="900" b="1" dirty="0">
+                <a:solidFill>
+                  <a:srgbClr val="9D174D"/>
+                </a:solidFill>
+                <a:latin typeface="Trebuchet MS" pitchFamily="34" charset="0"/>
+                <a:ea typeface="Trebuchet MS" pitchFamily="34" charset="-122"/>
+                <a:cs typeface="Trebuchet MS" pitchFamily="34" charset="-120"/>
+              </a:rPr>
+              <a:t>n</a:t>
             </a:r>
             <a:endParaRPr lang="en-US" sz="900" dirty="0"/>
           </a:p>
@@ -16864,7 +17530,7 @@
                 <a:ea typeface="Calibri" pitchFamily="34" charset="-122"/>
                 <a:cs typeface="Calibri" pitchFamily="34" charset="-120"/>
               </a:rPr>
-              <a:t>Word Labs  •  wordlabs.app  •  Root: 'duct' = to lead or carry</a:t>
+              <a:t>Word Labs  •  wordlabs.app  •  Root: 'duct' = to lead or bring</a:t>
             </a:r>
             <a:endParaRPr lang="en-US" sz="800" dirty="0"/>
           </a:p>
@@ -17504,7 +18170,7 @@
                 <a:ea typeface="Calibri" pitchFamily="34" charset="-122"/>
                 <a:cs typeface="Calibri" pitchFamily="34" charset="-120"/>
               </a:rPr>
-              <a:t>Word Labs  •  wordlabs.app  •  Root: 'duct' = to lead or carry</a:t>
+              <a:t>Word Labs  •  wordlabs.app  •  Root: 'duct' = to lead or bring</a:t>
             </a:r>
             <a:endParaRPr lang="en-US" sz="800" dirty="0"/>
           </a:p>
@@ -17616,7 +18282,7 @@
                 <a:ea typeface="Calibri" pitchFamily="34" charset="-122"/>
                 <a:cs typeface="Calibri" pitchFamily="34" charset="-120"/>
               </a:rPr>
-              <a:t>After careful </a:t>
+              <a:t>The </a:t>
             </a:r>
             <a:pPr algn="l" indent="0" marL="0">
               <a:buNone/>
@@ -17633,7 +18299,7 @@
                 <a:ea typeface="Calibri" pitchFamily="34" charset="-122"/>
                 <a:cs typeface="Calibri" pitchFamily="34" charset="-120"/>
               </a:rPr>
-              <a:t>deduction</a:t>
+              <a:t>producer</a:t>
             </a:r>
             <a:pPr algn="l" indent="0" marL="0">
               <a:buNone/>
@@ -17647,7 +18313,7 @@
                 <a:ea typeface="Calibri" pitchFamily="34" charset="-122"/>
                 <a:cs typeface="Calibri" pitchFamily="34" charset="-120"/>
               </a:rPr>
-              <a:t>, the scientist concluded that the metal was </a:t>
+              <a:t> had to </a:t>
             </a:r>
             <a:pPr algn="l" indent="0" marL="0">
               <a:buNone/>
@@ -17664,7 +18330,7 @@
                 <a:ea typeface="Calibri" pitchFamily="34" charset="-122"/>
                 <a:cs typeface="Calibri" pitchFamily="34" charset="-120"/>
               </a:rPr>
-              <a:t>ductile</a:t>
+              <a:t>deduct</a:t>
             </a:r>
             <a:pPr algn="l" indent="0" marL="0">
               <a:buNone/>
@@ -17678,7 +18344,7 @@
                 <a:ea typeface="Calibri" pitchFamily="34" charset="-122"/>
                 <a:cs typeface="Calibri" pitchFamily="34" charset="-120"/>
               </a:rPr>
-              <a:t>, which made it perfect for the </a:t>
+              <a:t> costs from the budget; however, the </a:t>
             </a:r>
             <a:pPr algn="l" indent="0" marL="0">
               <a:buNone/>
@@ -17695,7 +18361,7 @@
                 <a:ea typeface="Calibri" pitchFamily="34" charset="-122"/>
                 <a:cs typeface="Calibri" pitchFamily="34" charset="-120"/>
               </a:rPr>
-              <a:t>conductive</a:t>
+              <a:t>reduction</a:t>
             </a:r>
             <a:pPr algn="l" indent="0" marL="0">
               <a:buNone/>
@@ -17709,7 +18375,7 @@
                 <a:ea typeface="Calibri" pitchFamily="34" charset="-122"/>
                 <a:cs typeface="Calibri" pitchFamily="34" charset="-120"/>
               </a:rPr>
-              <a:t> wiring.</a:t>
+              <a:t> did not affect the quality of the film.</a:t>
             </a:r>
             <a:endParaRPr lang="en-US" sz="1800" dirty="0"/>
           </a:p>
@@ -17864,7 +18530,7 @@
                 <a:ea typeface="Trebuchet MS" pitchFamily="34" charset="-122"/>
                 <a:cs typeface="Trebuchet MS" pitchFamily="34" charset="-120"/>
               </a:rPr>
-              <a:t>deduction</a:t>
+              <a:t>producer</a:t>
             </a:r>
             <a:endParaRPr lang="en-US" sz="1400" dirty="0"/>
           </a:p>
@@ -17992,7 +18658,7 @@
                 <a:ea typeface="Trebuchet MS" pitchFamily="34" charset="-122"/>
                 <a:cs typeface="Trebuchet MS" pitchFamily="34" charset="-120"/>
               </a:rPr>
-              <a:t>ductile</a:t>
+              <a:t>deduct</a:t>
             </a:r>
             <a:endParaRPr lang="en-US" sz="1400" dirty="0"/>
           </a:p>
@@ -18120,7 +18786,7 @@
                 <a:ea typeface="Trebuchet MS" pitchFamily="34" charset="-122"/>
                 <a:cs typeface="Trebuchet MS" pitchFamily="34" charset="-120"/>
               </a:rPr>
-              <a:t>conductive</a:t>
+              <a:t>reduction</a:t>
             </a:r>
             <a:endParaRPr lang="en-US" sz="1400" dirty="0"/>
           </a:p>
@@ -18451,7 +19117,7 @@
                 <a:ea typeface="Calibri" pitchFamily="34" charset="-122"/>
                 <a:cs typeface="Calibri" pitchFamily="34" charset="-120"/>
               </a:rPr>
-              <a:t>Word Labs  •  wordlabs.app  •  Root: 'duct' = to lead or carry</a:t>
+              <a:t>Word Labs  •  wordlabs.app  •  Root: 'duct' = to lead or bring</a:t>
             </a:r>
             <a:endParaRPr lang="en-US" sz="800" dirty="0"/>
           </a:p>
@@ -18590,7 +19256,7 @@
                 <a:ea typeface="Trebuchet MS" pitchFamily="34" charset="-122"/>
                 <a:cs typeface="Trebuchet MS" pitchFamily="34" charset="-120"/>
               </a:rPr>
-              <a:t>deduction</a:t>
+              <a:t>producer</a:t>
             </a:r>
             <a:endParaRPr lang="en-US" sz="2800" dirty="0"/>
           </a:p>
@@ -19278,7 +19944,7 @@
                 <a:ea typeface="Calibri" pitchFamily="34" charset="-122"/>
                 <a:cs typeface="Calibri" pitchFamily="34" charset="-120"/>
               </a:rPr>
-              <a:t>Word Labs  •  wordlabs.app  •  Root: 'duct' = to lead or carry</a:t>
+              <a:t>Word Labs  •  wordlabs.app  •  Root: 'duct' = to lead or bring</a:t>
             </a:r>
             <a:endParaRPr lang="en-US" sz="800" dirty="0"/>
           </a:p>
@@ -19417,7 +20083,7 @@
                 <a:ea typeface="Trebuchet MS" pitchFamily="34" charset="-122"/>
                 <a:cs typeface="Trebuchet MS" pitchFamily="34" charset="-120"/>
               </a:rPr>
-              <a:t>deduction</a:t>
+              <a:t>producer</a:t>
             </a:r>
             <a:endParaRPr lang="en-US" sz="2800" dirty="0"/>
           </a:p>
@@ -19556,7 +20222,7 @@
                 <a:ea typeface="Trebuchet MS" pitchFamily="34" charset="-122"/>
                 <a:cs typeface="Trebuchet MS" pitchFamily="34" charset="-120"/>
               </a:rPr>
-              <a:t>de</a:t>
+              <a:t>pro</a:t>
             </a:r>
             <a:endParaRPr lang="en-US" sz="1300" dirty="0"/>
           </a:p>
@@ -19595,7 +20261,7 @@
                 <a:ea typeface="Calibri" pitchFamily="34" charset="-122"/>
                 <a:cs typeface="Calibri" pitchFamily="34" charset="-120"/>
               </a:rPr>
-              <a:t>away, down from</a:t>
+              <a:t>forward, in front</a:t>
             </a:r>
             <a:endParaRPr lang="en-US" sz="850" dirty="0"/>
           </a:p>
@@ -19618,11 +20284,11 @@
             </a:avLst>
           </a:prstGeom>
           <a:solidFill>
-            <a:srgbClr val="CCFBF1"/>
+            <a:srgbClr val="FCE7F3"/>
           </a:solidFill>
           <a:ln w="19050">
             <a:solidFill>
-              <a:srgbClr val="0D9488"/>
+              <a:srgbClr val="DB2777"/>
             </a:solidFill>
             <a:prstDash val="solid"/>
           </a:ln>
@@ -19662,13 +20328,13 @@
             <a:r>
               <a:rPr lang="en-US" sz="1300" b="1" dirty="0">
                 <a:solidFill>
-                  <a:srgbClr val="0F766E"/>
+                  <a:srgbClr val="9D174D"/>
                 </a:solidFill>
                 <a:latin typeface="Trebuchet MS" pitchFamily="34" charset="0"/>
                 <a:ea typeface="Trebuchet MS" pitchFamily="34" charset="-122"/>
                 <a:cs typeface="Trebuchet MS" pitchFamily="34" charset="-120"/>
               </a:rPr>
-              <a:t>duct</a:t>
+              <a:t>duc</a:t>
             </a:r>
             <a:endParaRPr lang="en-US" sz="1300" dirty="0"/>
           </a:p>
@@ -19707,7 +20373,7 @@
                 <a:ea typeface="Calibri" pitchFamily="34" charset="-122"/>
                 <a:cs typeface="Calibri" pitchFamily="34" charset="-120"/>
               </a:rPr>
-              <a:t>to lead or carry</a:t>
+              <a:t>to lead</a:t>
             </a:r>
             <a:endParaRPr lang="en-US" sz="850" dirty="0"/>
           </a:p>
@@ -19715,7 +20381,46 @@
       </p:sp>
       <p:sp>
         <p:nvSpPr>
-          <p:cNvPr id="22" name="Shape 20"/>
+          <p:cNvPr id="22" name="Text 20"/>
+          <p:cNvSpPr/>
+          <p:nvPr/>
+        </p:nvSpPr>
+        <p:spPr>
+          <a:xfrm>
+            <a:off x="4370832" y="2752344"/>
+            <a:ext cx="1828800" cy="182880"/>
+          </a:xfrm>
+          <a:prstGeom prst="rect">
+            <a:avLst/>
+          </a:prstGeom>
+          <a:noFill/>
+          <a:ln/>
+        </p:spPr>
+        <p:txBody>
+          <a:bodyPr wrap="square" lIns="0" tIns="0" rIns="0" bIns="0" rtlCol="0" anchor="t"/>
+          <a:lstStyle/>
+          <a:p>
+            <a:pPr algn="ctr" indent="0" marL="0">
+              <a:buNone/>
+            </a:pPr>
+            <a:r>
+              <a:rPr lang="en-US" sz="700" i="1" dirty="0">
+                <a:solidFill>
+                  <a:srgbClr val="94A3B8"/>
+                </a:solidFill>
+                <a:latin typeface="Calibri" pitchFamily="34" charset="0"/>
+                <a:ea typeface="Calibri" pitchFamily="34" charset="-122"/>
+                <a:cs typeface="Calibri" pitchFamily="34" charset="-120"/>
+              </a:rPr>
+              <a:t>spelling variant of 'duct' before 'e'</a:t>
+            </a:r>
+            <a:endParaRPr lang="en-US" sz="700" dirty="0"/>
+          </a:p>
+        </p:txBody>
+      </p:sp>
+      <p:sp>
+        <p:nvSpPr>
+          <p:cNvPr id="23" name="Shape 21"/>
           <p:cNvSpPr/>
           <p:nvPr/>
         </p:nvSpPr>
@@ -19749,7 +20454,7 @@
       </p:sp>
       <p:sp>
         <p:nvSpPr>
-          <p:cNvPr id="23" name="Text 21"/>
+          <p:cNvPr id="24" name="Text 22"/>
           <p:cNvSpPr/>
           <p:nvPr/>
         </p:nvSpPr>
@@ -19780,7 +20485,7 @@
                 <a:ea typeface="Trebuchet MS" pitchFamily="34" charset="-122"/>
                 <a:cs typeface="Trebuchet MS" pitchFamily="34" charset="-120"/>
               </a:rPr>
-              <a:t>ion</a:t>
+              <a:t>er</a:t>
             </a:r>
             <a:endParaRPr lang="en-US" sz="1300" dirty="0"/>
           </a:p>
@@ -19788,7 +20493,7 @@
       </p:sp>
       <p:sp>
         <p:nvSpPr>
-          <p:cNvPr id="24" name="Text 22"/>
+          <p:cNvPr id="25" name="Text 23"/>
           <p:cNvSpPr/>
           <p:nvPr/>
         </p:nvSpPr>
@@ -19819,7 +20524,7 @@
                 <a:ea typeface="Calibri" pitchFamily="34" charset="-122"/>
                 <a:cs typeface="Calibri" pitchFamily="34" charset="-120"/>
               </a:rPr>
-              <a:t>act or process of</a:t>
+              <a:t>person who does something</a:t>
             </a:r>
             <a:endParaRPr lang="en-US" sz="850" dirty="0"/>
           </a:p>
@@ -19827,7 +20532,7 @@
       </p:sp>
       <p:sp>
         <p:nvSpPr>
-          <p:cNvPr id="25" name="Shape 23"/>
+          <p:cNvPr id="26" name="Shape 24"/>
           <p:cNvSpPr/>
           <p:nvPr/>
         </p:nvSpPr>
@@ -19854,7 +20559,7 @@
       </p:sp>
       <p:sp>
         <p:nvSpPr>
-          <p:cNvPr id="26" name="Text 24"/>
+          <p:cNvPr id="27" name="Text 25"/>
           <p:cNvSpPr/>
           <p:nvPr/>
         </p:nvSpPr>
@@ -19893,7 +20598,7 @@
       </p:sp>
       <p:sp>
         <p:nvSpPr>
-          <p:cNvPr id="27" name="Shape 25"/>
+          <p:cNvPr id="28" name="Shape 26"/>
           <p:cNvSpPr/>
           <p:nvPr/>
         </p:nvSpPr>
@@ -19920,7 +20625,7 @@
       </p:sp>
       <p:sp>
         <p:nvSpPr>
-          <p:cNvPr id="28" name="Text 26"/>
+          <p:cNvPr id="29" name="Text 27"/>
           <p:cNvSpPr/>
           <p:nvPr/>
         </p:nvSpPr>
@@ -19959,7 +20664,7 @@
       </p:sp>
       <p:sp>
         <p:nvSpPr>
-          <p:cNvPr id="29" name="Shape 27"/>
+          <p:cNvPr id="30" name="Shape 28"/>
           <p:cNvSpPr/>
           <p:nvPr/>
         </p:nvSpPr>
@@ -19986,7 +20691,7 @@
       </p:sp>
       <p:sp>
         <p:nvSpPr>
-          <p:cNvPr id="30" name="Text 28"/>
+          <p:cNvPr id="31" name="Text 29"/>
           <p:cNvSpPr/>
           <p:nvPr/>
         </p:nvSpPr>
@@ -20025,7 +20730,7 @@
       </p:sp>
       <p:sp>
         <p:nvSpPr>
-          <p:cNvPr id="31" name="Shape 29"/>
+          <p:cNvPr id="32" name="Shape 30"/>
           <p:cNvSpPr/>
           <p:nvPr/>
         </p:nvSpPr>
@@ -20052,7 +20757,7 @@
       </p:sp>
       <p:sp>
         <p:nvSpPr>
-          <p:cNvPr id="32" name="Text 30"/>
+          <p:cNvPr id="33" name="Text 31"/>
           <p:cNvSpPr/>
           <p:nvPr/>
         </p:nvSpPr>
@@ -20375,7 +21080,7 @@
                 <a:ea typeface="Calibri" pitchFamily="34" charset="-122"/>
                 <a:cs typeface="Calibri" pitchFamily="34" charset="-120"/>
               </a:rPr>
-              <a:t>Word Labs  •  wordlabs.app  •  Root: 'duct' = to lead or carry</a:t>
+              <a:t>Word Labs  •  wordlabs.app  •  Root: 'duct' = to lead or bring</a:t>
             </a:r>
             <a:endParaRPr lang="en-US" sz="800" dirty="0"/>
           </a:p>
@@ -20514,7 +21219,7 @@
                 <a:ea typeface="Trebuchet MS" pitchFamily="34" charset="-122"/>
                 <a:cs typeface="Trebuchet MS" pitchFamily="34" charset="-120"/>
               </a:rPr>
-              <a:t>deduction</a:t>
+              <a:t>producer</a:t>
             </a:r>
             <a:endParaRPr lang="en-US" sz="2800" dirty="0"/>
           </a:p>
@@ -20653,7 +21358,7 @@
                 <a:ea typeface="Trebuchet MS" pitchFamily="34" charset="-122"/>
                 <a:cs typeface="Trebuchet MS" pitchFamily="34" charset="-120"/>
               </a:rPr>
-              <a:t>de</a:t>
+              <a:t>pro</a:t>
             </a:r>
             <a:endParaRPr lang="en-US" sz="1300" dirty="0"/>
           </a:p>
@@ -20692,7 +21397,7 @@
                 <a:ea typeface="Calibri" pitchFamily="34" charset="-122"/>
                 <a:cs typeface="Calibri" pitchFamily="34" charset="-120"/>
               </a:rPr>
-              <a:t>away, down from</a:t>
+              <a:t>forward, in front</a:t>
             </a:r>
             <a:endParaRPr lang="en-US" sz="850" dirty="0"/>
           </a:p>
@@ -20715,11 +21420,11 @@
             </a:avLst>
           </a:prstGeom>
           <a:solidFill>
-            <a:srgbClr val="CCFBF1"/>
+            <a:srgbClr val="FCE7F3"/>
           </a:solidFill>
           <a:ln w="19050">
             <a:solidFill>
-              <a:srgbClr val="0D9488"/>
+              <a:srgbClr val="DB2777"/>
             </a:solidFill>
             <a:prstDash val="solid"/>
           </a:ln>
@@ -20759,13 +21464,13 @@
             <a:r>
               <a:rPr lang="en-US" sz="1300" b="1" dirty="0">
                 <a:solidFill>
-                  <a:srgbClr val="0F766E"/>
+                  <a:srgbClr val="9D174D"/>
                 </a:solidFill>
                 <a:latin typeface="Trebuchet MS" pitchFamily="34" charset="0"/>
                 <a:ea typeface="Trebuchet MS" pitchFamily="34" charset="-122"/>
                 <a:cs typeface="Trebuchet MS" pitchFamily="34" charset="-120"/>
               </a:rPr>
-              <a:t>duct</a:t>
+              <a:t>duc</a:t>
             </a:r>
             <a:endParaRPr lang="en-US" sz="1300" dirty="0"/>
           </a:p>
@@ -20804,7 +21509,7 @@
                 <a:ea typeface="Calibri" pitchFamily="34" charset="-122"/>
                 <a:cs typeface="Calibri" pitchFamily="34" charset="-120"/>
               </a:rPr>
-              <a:t>to lead or carry</a:t>
+              <a:t>to lead</a:t>
             </a:r>
             <a:endParaRPr lang="en-US" sz="850" dirty="0"/>
           </a:p>
@@ -20812,7 +21517,46 @@
       </p:sp>
       <p:sp>
         <p:nvSpPr>
-          <p:cNvPr id="22" name="Shape 20"/>
+          <p:cNvPr id="22" name="Text 20"/>
+          <p:cNvSpPr/>
+          <p:nvPr/>
+        </p:nvSpPr>
+        <p:spPr>
+          <a:xfrm>
+            <a:off x="4370832" y="2752344"/>
+            <a:ext cx="1828800" cy="182880"/>
+          </a:xfrm>
+          <a:prstGeom prst="rect">
+            <a:avLst/>
+          </a:prstGeom>
+          <a:noFill/>
+          <a:ln/>
+        </p:spPr>
+        <p:txBody>
+          <a:bodyPr wrap="square" lIns="0" tIns="0" rIns="0" bIns="0" rtlCol="0" anchor="t"/>
+          <a:lstStyle/>
+          <a:p>
+            <a:pPr algn="ctr" indent="0" marL="0">
+              <a:buNone/>
+            </a:pPr>
+            <a:r>
+              <a:rPr lang="en-US" sz="700" i="1" dirty="0">
+                <a:solidFill>
+                  <a:srgbClr val="94A3B8"/>
+                </a:solidFill>
+                <a:latin typeface="Calibri" pitchFamily="34" charset="0"/>
+                <a:ea typeface="Calibri" pitchFamily="34" charset="-122"/>
+                <a:cs typeface="Calibri" pitchFamily="34" charset="-120"/>
+              </a:rPr>
+              <a:t>spelling variant of 'duct' before 'e'</a:t>
+            </a:r>
+            <a:endParaRPr lang="en-US" sz="700" dirty="0"/>
+          </a:p>
+        </p:txBody>
+      </p:sp>
+      <p:sp>
+        <p:nvSpPr>
+          <p:cNvPr id="23" name="Shape 21"/>
           <p:cNvSpPr/>
           <p:nvPr/>
         </p:nvSpPr>
@@ -20846,7 +21590,7 @@
       </p:sp>
       <p:sp>
         <p:nvSpPr>
-          <p:cNvPr id="23" name="Text 21"/>
+          <p:cNvPr id="24" name="Text 22"/>
           <p:cNvSpPr/>
           <p:nvPr/>
         </p:nvSpPr>
@@ -20877,7 +21621,7 @@
                 <a:ea typeface="Trebuchet MS" pitchFamily="34" charset="-122"/>
                 <a:cs typeface="Trebuchet MS" pitchFamily="34" charset="-120"/>
               </a:rPr>
-              <a:t>ion</a:t>
+              <a:t>er</a:t>
             </a:r>
             <a:endParaRPr lang="en-US" sz="1300" dirty="0"/>
           </a:p>
@@ -20885,7 +21629,7 @@
       </p:sp>
       <p:sp>
         <p:nvSpPr>
-          <p:cNvPr id="24" name="Text 22"/>
+          <p:cNvPr id="25" name="Text 23"/>
           <p:cNvSpPr/>
           <p:nvPr/>
         </p:nvSpPr>
@@ -20916,7 +21660,7 @@
                 <a:ea typeface="Calibri" pitchFamily="34" charset="-122"/>
                 <a:cs typeface="Calibri" pitchFamily="34" charset="-120"/>
               </a:rPr>
-              <a:t>act or process of</a:t>
+              <a:t>person who does something</a:t>
             </a:r>
             <a:endParaRPr lang="en-US" sz="850" dirty="0"/>
           </a:p>
@@ -20924,7 +21668,7 @@
       </p:sp>
       <p:sp>
         <p:nvSpPr>
-          <p:cNvPr id="25" name="Shape 23"/>
+          <p:cNvPr id="26" name="Shape 24"/>
           <p:cNvSpPr/>
           <p:nvPr/>
         </p:nvSpPr>
@@ -20951,7 +21695,7 @@
       </p:sp>
       <p:sp>
         <p:nvSpPr>
-          <p:cNvPr id="26" name="Text 24"/>
+          <p:cNvPr id="27" name="Text 25"/>
           <p:cNvSpPr/>
           <p:nvPr/>
         </p:nvSpPr>
@@ -20990,7 +21734,7 @@
       </p:sp>
       <p:sp>
         <p:nvSpPr>
-          <p:cNvPr id="27" name="Shape 25"/>
+          <p:cNvPr id="28" name="Shape 26"/>
           <p:cNvSpPr/>
           <p:nvPr/>
         </p:nvSpPr>
@@ -21017,7 +21761,7 @@
       </p:sp>
       <p:sp>
         <p:nvSpPr>
-          <p:cNvPr id="28" name="Shape 26"/>
+          <p:cNvPr id="29" name="Shape 27"/>
           <p:cNvSpPr/>
           <p:nvPr/>
         </p:nvSpPr>
@@ -21044,7 +21788,7 @@
       </p:sp>
       <p:sp>
         <p:nvSpPr>
-          <p:cNvPr id="29" name="Text 27"/>
+          <p:cNvPr id="30" name="Text 28"/>
           <p:cNvSpPr/>
           <p:nvPr/>
         </p:nvSpPr>
@@ -21075,7 +21819,7 @@
                 <a:ea typeface="Trebuchet MS" pitchFamily="34" charset="-122"/>
                 <a:cs typeface="Trebuchet MS" pitchFamily="34" charset="-120"/>
               </a:rPr>
-              <a:t>de</a:t>
+              <a:t>pro</a:t>
             </a:r>
             <a:endParaRPr lang="en-US" sz="1400" dirty="0"/>
           </a:p>
@@ -21083,7 +21827,7 @@
       </p:sp>
       <p:sp>
         <p:nvSpPr>
-          <p:cNvPr id="30" name="Text 28"/>
+          <p:cNvPr id="31" name="Text 29"/>
           <p:cNvSpPr/>
           <p:nvPr/>
         </p:nvSpPr>
@@ -21122,7 +21866,7 @@
       </p:sp>
       <p:sp>
         <p:nvSpPr>
-          <p:cNvPr id="31" name="Shape 29"/>
+          <p:cNvPr id="32" name="Shape 30"/>
           <p:cNvSpPr/>
           <p:nvPr/>
         </p:nvSpPr>
@@ -21149,7 +21893,7 @@
       </p:sp>
       <p:sp>
         <p:nvSpPr>
-          <p:cNvPr id="32" name="Text 30"/>
+          <p:cNvPr id="33" name="Text 31"/>
           <p:cNvSpPr/>
           <p:nvPr/>
         </p:nvSpPr>
@@ -21180,7 +21924,7 @@
                 <a:ea typeface="Trebuchet MS" pitchFamily="34" charset="-122"/>
                 <a:cs typeface="Trebuchet MS" pitchFamily="34" charset="-120"/>
               </a:rPr>
-              <a:t>duc</a:t>
+              <a:t>du</a:t>
             </a:r>
             <a:endParaRPr lang="en-US" sz="1400" dirty="0"/>
           </a:p>
@@ -21188,7 +21932,7 @@
       </p:sp>
       <p:sp>
         <p:nvSpPr>
-          <p:cNvPr id="33" name="Text 31"/>
+          <p:cNvPr id="34" name="Text 32"/>
           <p:cNvSpPr/>
           <p:nvPr/>
         </p:nvSpPr>
@@ -21227,7 +21971,7 @@
       </p:sp>
       <p:sp>
         <p:nvSpPr>
-          <p:cNvPr id="34" name="Shape 32"/>
+          <p:cNvPr id="35" name="Shape 33"/>
           <p:cNvSpPr/>
           <p:nvPr/>
         </p:nvSpPr>
@@ -21254,7 +21998,7 @@
       </p:sp>
       <p:sp>
         <p:nvSpPr>
-          <p:cNvPr id="35" name="Text 33"/>
+          <p:cNvPr id="36" name="Text 34"/>
           <p:cNvSpPr/>
           <p:nvPr/>
         </p:nvSpPr>
@@ -21285,7 +22029,7 @@
                 <a:ea typeface="Trebuchet MS" pitchFamily="34" charset="-122"/>
                 <a:cs typeface="Trebuchet MS" pitchFamily="34" charset="-120"/>
               </a:rPr>
-              <a:t>tion</a:t>
+              <a:t>cer</a:t>
             </a:r>
             <a:endParaRPr lang="en-US" sz="1400" dirty="0"/>
           </a:p>
@@ -21293,7 +22037,7 @@
       </p:sp>
       <p:sp>
         <p:nvSpPr>
-          <p:cNvPr id="36" name="Shape 34"/>
+          <p:cNvPr id="37" name="Shape 35"/>
           <p:cNvSpPr/>
           <p:nvPr/>
         </p:nvSpPr>
@@ -21320,7 +22064,7 @@
       </p:sp>
       <p:sp>
         <p:nvSpPr>
-          <p:cNvPr id="37" name="Text 35"/>
+          <p:cNvPr id="38" name="Text 36"/>
           <p:cNvSpPr/>
           <p:nvPr/>
         </p:nvSpPr>
@@ -21359,7 +22103,7 @@
       </p:sp>
       <p:sp>
         <p:nvSpPr>
-          <p:cNvPr id="38" name="Shape 36"/>
+          <p:cNvPr id="39" name="Shape 37"/>
           <p:cNvSpPr/>
           <p:nvPr/>
         </p:nvSpPr>
@@ -21386,7 +22130,7 @@
       </p:sp>
       <p:sp>
         <p:nvSpPr>
-          <p:cNvPr id="39" name="Text 37"/>
+          <p:cNvPr id="40" name="Text 38"/>
           <p:cNvSpPr/>
           <p:nvPr/>
         </p:nvSpPr>
@@ -21709,7 +22453,7 @@
                 <a:ea typeface="Calibri" pitchFamily="34" charset="-122"/>
                 <a:cs typeface="Calibri" pitchFamily="34" charset="-120"/>
               </a:rPr>
-              <a:t>Word Labs  •  wordlabs.app  •  Root: 'duct' = to lead or carry</a:t>
+              <a:t>Word Labs  •  wordlabs.app  •  Root: 'duct' = to lead or bring</a:t>
             </a:r>
             <a:endParaRPr lang="en-US" sz="800" dirty="0"/>
           </a:p>
@@ -21848,7 +22592,7 @@
                 <a:ea typeface="Trebuchet MS" pitchFamily="34" charset="-122"/>
                 <a:cs typeface="Trebuchet MS" pitchFamily="34" charset="-120"/>
               </a:rPr>
-              <a:t>deduction</a:t>
+              <a:t>producer</a:t>
             </a:r>
             <a:endParaRPr lang="en-US" sz="2800" dirty="0"/>
           </a:p>
@@ -21987,7 +22731,7 @@
                 <a:ea typeface="Trebuchet MS" pitchFamily="34" charset="-122"/>
                 <a:cs typeface="Trebuchet MS" pitchFamily="34" charset="-120"/>
               </a:rPr>
-              <a:t>de</a:t>
+              <a:t>pro</a:t>
             </a:r>
             <a:endParaRPr lang="en-US" sz="1300" dirty="0"/>
           </a:p>
@@ -22026,7 +22770,7 @@
                 <a:ea typeface="Calibri" pitchFamily="34" charset="-122"/>
                 <a:cs typeface="Calibri" pitchFamily="34" charset="-120"/>
               </a:rPr>
-              <a:t>away, down from</a:t>
+              <a:t>forward, in front</a:t>
             </a:r>
             <a:endParaRPr lang="en-US" sz="850" dirty="0"/>
           </a:p>
@@ -22049,11 +22793,11 @@
             </a:avLst>
           </a:prstGeom>
           <a:solidFill>
-            <a:srgbClr val="CCFBF1"/>
+            <a:srgbClr val="FCE7F3"/>
           </a:solidFill>
           <a:ln w="19050">
             <a:solidFill>
-              <a:srgbClr val="0D9488"/>
+              <a:srgbClr val="DB2777"/>
             </a:solidFill>
             <a:prstDash val="solid"/>
           </a:ln>
@@ -22093,13 +22837,13 @@
             <a:r>
               <a:rPr lang="en-US" sz="1300" b="1" dirty="0">
                 <a:solidFill>
-                  <a:srgbClr val="0F766E"/>
+                  <a:srgbClr val="9D174D"/>
                 </a:solidFill>
                 <a:latin typeface="Trebuchet MS" pitchFamily="34" charset="0"/>
                 <a:ea typeface="Trebuchet MS" pitchFamily="34" charset="-122"/>
                 <a:cs typeface="Trebuchet MS" pitchFamily="34" charset="-120"/>
               </a:rPr>
-              <a:t>duct</a:t>
+              <a:t>duc</a:t>
             </a:r>
             <a:endParaRPr lang="en-US" sz="1300" dirty="0"/>
           </a:p>
@@ -22138,7 +22882,7 @@
                 <a:ea typeface="Calibri" pitchFamily="34" charset="-122"/>
                 <a:cs typeface="Calibri" pitchFamily="34" charset="-120"/>
               </a:rPr>
-              <a:t>to lead or carry</a:t>
+              <a:t>to lead</a:t>
             </a:r>
             <a:endParaRPr lang="en-US" sz="850" dirty="0"/>
           </a:p>
@@ -22146,7 +22890,46 @@
       </p:sp>
       <p:sp>
         <p:nvSpPr>
-          <p:cNvPr id="22" name="Shape 20"/>
+          <p:cNvPr id="22" name="Text 20"/>
+          <p:cNvSpPr/>
+          <p:nvPr/>
+        </p:nvSpPr>
+        <p:spPr>
+          <a:xfrm>
+            <a:off x="4370832" y="2752344"/>
+            <a:ext cx="1828800" cy="182880"/>
+          </a:xfrm>
+          <a:prstGeom prst="rect">
+            <a:avLst/>
+          </a:prstGeom>
+          <a:noFill/>
+          <a:ln/>
+        </p:spPr>
+        <p:txBody>
+          <a:bodyPr wrap="square" lIns="0" tIns="0" rIns="0" bIns="0" rtlCol="0" anchor="t"/>
+          <a:lstStyle/>
+          <a:p>
+            <a:pPr algn="ctr" indent="0" marL="0">
+              <a:buNone/>
+            </a:pPr>
+            <a:r>
+              <a:rPr lang="en-US" sz="700" i="1" dirty="0">
+                <a:solidFill>
+                  <a:srgbClr val="94A3B8"/>
+                </a:solidFill>
+                <a:latin typeface="Calibri" pitchFamily="34" charset="0"/>
+                <a:ea typeface="Calibri" pitchFamily="34" charset="-122"/>
+                <a:cs typeface="Calibri" pitchFamily="34" charset="-120"/>
+              </a:rPr>
+              <a:t>spelling variant of 'duct' before 'e'</a:t>
+            </a:r>
+            <a:endParaRPr lang="en-US" sz="700" dirty="0"/>
+          </a:p>
+        </p:txBody>
+      </p:sp>
+      <p:sp>
+        <p:nvSpPr>
+          <p:cNvPr id="23" name="Shape 21"/>
           <p:cNvSpPr/>
           <p:nvPr/>
         </p:nvSpPr>
@@ -22180,7 +22963,7 @@
       </p:sp>
       <p:sp>
         <p:nvSpPr>
-          <p:cNvPr id="23" name="Text 21"/>
+          <p:cNvPr id="24" name="Text 22"/>
           <p:cNvSpPr/>
           <p:nvPr/>
         </p:nvSpPr>
@@ -22211,7 +22994,7 @@
                 <a:ea typeface="Trebuchet MS" pitchFamily="34" charset="-122"/>
                 <a:cs typeface="Trebuchet MS" pitchFamily="34" charset="-120"/>
               </a:rPr>
-              <a:t>ion</a:t>
+              <a:t>er</a:t>
             </a:r>
             <a:endParaRPr lang="en-US" sz="1300" dirty="0"/>
           </a:p>
@@ -22219,7 +23002,7 @@
       </p:sp>
       <p:sp>
         <p:nvSpPr>
-          <p:cNvPr id="24" name="Text 22"/>
+          <p:cNvPr id="25" name="Text 23"/>
           <p:cNvSpPr/>
           <p:nvPr/>
         </p:nvSpPr>
@@ -22250,7 +23033,7 @@
                 <a:ea typeface="Calibri" pitchFamily="34" charset="-122"/>
                 <a:cs typeface="Calibri" pitchFamily="34" charset="-120"/>
               </a:rPr>
-              <a:t>act or process of</a:t>
+              <a:t>person who does something</a:t>
             </a:r>
             <a:endParaRPr lang="en-US" sz="850" dirty="0"/>
           </a:p>
@@ -22258,7 +23041,7 @@
       </p:sp>
       <p:sp>
         <p:nvSpPr>
-          <p:cNvPr id="25" name="Shape 23"/>
+          <p:cNvPr id="26" name="Shape 24"/>
           <p:cNvSpPr/>
           <p:nvPr/>
         </p:nvSpPr>
@@ -22285,7 +23068,7 @@
       </p:sp>
       <p:sp>
         <p:nvSpPr>
-          <p:cNvPr id="26" name="Text 24"/>
+          <p:cNvPr id="27" name="Text 25"/>
           <p:cNvSpPr/>
           <p:nvPr/>
         </p:nvSpPr>
@@ -22324,7 +23107,7 @@
       </p:sp>
       <p:sp>
         <p:nvSpPr>
-          <p:cNvPr id="27" name="Shape 25"/>
+          <p:cNvPr id="28" name="Shape 26"/>
           <p:cNvSpPr/>
           <p:nvPr/>
         </p:nvSpPr>
@@ -22351,7 +23134,7 @@
       </p:sp>
       <p:sp>
         <p:nvSpPr>
-          <p:cNvPr id="28" name="Shape 26"/>
+          <p:cNvPr id="29" name="Shape 27"/>
           <p:cNvSpPr/>
           <p:nvPr/>
         </p:nvSpPr>
@@ -22378,7 +23161,7 @@
       </p:sp>
       <p:sp>
         <p:nvSpPr>
-          <p:cNvPr id="29" name="Text 27"/>
+          <p:cNvPr id="30" name="Text 28"/>
           <p:cNvSpPr/>
           <p:nvPr/>
         </p:nvSpPr>
@@ -22409,7 +23192,7 @@
                 <a:ea typeface="Trebuchet MS" pitchFamily="34" charset="-122"/>
                 <a:cs typeface="Trebuchet MS" pitchFamily="34" charset="-120"/>
               </a:rPr>
-              <a:t>de</a:t>
+              <a:t>pro</a:t>
             </a:r>
             <a:endParaRPr lang="en-US" sz="1400" dirty="0"/>
           </a:p>
@@ -22417,7 +23200,7 @@
       </p:sp>
       <p:sp>
         <p:nvSpPr>
-          <p:cNvPr id="30" name="Text 28"/>
+          <p:cNvPr id="31" name="Text 29"/>
           <p:cNvSpPr/>
           <p:nvPr/>
         </p:nvSpPr>
@@ -22456,7 +23239,7 @@
       </p:sp>
       <p:sp>
         <p:nvSpPr>
-          <p:cNvPr id="31" name="Shape 29"/>
+          <p:cNvPr id="32" name="Shape 30"/>
           <p:cNvSpPr/>
           <p:nvPr/>
         </p:nvSpPr>
@@ -22483,7 +23266,7 @@
       </p:sp>
       <p:sp>
         <p:nvSpPr>
-          <p:cNvPr id="32" name="Text 30"/>
+          <p:cNvPr id="33" name="Text 31"/>
           <p:cNvSpPr/>
           <p:nvPr/>
         </p:nvSpPr>
@@ -22514,7 +23297,7 @@
                 <a:ea typeface="Trebuchet MS" pitchFamily="34" charset="-122"/>
                 <a:cs typeface="Trebuchet MS" pitchFamily="34" charset="-120"/>
               </a:rPr>
-              <a:t>duc</a:t>
+              <a:t>du</a:t>
             </a:r>
             <a:endParaRPr lang="en-US" sz="1400" dirty="0"/>
           </a:p>
@@ -22522,7 +23305,7 @@
       </p:sp>
       <p:sp>
         <p:nvSpPr>
-          <p:cNvPr id="33" name="Text 31"/>
+          <p:cNvPr id="34" name="Text 32"/>
           <p:cNvSpPr/>
           <p:nvPr/>
         </p:nvSpPr>
@@ -22561,7 +23344,7 @@
       </p:sp>
       <p:sp>
         <p:nvSpPr>
-          <p:cNvPr id="34" name="Shape 32"/>
+          <p:cNvPr id="35" name="Shape 33"/>
           <p:cNvSpPr/>
           <p:nvPr/>
         </p:nvSpPr>
@@ -22588,7 +23371,7 @@
       </p:sp>
       <p:sp>
         <p:nvSpPr>
-          <p:cNvPr id="35" name="Text 33"/>
+          <p:cNvPr id="36" name="Text 34"/>
           <p:cNvSpPr/>
           <p:nvPr/>
         </p:nvSpPr>
@@ -22619,7 +23402,7 @@
                 <a:ea typeface="Trebuchet MS" pitchFamily="34" charset="-122"/>
                 <a:cs typeface="Trebuchet MS" pitchFamily="34" charset="-120"/>
               </a:rPr>
-              <a:t>tion</a:t>
+              <a:t>cer</a:t>
             </a:r>
             <a:endParaRPr lang="en-US" sz="1400" dirty="0"/>
           </a:p>
@@ -22627,7 +23410,7 @@
       </p:sp>
       <p:sp>
         <p:nvSpPr>
-          <p:cNvPr id="36" name="Shape 34"/>
+          <p:cNvPr id="37" name="Shape 35"/>
           <p:cNvSpPr/>
           <p:nvPr/>
         </p:nvSpPr>
@@ -22654,7 +23437,7 @@
       </p:sp>
       <p:sp>
         <p:nvSpPr>
-          <p:cNvPr id="37" name="Text 35"/>
+          <p:cNvPr id="38" name="Text 36"/>
           <p:cNvSpPr/>
           <p:nvPr/>
         </p:nvSpPr>
@@ -22693,7 +23476,7 @@
       </p:sp>
       <p:sp>
         <p:nvSpPr>
-          <p:cNvPr id="38" name="Shape 36"/>
+          <p:cNvPr id="39" name="Shape 37"/>
           <p:cNvSpPr/>
           <p:nvPr/>
         </p:nvSpPr>
@@ -22720,13 +23503,13 @@
       </p:sp>
       <p:sp>
         <p:nvSpPr>
-          <p:cNvPr id="39" name="Shape 37"/>
-          <p:cNvSpPr/>
-          <p:nvPr/>
-        </p:nvSpPr>
-        <p:spPr>
-          <a:xfrm>
-            <a:off x="2023872" y="4169664"/>
+          <p:cNvPr id="40" name="Shape 38"/>
+          <p:cNvSpPr/>
+          <p:nvPr/>
+        </p:nvSpPr>
+        <p:spPr>
+          <a:xfrm>
+            <a:off x="2124837" y="4169664"/>
             <a:ext cx="685800" cy="384048"/>
           </a:xfrm>
           <a:prstGeom prst="rect">
@@ -22747,13 +23530,13 @@
       </p:sp>
       <p:sp>
         <p:nvSpPr>
-          <p:cNvPr id="40" name="Text 38"/>
-          <p:cNvSpPr/>
-          <p:nvPr/>
-        </p:nvSpPr>
-        <p:spPr>
-          <a:xfrm>
-            <a:off x="2023872" y="4169664"/>
+          <p:cNvPr id="41" name="Text 39"/>
+          <p:cNvSpPr/>
+          <p:nvPr/>
+        </p:nvSpPr>
+        <p:spPr>
+          <a:xfrm>
+            <a:off x="2124837" y="4169664"/>
             <a:ext cx="685800" cy="384048"/>
           </a:xfrm>
           <a:prstGeom prst="rect">
@@ -22778,7 +23561,7 @@
                 <a:ea typeface="Trebuchet MS" pitchFamily="34" charset="-122"/>
                 <a:cs typeface="Trebuchet MS" pitchFamily="34" charset="-120"/>
               </a:rPr>
-              <a:t>d</a:t>
+              <a:t>p</a:t>
             </a:r>
             <a:endParaRPr lang="en-US" sz="900" dirty="0"/>
           </a:p>
@@ -22786,13 +23569,13 @@
       </p:sp>
       <p:sp>
         <p:nvSpPr>
-          <p:cNvPr id="41" name="Shape 39"/>
-          <p:cNvSpPr/>
-          <p:nvPr/>
-        </p:nvSpPr>
-        <p:spPr>
-          <a:xfrm>
-            <a:off x="2831592" y="4169664"/>
+          <p:cNvPr id="42" name="Shape 40"/>
+          <p:cNvSpPr/>
+          <p:nvPr/>
+        </p:nvSpPr>
+        <p:spPr>
+          <a:xfrm>
+            <a:off x="3033522" y="4169664"/>
             <a:ext cx="685800" cy="384048"/>
           </a:xfrm>
           <a:prstGeom prst="rect">
@@ -22813,13 +23596,13 @@
       </p:sp>
       <p:sp>
         <p:nvSpPr>
-          <p:cNvPr id="42" name="Text 40"/>
-          <p:cNvSpPr/>
-          <p:nvPr/>
-        </p:nvSpPr>
-        <p:spPr>
-          <a:xfrm>
-            <a:off x="2831592" y="4169664"/>
+          <p:cNvPr id="43" name="Text 41"/>
+          <p:cNvSpPr/>
+          <p:nvPr/>
+        </p:nvSpPr>
+        <p:spPr>
+          <a:xfrm>
+            <a:off x="3033522" y="4169664"/>
             <a:ext cx="685800" cy="384048"/>
           </a:xfrm>
           <a:prstGeom prst="rect">
@@ -22844,7 +23627,7 @@
                 <a:ea typeface="Trebuchet MS" pitchFamily="34" charset="-122"/>
                 <a:cs typeface="Trebuchet MS" pitchFamily="34" charset="-120"/>
               </a:rPr>
-              <a:t>e</a:t>
+              <a:t>r</a:t>
             </a:r>
             <a:endParaRPr lang="en-US" sz="900" dirty="0"/>
           </a:p>
@@ -22852,13 +23635,13 @@
       </p:sp>
       <p:sp>
         <p:nvSpPr>
-          <p:cNvPr id="43" name="Shape 41"/>
-          <p:cNvSpPr/>
-          <p:nvPr/>
-        </p:nvSpPr>
-        <p:spPr>
-          <a:xfrm>
-            <a:off x="3639312" y="4169664"/>
+          <p:cNvPr id="44" name="Shape 42"/>
+          <p:cNvSpPr/>
+          <p:nvPr/>
+        </p:nvSpPr>
+        <p:spPr>
+          <a:xfrm>
+            <a:off x="3942207" y="4169664"/>
             <a:ext cx="685800" cy="384048"/>
           </a:xfrm>
           <a:prstGeom prst="rect">
@@ -22879,13 +23662,13 @@
       </p:sp>
       <p:sp>
         <p:nvSpPr>
-          <p:cNvPr id="44" name="Text 42"/>
-          <p:cNvSpPr/>
-          <p:nvPr/>
-        </p:nvSpPr>
-        <p:spPr>
-          <a:xfrm>
-            <a:off x="3639312" y="4169664"/>
+          <p:cNvPr id="45" name="Text 43"/>
+          <p:cNvSpPr/>
+          <p:nvPr/>
+        </p:nvSpPr>
+        <p:spPr>
+          <a:xfrm>
+            <a:off x="3942207" y="4169664"/>
             <a:ext cx="685800" cy="384048"/>
           </a:xfrm>
           <a:prstGeom prst="rect">
@@ -22910,7 +23693,7 @@
                 <a:ea typeface="Trebuchet MS" pitchFamily="34" charset="-122"/>
                 <a:cs typeface="Trebuchet MS" pitchFamily="34" charset="-120"/>
               </a:rPr>
-              <a:t>d</a:t>
+              <a:t>o</a:t>
             </a:r>
             <a:endParaRPr lang="en-US" sz="900" dirty="0"/>
           </a:p>
@@ -22918,13 +23701,13 @@
       </p:sp>
       <p:sp>
         <p:nvSpPr>
-          <p:cNvPr id="45" name="Shape 43"/>
-          <p:cNvSpPr/>
-          <p:nvPr/>
-        </p:nvSpPr>
-        <p:spPr>
-          <a:xfrm>
-            <a:off x="4447032" y="4169664"/>
+          <p:cNvPr id="46" name="Shape 44"/>
+          <p:cNvSpPr/>
+          <p:nvPr/>
+        </p:nvSpPr>
+        <p:spPr>
+          <a:xfrm>
+            <a:off x="4850892" y="4169664"/>
             <a:ext cx="685800" cy="384048"/>
           </a:xfrm>
           <a:prstGeom prst="rect">
@@ -22945,13 +23728,13 @@
       </p:sp>
       <p:sp>
         <p:nvSpPr>
-          <p:cNvPr id="46" name="Text 44"/>
-          <p:cNvSpPr/>
-          <p:nvPr/>
-        </p:nvSpPr>
-        <p:spPr>
-          <a:xfrm>
-            <a:off x="4447032" y="4169664"/>
+          <p:cNvPr id="47" name="Text 45"/>
+          <p:cNvSpPr/>
+          <p:nvPr/>
+        </p:nvSpPr>
+        <p:spPr>
+          <a:xfrm>
+            <a:off x="4850892" y="4169664"/>
             <a:ext cx="685800" cy="384048"/>
           </a:xfrm>
           <a:prstGeom prst="rect">
@@ -22976,7 +23759,7 @@
                 <a:ea typeface="Trebuchet MS" pitchFamily="34" charset="-122"/>
                 <a:cs typeface="Trebuchet MS" pitchFamily="34" charset="-120"/>
               </a:rPr>
-              <a:t>u</a:t>
+              <a:t>d</a:t>
             </a:r>
             <a:endParaRPr lang="en-US" sz="900" dirty="0"/>
           </a:p>
@@ -22984,13 +23767,13 @@
       </p:sp>
       <p:sp>
         <p:nvSpPr>
-          <p:cNvPr id="47" name="Shape 45"/>
-          <p:cNvSpPr/>
-          <p:nvPr/>
-        </p:nvSpPr>
-        <p:spPr>
-          <a:xfrm>
-            <a:off x="5254752" y="4169664"/>
+          <p:cNvPr id="48" name="Shape 46"/>
+          <p:cNvSpPr/>
+          <p:nvPr/>
+        </p:nvSpPr>
+        <p:spPr>
+          <a:xfrm>
+            <a:off x="5759577" y="4169664"/>
             <a:ext cx="685800" cy="384048"/>
           </a:xfrm>
           <a:prstGeom prst="rect">
@@ -23011,13 +23794,13 @@
       </p:sp>
       <p:sp>
         <p:nvSpPr>
-          <p:cNvPr id="48" name="Text 46"/>
-          <p:cNvSpPr/>
-          <p:nvPr/>
-        </p:nvSpPr>
-        <p:spPr>
-          <a:xfrm>
-            <a:off x="5254752" y="4169664"/>
+          <p:cNvPr id="49" name="Text 47"/>
+          <p:cNvSpPr/>
+          <p:nvPr/>
+        </p:nvSpPr>
+        <p:spPr>
+          <a:xfrm>
+            <a:off x="5759577" y="4169664"/>
             <a:ext cx="685800" cy="384048"/>
           </a:xfrm>
           <a:prstGeom prst="rect">
@@ -23042,6 +23825,72 @@
                 <a:ea typeface="Trebuchet MS" pitchFamily="34" charset="-122"/>
                 <a:cs typeface="Trebuchet MS" pitchFamily="34" charset="-120"/>
               </a:rPr>
+              <a:t>u</a:t>
+            </a:r>
+            <a:endParaRPr lang="en-US" sz="900" dirty="0"/>
+          </a:p>
+        </p:txBody>
+      </p:sp>
+      <p:sp>
+        <p:nvSpPr>
+          <p:cNvPr id="50" name="Shape 48"/>
+          <p:cNvSpPr/>
+          <p:nvPr/>
+        </p:nvSpPr>
+        <p:spPr>
+          <a:xfrm>
+            <a:off x="6668262" y="4169664"/>
+            <a:ext cx="685800" cy="384048"/>
+          </a:xfrm>
+          <a:prstGeom prst="rect">
+            <a:avLst>
+              <a:gd name="adj" fmla="val 9524"/>
+            </a:avLst>
+          </a:prstGeom>
+          <a:solidFill>
+            <a:srgbClr val="FFFFFF"/>
+          </a:solidFill>
+          <a:ln w="12700">
+            <a:solidFill>
+              <a:srgbClr val="DB2777"/>
+            </a:solidFill>
+            <a:prstDash val="solid"/>
+          </a:ln>
+        </p:spPr>
+      </p:sp>
+      <p:sp>
+        <p:nvSpPr>
+          <p:cNvPr id="51" name="Text 49"/>
+          <p:cNvSpPr/>
+          <p:nvPr/>
+        </p:nvSpPr>
+        <p:spPr>
+          <a:xfrm>
+            <a:off x="6668262" y="4169664"/>
+            <a:ext cx="685800" cy="384048"/>
+          </a:xfrm>
+          <a:prstGeom prst="rect">
+            <a:avLst/>
+          </a:prstGeom>
+          <a:noFill/>
+          <a:ln/>
+        </p:spPr>
+        <p:txBody>
+          <a:bodyPr wrap="square" lIns="0" tIns="0" rIns="0" bIns="0" rtlCol="0" anchor="ctr"/>
+          <a:lstStyle/>
+          <a:p>
+            <a:pPr algn="ctr" indent="0" marL="0">
+              <a:buNone/>
+            </a:pPr>
+            <a:r>
+              <a:rPr lang="en-US" sz="900" b="1" dirty="0">
+                <a:solidFill>
+                  <a:srgbClr val="9D174D"/>
+                </a:solidFill>
+                <a:latin typeface="Trebuchet MS" pitchFamily="34" charset="0"/>
+                <a:ea typeface="Trebuchet MS" pitchFamily="34" charset="-122"/>
+                <a:cs typeface="Trebuchet MS" pitchFamily="34" charset="-120"/>
+              </a:rPr>
               <a:t>c</a:t>
             </a:r>
             <a:endParaRPr lang="en-US" sz="900" dirty="0"/>
@@ -23050,13 +23899,13 @@
       </p:sp>
       <p:sp>
         <p:nvSpPr>
-          <p:cNvPr id="49" name="Text 47"/>
-          <p:cNvSpPr/>
-          <p:nvPr/>
-        </p:nvSpPr>
-        <p:spPr>
-          <a:xfrm>
-            <a:off x="5254752" y="4572000"/>
+          <p:cNvPr id="52" name="Text 50"/>
+          <p:cNvSpPr/>
+          <p:nvPr/>
+        </p:nvSpPr>
+        <p:spPr>
+          <a:xfrm>
+            <a:off x="6668262" y="4572000"/>
             <a:ext cx="685800" cy="219456"/>
           </a:xfrm>
           <a:prstGeom prst="rect">
@@ -23081,7 +23930,7 @@
                 <a:ea typeface="Calibri" pitchFamily="34" charset="-122"/>
                 <a:cs typeface="Calibri" pitchFamily="34" charset="-120"/>
               </a:rPr>
-              <a:t>/k/</a:t>
+              <a:t>/s/</a:t>
             </a:r>
             <a:endParaRPr lang="en-US" sz="750" dirty="0"/>
           </a:p>
@@ -23089,13 +23938,13 @@
       </p:sp>
       <p:sp>
         <p:nvSpPr>
-          <p:cNvPr id="50" name="Shape 48"/>
-          <p:cNvSpPr/>
-          <p:nvPr/>
-        </p:nvSpPr>
-        <p:spPr>
-          <a:xfrm>
-            <a:off x="6062472" y="4169664"/>
+          <p:cNvPr id="53" name="Shape 51"/>
+          <p:cNvSpPr/>
+          <p:nvPr/>
+        </p:nvSpPr>
+        <p:spPr>
+          <a:xfrm>
+            <a:off x="7576947" y="4169664"/>
             <a:ext cx="685800" cy="384048"/>
           </a:xfrm>
           <a:prstGeom prst="rect">
@@ -23116,13 +23965,13 @@
       </p:sp>
       <p:sp>
         <p:nvSpPr>
-          <p:cNvPr id="51" name="Text 49"/>
-          <p:cNvSpPr/>
-          <p:nvPr/>
-        </p:nvSpPr>
-        <p:spPr>
-          <a:xfrm>
-            <a:off x="6062472" y="4169664"/>
+          <p:cNvPr id="54" name="Text 52"/>
+          <p:cNvSpPr/>
+          <p:nvPr/>
+        </p:nvSpPr>
+        <p:spPr>
+          <a:xfrm>
+            <a:off x="7576947" y="4169664"/>
             <a:ext cx="685800" cy="384048"/>
           </a:xfrm>
           <a:prstGeom prst="rect">
@@ -23147,178 +23996,7 @@
                 <a:ea typeface="Trebuchet MS" pitchFamily="34" charset="-122"/>
                 <a:cs typeface="Trebuchet MS" pitchFamily="34" charset="-120"/>
               </a:rPr>
-              <a:t>t</a:t>
-            </a:r>
-            <a:endParaRPr lang="en-US" sz="900" dirty="0"/>
-          </a:p>
-        </p:txBody>
-      </p:sp>
-      <p:sp>
-        <p:nvSpPr>
-          <p:cNvPr id="52" name="Shape 50"/>
-          <p:cNvSpPr/>
-          <p:nvPr/>
-        </p:nvSpPr>
-        <p:spPr>
-          <a:xfrm>
-            <a:off x="6870192" y="4169664"/>
-            <a:ext cx="685800" cy="384048"/>
-          </a:xfrm>
-          <a:prstGeom prst="rect">
-            <a:avLst>
-              <a:gd name="adj" fmla="val 9524"/>
-            </a:avLst>
-          </a:prstGeom>
-          <a:solidFill>
-            <a:srgbClr val="FFFFFF"/>
-          </a:solidFill>
-          <a:ln w="12700">
-            <a:solidFill>
-              <a:srgbClr val="DB2777"/>
-            </a:solidFill>
-            <a:prstDash val="solid"/>
-          </a:ln>
-        </p:spPr>
-      </p:sp>
-      <p:sp>
-        <p:nvSpPr>
-          <p:cNvPr id="53" name="Text 51"/>
-          <p:cNvSpPr/>
-          <p:nvPr/>
-        </p:nvSpPr>
-        <p:spPr>
-          <a:xfrm>
-            <a:off x="6870192" y="4169664"/>
-            <a:ext cx="685800" cy="384048"/>
-          </a:xfrm>
-          <a:prstGeom prst="rect">
-            <a:avLst/>
-          </a:prstGeom>
-          <a:noFill/>
-          <a:ln/>
-        </p:spPr>
-        <p:txBody>
-          <a:bodyPr wrap="square" lIns="0" tIns="0" rIns="0" bIns="0" rtlCol="0" anchor="ctr"/>
-          <a:lstStyle/>
-          <a:p>
-            <a:pPr algn="ctr" indent="0" marL="0">
-              <a:buNone/>
-            </a:pPr>
-            <a:r>
-              <a:rPr lang="en-US" sz="900" b="1" dirty="0">
-                <a:solidFill>
-                  <a:srgbClr val="9D174D"/>
-                </a:solidFill>
-                <a:latin typeface="Trebuchet MS" pitchFamily="34" charset="0"/>
-                <a:ea typeface="Trebuchet MS" pitchFamily="34" charset="-122"/>
-                <a:cs typeface="Trebuchet MS" pitchFamily="34" charset="-120"/>
-              </a:rPr>
-              <a:t>io</a:t>
-            </a:r>
-            <a:endParaRPr lang="en-US" sz="900" dirty="0"/>
-          </a:p>
-        </p:txBody>
-      </p:sp>
-      <p:sp>
-        <p:nvSpPr>
-          <p:cNvPr id="54" name="Text 52"/>
-          <p:cNvSpPr/>
-          <p:nvPr/>
-        </p:nvSpPr>
-        <p:spPr>
-          <a:xfrm>
-            <a:off x="6870192" y="4572000"/>
-            <a:ext cx="685800" cy="219456"/>
-          </a:xfrm>
-          <a:prstGeom prst="rect">
-            <a:avLst/>
-          </a:prstGeom>
-          <a:noFill/>
-          <a:ln/>
-        </p:spPr>
-        <p:txBody>
-          <a:bodyPr wrap="square" lIns="0" tIns="0" rIns="0" bIns="0" rtlCol="0" anchor="t"/>
-          <a:lstStyle/>
-          <a:p>
-            <a:pPr algn="ctr" indent="0" marL="0">
-              <a:buNone/>
-            </a:pPr>
-            <a:r>
-              <a:rPr lang="en-US" sz="750" i="1" dirty="0">
-                <a:solidFill>
-                  <a:srgbClr val="94A3B8"/>
-                </a:solidFill>
-                <a:latin typeface="Calibri" pitchFamily="34" charset="0"/>
-                <a:ea typeface="Calibri" pitchFamily="34" charset="-122"/>
-                <a:cs typeface="Calibri" pitchFamily="34" charset="-120"/>
-              </a:rPr>
-              <a:t>/sh/</a:t>
-            </a:r>
-            <a:endParaRPr lang="en-US" sz="750" dirty="0"/>
-          </a:p>
-        </p:txBody>
-      </p:sp>
-      <p:sp>
-        <p:nvSpPr>
-          <p:cNvPr id="55" name="Shape 53"/>
-          <p:cNvSpPr/>
-          <p:nvPr/>
-        </p:nvSpPr>
-        <p:spPr>
-          <a:xfrm>
-            <a:off x="7677912" y="4169664"/>
-            <a:ext cx="685800" cy="384048"/>
-          </a:xfrm>
-          <a:prstGeom prst="rect">
-            <a:avLst>
-              <a:gd name="adj" fmla="val 9524"/>
-            </a:avLst>
-          </a:prstGeom>
-          <a:solidFill>
-            <a:srgbClr val="FFFFFF"/>
-          </a:solidFill>
-          <a:ln w="12700">
-            <a:solidFill>
-              <a:srgbClr val="DB2777"/>
-            </a:solidFill>
-            <a:prstDash val="solid"/>
-          </a:ln>
-        </p:spPr>
-      </p:sp>
-      <p:sp>
-        <p:nvSpPr>
-          <p:cNvPr id="56" name="Text 54"/>
-          <p:cNvSpPr/>
-          <p:nvPr/>
-        </p:nvSpPr>
-        <p:spPr>
-          <a:xfrm>
-            <a:off x="7677912" y="4169664"/>
-            <a:ext cx="685800" cy="384048"/>
-          </a:xfrm>
-          <a:prstGeom prst="rect">
-            <a:avLst/>
-          </a:prstGeom>
-          <a:noFill/>
-          <a:ln/>
-        </p:spPr>
-        <p:txBody>
-          <a:bodyPr wrap="square" lIns="0" tIns="0" rIns="0" bIns="0" rtlCol="0" anchor="ctr"/>
-          <a:lstStyle/>
-          <a:p>
-            <a:pPr algn="ctr" indent="0" marL="0">
-              <a:buNone/>
-            </a:pPr>
-            <a:r>
-              <a:rPr lang="en-US" sz="900" b="1" dirty="0">
-                <a:solidFill>
-                  <a:srgbClr val="9D174D"/>
-                </a:solidFill>
-                <a:latin typeface="Trebuchet MS" pitchFamily="34" charset="0"/>
-                <a:ea typeface="Trebuchet MS" pitchFamily="34" charset="-122"/>
-                <a:cs typeface="Trebuchet MS" pitchFamily="34" charset="-120"/>
-              </a:rPr>
-              <a:t>n</a:t>
+              <a:t>er</a:t>
             </a:r>
             <a:endParaRPr lang="en-US" sz="900" dirty="0"/>
           </a:p>
@@ -23610,7 +24288,7 @@
                 <a:ea typeface="Calibri" pitchFamily="34" charset="-122"/>
                 <a:cs typeface="Calibri" pitchFamily="34" charset="-120"/>
               </a:rPr>
-              <a:t>Word Labs  •  wordlabs.app  •  Root: 'duct' = to lead or carry</a:t>
+              <a:t>Word Labs  •  wordlabs.app  •  Root: 'duct' = to lead or bring</a:t>
             </a:r>
             <a:endParaRPr lang="en-US" sz="800" dirty="0"/>
           </a:p>
@@ -23749,7 +24427,7 @@
                 <a:ea typeface="Trebuchet MS" pitchFamily="34" charset="-122"/>
                 <a:cs typeface="Trebuchet MS" pitchFamily="34" charset="-120"/>
               </a:rPr>
-              <a:t>ductile</a:t>
+              <a:t>deduct</a:t>
             </a:r>
             <a:endParaRPr lang="en-US" sz="2800" dirty="0"/>
           </a:p>
@@ -24437,7 +25115,7 @@
                 <a:ea typeface="Calibri" pitchFamily="34" charset="-122"/>
                 <a:cs typeface="Calibri" pitchFamily="34" charset="-120"/>
               </a:rPr>
-              <a:t>Word Labs  •  wordlabs.app  •  Root: 'duct' = to lead or carry</a:t>
+              <a:t>Word Labs  •  wordlabs.app  •  Root: 'duct' = to lead or bring</a:t>
             </a:r>
             <a:endParaRPr lang="en-US" sz="800" dirty="0"/>
           </a:p>
@@ -24576,7 +25254,7 @@
                 <a:ea typeface="Trebuchet MS" pitchFamily="34" charset="-122"/>
                 <a:cs typeface="Trebuchet MS" pitchFamily="34" charset="-120"/>
               </a:rPr>
-              <a:t>ductile</a:t>
+              <a:t>deduct</a:t>
             </a:r>
             <a:endParaRPr lang="en-US" sz="2800" dirty="0"/>
           </a:p>
@@ -24665,11 +25343,11 @@
             </a:avLst>
           </a:prstGeom>
           <a:solidFill>
-            <a:srgbClr val="CCFBF1"/>
+            <a:srgbClr val="DDD6FE"/>
           </a:solidFill>
           <a:ln w="19050">
             <a:solidFill>
-              <a:srgbClr val="0D9488"/>
+              <a:srgbClr val="7C3AED"/>
             </a:solidFill>
             <a:prstDash val="solid"/>
           </a:ln>
@@ -24709,13 +25387,13 @@
             <a:r>
               <a:rPr lang="en-US" sz="1300" b="1" dirty="0">
                 <a:solidFill>
-                  <a:srgbClr val="0F766E"/>
+                  <a:srgbClr val="4C1D95"/>
                 </a:solidFill>
                 <a:latin typeface="Trebuchet MS" pitchFamily="34" charset="0"/>
                 <a:ea typeface="Trebuchet MS" pitchFamily="34" charset="-122"/>
                 <a:cs typeface="Trebuchet MS" pitchFamily="34" charset="-120"/>
               </a:rPr>
-              <a:t>duct</a:t>
+              <a:t>de</a:t>
             </a:r>
             <a:endParaRPr lang="en-US" sz="1300" dirty="0"/>
           </a:p>
@@ -24754,7 +25432,7 @@
                 <a:ea typeface="Calibri" pitchFamily="34" charset="-122"/>
                 <a:cs typeface="Calibri" pitchFamily="34" charset="-120"/>
               </a:rPr>
-              <a:t>to lead or carry</a:t>
+              <a:t>away, remove</a:t>
             </a:r>
             <a:endParaRPr lang="en-US" sz="850" dirty="0"/>
           </a:p>
@@ -24777,11 +25455,11 @@
             </a:avLst>
           </a:prstGeom>
           <a:solidFill>
-            <a:srgbClr val="FCE7F3"/>
+            <a:srgbClr val="CCFBF1"/>
           </a:solidFill>
           <a:ln w="19050">
             <a:solidFill>
-              <a:srgbClr val="DB2777"/>
+              <a:srgbClr val="0D9488"/>
             </a:solidFill>
             <a:prstDash val="solid"/>
           </a:ln>
@@ -24821,13 +25499,13 @@
             <a:r>
               <a:rPr lang="en-US" sz="1300" b="1" dirty="0">
                 <a:solidFill>
-                  <a:srgbClr val="9D174D"/>
+                  <a:srgbClr val="0F766E"/>
                 </a:solidFill>
                 <a:latin typeface="Trebuchet MS" pitchFamily="34" charset="0"/>
                 <a:ea typeface="Trebuchet MS" pitchFamily="34" charset="-122"/>
                 <a:cs typeface="Trebuchet MS" pitchFamily="34" charset="-120"/>
               </a:rPr>
-              <a:t>ile</a:t>
+              <a:t>duct</a:t>
             </a:r>
             <a:endParaRPr lang="en-US" sz="1300" dirty="0"/>
           </a:p>
@@ -24866,7 +25544,7 @@
                 <a:ea typeface="Calibri" pitchFamily="34" charset="-122"/>
                 <a:cs typeface="Calibri" pitchFamily="34" charset="-120"/>
               </a:rPr>
-              <a:t>capable of, able to be</a:t>
+              <a:t>to lead</a:t>
             </a:r>
             <a:endParaRPr lang="en-US" sz="850" dirty="0"/>
           </a:p>
@@ -25422,7 +26100,7 @@
                 <a:ea typeface="Calibri" pitchFamily="34" charset="-122"/>
                 <a:cs typeface="Calibri" pitchFamily="34" charset="-120"/>
               </a:rPr>
-              <a:t>Word Labs  •  wordlabs.app  •  Root: 'duct' = to lead or carry</a:t>
+              <a:t>Word Labs  •  wordlabs.app  •  Root: 'duct' = to lead or bring</a:t>
             </a:r>
             <a:endParaRPr lang="en-US" sz="800" dirty="0"/>
           </a:p>
@@ -25495,7 +26173,7 @@
                 <a:ea typeface="Trebuchet MS" pitchFamily="34" charset="-122"/>
                 <a:cs typeface="Trebuchet MS" pitchFamily="34" charset="-120"/>
               </a:rPr>
-              <a:t>We are learning that the root 'duct' means 'to lead or carry'.</a:t>
+              <a:t>We are learning that the root 'duct' means 'to lead or bring'.</a:t>
             </a:r>
             <a:endParaRPr lang="en-US" sz="2000" dirty="0"/>
           </a:p>
@@ -26141,7 +26819,7 @@
                 <a:ea typeface="Calibri" pitchFamily="34" charset="-122"/>
                 <a:cs typeface="Calibri" pitchFamily="34" charset="-120"/>
               </a:rPr>
-              <a:t>Word Labs  •  wordlabs.app  •  Root: 'duct' = to lead or carry</a:t>
+              <a:t>Word Labs  •  wordlabs.app  •  Root: 'duct' = to lead or bring</a:t>
             </a:r>
             <a:endParaRPr lang="en-US" sz="800" dirty="0"/>
           </a:p>
@@ -26280,7 +26958,7 @@
                 <a:ea typeface="Trebuchet MS" pitchFamily="34" charset="-122"/>
                 <a:cs typeface="Trebuchet MS" pitchFamily="34" charset="-120"/>
               </a:rPr>
-              <a:t>ductile</a:t>
+              <a:t>deduct</a:t>
             </a:r>
             <a:endParaRPr lang="en-US" sz="2800" dirty="0"/>
           </a:p>
@@ -26369,11 +27047,11 @@
             </a:avLst>
           </a:prstGeom>
           <a:solidFill>
-            <a:srgbClr val="CCFBF1"/>
+            <a:srgbClr val="DDD6FE"/>
           </a:solidFill>
           <a:ln w="19050">
             <a:solidFill>
-              <a:srgbClr val="0D9488"/>
+              <a:srgbClr val="7C3AED"/>
             </a:solidFill>
             <a:prstDash val="solid"/>
           </a:ln>
@@ -26413,13 +27091,13 @@
             <a:r>
               <a:rPr lang="en-US" sz="1300" b="1" dirty="0">
                 <a:solidFill>
-                  <a:srgbClr val="0F766E"/>
+                  <a:srgbClr val="4C1D95"/>
                 </a:solidFill>
                 <a:latin typeface="Trebuchet MS" pitchFamily="34" charset="0"/>
                 <a:ea typeface="Trebuchet MS" pitchFamily="34" charset="-122"/>
                 <a:cs typeface="Trebuchet MS" pitchFamily="34" charset="-120"/>
               </a:rPr>
-              <a:t>duct</a:t>
+              <a:t>de</a:t>
             </a:r>
             <a:endParaRPr lang="en-US" sz="1300" dirty="0"/>
           </a:p>
@@ -26458,7 +27136,7 @@
                 <a:ea typeface="Calibri" pitchFamily="34" charset="-122"/>
                 <a:cs typeface="Calibri" pitchFamily="34" charset="-120"/>
               </a:rPr>
-              <a:t>to lead or carry</a:t>
+              <a:t>away, remove</a:t>
             </a:r>
             <a:endParaRPr lang="en-US" sz="850" dirty="0"/>
           </a:p>
@@ -26481,11 +27159,11 @@
             </a:avLst>
           </a:prstGeom>
           <a:solidFill>
-            <a:srgbClr val="FCE7F3"/>
+            <a:srgbClr val="CCFBF1"/>
           </a:solidFill>
           <a:ln w="19050">
             <a:solidFill>
-              <a:srgbClr val="DB2777"/>
+              <a:srgbClr val="0D9488"/>
             </a:solidFill>
             <a:prstDash val="solid"/>
           </a:ln>
@@ -26525,13 +27203,13 @@
             <a:r>
               <a:rPr lang="en-US" sz="1300" b="1" dirty="0">
                 <a:solidFill>
-                  <a:srgbClr val="9D174D"/>
+                  <a:srgbClr val="0F766E"/>
                 </a:solidFill>
                 <a:latin typeface="Trebuchet MS" pitchFamily="34" charset="0"/>
                 <a:ea typeface="Trebuchet MS" pitchFamily="34" charset="-122"/>
                 <a:cs typeface="Trebuchet MS" pitchFamily="34" charset="-120"/>
               </a:rPr>
-              <a:t>ile</a:t>
+              <a:t>duct</a:t>
             </a:r>
             <a:endParaRPr lang="en-US" sz="1300" dirty="0"/>
           </a:p>
@@ -26570,7 +27248,7 @@
                 <a:ea typeface="Calibri" pitchFamily="34" charset="-122"/>
                 <a:cs typeface="Calibri" pitchFamily="34" charset="-120"/>
               </a:rPr>
-              <a:t>capable of, able to be</a:t>
+              <a:t>to lead</a:t>
             </a:r>
             <a:endParaRPr lang="en-US" sz="850" dirty="0"/>
           </a:p>
@@ -26729,7 +27407,7 @@
                 <a:ea typeface="Trebuchet MS" pitchFamily="34" charset="-122"/>
                 <a:cs typeface="Trebuchet MS" pitchFamily="34" charset="-120"/>
               </a:rPr>
-              <a:t>duc</a:t>
+              <a:t>de</a:t>
             </a:r>
             <a:endParaRPr lang="en-US" sz="1400" dirty="0"/>
           </a:p>
@@ -26834,7 +27512,7 @@
                 <a:ea typeface="Trebuchet MS" pitchFamily="34" charset="-122"/>
                 <a:cs typeface="Trebuchet MS" pitchFamily="34" charset="-120"/>
               </a:rPr>
-              <a:t>tile</a:t>
+              <a:t>duct</a:t>
             </a:r>
             <a:endParaRPr lang="en-US" sz="1400" dirty="0"/>
           </a:p>
@@ -27258,7 +27936,7 @@
                 <a:ea typeface="Calibri" pitchFamily="34" charset="-122"/>
                 <a:cs typeface="Calibri" pitchFamily="34" charset="-120"/>
               </a:rPr>
-              <a:t>Word Labs  •  wordlabs.app  •  Root: 'duct' = to lead or carry</a:t>
+              <a:t>Word Labs  •  wordlabs.app  •  Root: 'duct' = to lead or bring</a:t>
             </a:r>
             <a:endParaRPr lang="en-US" sz="800" dirty="0"/>
           </a:p>
@@ -27397,7 +28075,7 @@
                 <a:ea typeface="Trebuchet MS" pitchFamily="34" charset="-122"/>
                 <a:cs typeface="Trebuchet MS" pitchFamily="34" charset="-120"/>
               </a:rPr>
-              <a:t>ductile</a:t>
+              <a:t>deduct</a:t>
             </a:r>
             <a:endParaRPr lang="en-US" sz="2800" dirty="0"/>
           </a:p>
@@ -27486,11 +28164,11 @@
             </a:avLst>
           </a:prstGeom>
           <a:solidFill>
-            <a:srgbClr val="CCFBF1"/>
+            <a:srgbClr val="DDD6FE"/>
           </a:solidFill>
           <a:ln w="19050">
             <a:solidFill>
-              <a:srgbClr val="0D9488"/>
+              <a:srgbClr val="7C3AED"/>
             </a:solidFill>
             <a:prstDash val="solid"/>
           </a:ln>
@@ -27530,13 +28208,13 @@
             <a:r>
               <a:rPr lang="en-US" sz="1300" b="1" dirty="0">
                 <a:solidFill>
-                  <a:srgbClr val="0F766E"/>
+                  <a:srgbClr val="4C1D95"/>
                 </a:solidFill>
                 <a:latin typeface="Trebuchet MS" pitchFamily="34" charset="0"/>
                 <a:ea typeface="Trebuchet MS" pitchFamily="34" charset="-122"/>
                 <a:cs typeface="Trebuchet MS" pitchFamily="34" charset="-120"/>
               </a:rPr>
-              <a:t>duct</a:t>
+              <a:t>de</a:t>
             </a:r>
             <a:endParaRPr lang="en-US" sz="1300" dirty="0"/>
           </a:p>
@@ -27575,7 +28253,7 @@
                 <a:ea typeface="Calibri" pitchFamily="34" charset="-122"/>
                 <a:cs typeface="Calibri" pitchFamily="34" charset="-120"/>
               </a:rPr>
-              <a:t>to lead or carry</a:t>
+              <a:t>away, remove</a:t>
             </a:r>
             <a:endParaRPr lang="en-US" sz="850" dirty="0"/>
           </a:p>
@@ -27598,11 +28276,11 @@
             </a:avLst>
           </a:prstGeom>
           <a:solidFill>
-            <a:srgbClr val="FCE7F3"/>
+            <a:srgbClr val="CCFBF1"/>
           </a:solidFill>
           <a:ln w="19050">
             <a:solidFill>
-              <a:srgbClr val="DB2777"/>
+              <a:srgbClr val="0D9488"/>
             </a:solidFill>
             <a:prstDash val="solid"/>
           </a:ln>
@@ -27642,13 +28320,13 @@
             <a:r>
               <a:rPr lang="en-US" sz="1300" b="1" dirty="0">
                 <a:solidFill>
-                  <a:srgbClr val="9D174D"/>
+                  <a:srgbClr val="0F766E"/>
                 </a:solidFill>
                 <a:latin typeface="Trebuchet MS" pitchFamily="34" charset="0"/>
                 <a:ea typeface="Trebuchet MS" pitchFamily="34" charset="-122"/>
                 <a:cs typeface="Trebuchet MS" pitchFamily="34" charset="-120"/>
               </a:rPr>
-              <a:t>ile</a:t>
+              <a:t>duct</a:t>
             </a:r>
             <a:endParaRPr lang="en-US" sz="1300" dirty="0"/>
           </a:p>
@@ -27687,7 +28365,7 @@
                 <a:ea typeface="Calibri" pitchFamily="34" charset="-122"/>
                 <a:cs typeface="Calibri" pitchFamily="34" charset="-120"/>
               </a:rPr>
-              <a:t>capable of, able to be</a:t>
+              <a:t>to lead</a:t>
             </a:r>
             <a:endParaRPr lang="en-US" sz="850" dirty="0"/>
           </a:p>
@@ -27846,7 +28524,7 @@
                 <a:ea typeface="Trebuchet MS" pitchFamily="34" charset="-122"/>
                 <a:cs typeface="Trebuchet MS" pitchFamily="34" charset="-120"/>
               </a:rPr>
-              <a:t>duc</a:t>
+              <a:t>de</a:t>
             </a:r>
             <a:endParaRPr lang="en-US" sz="1400" dirty="0"/>
           </a:p>
@@ -27951,7 +28629,7 @@
                 <a:ea typeface="Trebuchet MS" pitchFamily="34" charset="-122"/>
                 <a:cs typeface="Trebuchet MS" pitchFamily="34" charset="-120"/>
               </a:rPr>
-              <a:t>tile</a:t>
+              <a:t>duct</a:t>
             </a:r>
             <a:endParaRPr lang="en-US" sz="1400" dirty="0"/>
           </a:p>
@@ -28032,11 +28710,11 @@
         <p:spPr>
           <a:xfrm>
             <a:off x="1874520" y="4096512"/>
-            <a:ext cx="6903720" cy="804672"/>
+            <a:ext cx="6903720" cy="658368"/>
           </a:xfrm>
           <a:prstGeom prst="rect">
             <a:avLst>
-              <a:gd name="adj" fmla="val 6818"/>
+              <a:gd name="adj" fmla="val 8333"/>
             </a:avLst>
           </a:prstGeom>
           <a:solidFill>
@@ -28058,12 +28736,12 @@
         </p:nvSpPr>
         <p:spPr>
           <a:xfrm>
-            <a:off x="2427732" y="4169664"/>
-            <a:ext cx="685800" cy="384048"/>
+            <a:off x="2254649" y="4169664"/>
+            <a:ext cx="685800" cy="475488"/>
           </a:xfrm>
           <a:prstGeom prst="rect">
             <a:avLst>
-              <a:gd name="adj" fmla="val 9524"/>
+              <a:gd name="adj" fmla="val 7692"/>
             </a:avLst>
           </a:prstGeom>
           <a:solidFill>
@@ -28085,8 +28763,8 @@
         </p:nvSpPr>
         <p:spPr>
           <a:xfrm>
-            <a:off x="2427732" y="4169664"/>
-            <a:ext cx="685800" cy="384048"/>
+            <a:off x="2254649" y="4169664"/>
+            <a:ext cx="685800" cy="475488"/>
           </a:xfrm>
           <a:prstGeom prst="rect">
             <a:avLst/>
@@ -28124,12 +28802,12 @@
         </p:nvSpPr>
         <p:spPr>
           <a:xfrm>
-            <a:off x="3639312" y="4169664"/>
-            <a:ext cx="685800" cy="384048"/>
+            <a:off x="3293146" y="4169664"/>
+            <a:ext cx="685800" cy="475488"/>
           </a:xfrm>
           <a:prstGeom prst="rect">
             <a:avLst>
-              <a:gd name="adj" fmla="val 9524"/>
+              <a:gd name="adj" fmla="val 7692"/>
             </a:avLst>
           </a:prstGeom>
           <a:solidFill>
@@ -28151,8 +28829,8 @@
         </p:nvSpPr>
         <p:spPr>
           <a:xfrm>
-            <a:off x="3639312" y="4169664"/>
-            <a:ext cx="685800" cy="384048"/>
+            <a:off x="3293146" y="4169664"/>
+            <a:ext cx="685800" cy="475488"/>
           </a:xfrm>
           <a:prstGeom prst="rect">
             <a:avLst/>
@@ -28176,7 +28854,7 @@
                 <a:ea typeface="Trebuchet MS" pitchFamily="34" charset="-122"/>
                 <a:cs typeface="Trebuchet MS" pitchFamily="34" charset="-120"/>
               </a:rPr>
-              <a:t>u</a:t>
+              <a:t>e</a:t>
             </a:r>
             <a:endParaRPr lang="en-US" sz="900" dirty="0"/>
           </a:p>
@@ -28190,12 +28868,12 @@
         </p:nvSpPr>
         <p:spPr>
           <a:xfrm>
-            <a:off x="4850892" y="4169664"/>
-            <a:ext cx="685800" cy="384048"/>
+            <a:off x="4331643" y="4169664"/>
+            <a:ext cx="685800" cy="475488"/>
           </a:xfrm>
           <a:prstGeom prst="rect">
             <a:avLst>
-              <a:gd name="adj" fmla="val 9524"/>
+              <a:gd name="adj" fmla="val 7692"/>
             </a:avLst>
           </a:prstGeom>
           <a:solidFill>
@@ -28217,8 +28895,8 @@
         </p:nvSpPr>
         <p:spPr>
           <a:xfrm>
-            <a:off x="4850892" y="4169664"/>
-            <a:ext cx="685800" cy="384048"/>
+            <a:off x="4331643" y="4169664"/>
+            <a:ext cx="685800" cy="475488"/>
           </a:xfrm>
           <a:prstGeom prst="rect">
             <a:avLst/>
@@ -28242,7 +28920,7 @@
                 <a:ea typeface="Trebuchet MS" pitchFamily="34" charset="-122"/>
                 <a:cs typeface="Trebuchet MS" pitchFamily="34" charset="-120"/>
               </a:rPr>
-              <a:t>c</a:t>
+              <a:t>d</a:t>
             </a:r>
             <a:endParaRPr lang="en-US" sz="900" dirty="0"/>
           </a:p>
@@ -28250,57 +28928,18 @@
       </p:sp>
       <p:sp>
         <p:nvSpPr>
-          <p:cNvPr id="39" name="Text 37"/>
-          <p:cNvSpPr/>
-          <p:nvPr/>
-        </p:nvSpPr>
-        <p:spPr>
-          <a:xfrm>
-            <a:off x="4850892" y="4572000"/>
-            <a:ext cx="685800" cy="219456"/>
-          </a:xfrm>
-          <a:prstGeom prst="rect">
-            <a:avLst/>
-          </a:prstGeom>
-          <a:noFill/>
-          <a:ln/>
-        </p:spPr>
-        <p:txBody>
-          <a:bodyPr wrap="square" lIns="0" tIns="0" rIns="0" bIns="0" rtlCol="0" anchor="t"/>
-          <a:lstStyle/>
-          <a:p>
-            <a:pPr algn="ctr" indent="0" marL="0">
-              <a:buNone/>
-            </a:pPr>
-            <a:r>
-              <a:rPr lang="en-US" sz="750" i="1" dirty="0">
-                <a:solidFill>
-                  <a:srgbClr val="94A3B8"/>
-                </a:solidFill>
-                <a:latin typeface="Calibri" pitchFamily="34" charset="0"/>
-                <a:ea typeface="Calibri" pitchFamily="34" charset="-122"/>
-                <a:cs typeface="Calibri" pitchFamily="34" charset="-120"/>
-              </a:rPr>
-              <a:t>/k/</a:t>
-            </a:r>
-            <a:endParaRPr lang="en-US" sz="750" dirty="0"/>
-          </a:p>
-        </p:txBody>
-      </p:sp>
-      <p:sp>
-        <p:nvSpPr>
-          <p:cNvPr id="40" name="Shape 38"/>
-          <p:cNvSpPr/>
-          <p:nvPr/>
-        </p:nvSpPr>
-        <p:spPr>
-          <a:xfrm>
-            <a:off x="6062472" y="4169664"/>
-            <a:ext cx="685800" cy="384048"/>
+          <p:cNvPr id="39" name="Shape 37"/>
+          <p:cNvSpPr/>
+          <p:nvPr/>
+        </p:nvSpPr>
+        <p:spPr>
+          <a:xfrm>
+            <a:off x="5370141" y="4169664"/>
+            <a:ext cx="685800" cy="475488"/>
           </a:xfrm>
           <a:prstGeom prst="rect">
             <a:avLst>
-              <a:gd name="adj" fmla="val 9524"/>
+              <a:gd name="adj" fmla="val 7692"/>
             </a:avLst>
           </a:prstGeom>
           <a:solidFill>
@@ -28316,14 +28955,14 @@
       </p:sp>
       <p:sp>
         <p:nvSpPr>
-          <p:cNvPr id="41" name="Text 39"/>
-          <p:cNvSpPr/>
-          <p:nvPr/>
-        </p:nvSpPr>
-        <p:spPr>
-          <a:xfrm>
-            <a:off x="6062472" y="4169664"/>
-            <a:ext cx="685800" cy="384048"/>
+          <p:cNvPr id="40" name="Text 38"/>
+          <p:cNvSpPr/>
+          <p:nvPr/>
+        </p:nvSpPr>
+        <p:spPr>
+          <a:xfrm>
+            <a:off x="5370141" y="4169664"/>
+            <a:ext cx="685800" cy="475488"/>
           </a:xfrm>
           <a:prstGeom prst="rect">
             <a:avLst/>
@@ -28347,7 +28986,7 @@
                 <a:ea typeface="Trebuchet MS" pitchFamily="34" charset="-122"/>
                 <a:cs typeface="Trebuchet MS" pitchFamily="34" charset="-120"/>
               </a:rPr>
-              <a:t>t</a:t>
+              <a:t>u</a:t>
             </a:r>
             <a:endParaRPr lang="en-US" sz="900" dirty="0"/>
           </a:p>
@@ -28355,18 +28994,18 @@
       </p:sp>
       <p:sp>
         <p:nvSpPr>
-          <p:cNvPr id="42" name="Shape 40"/>
-          <p:cNvSpPr/>
-          <p:nvPr/>
-        </p:nvSpPr>
-        <p:spPr>
-          <a:xfrm>
-            <a:off x="7274052" y="4169664"/>
-            <a:ext cx="685800" cy="384048"/>
+          <p:cNvPr id="41" name="Shape 39"/>
+          <p:cNvSpPr/>
+          <p:nvPr/>
+        </p:nvSpPr>
+        <p:spPr>
+          <a:xfrm>
+            <a:off x="6408638" y="4169664"/>
+            <a:ext cx="685800" cy="475488"/>
           </a:xfrm>
           <a:prstGeom prst="rect">
             <a:avLst>
-              <a:gd name="adj" fmla="val 9524"/>
+              <a:gd name="adj" fmla="val 7692"/>
             </a:avLst>
           </a:prstGeom>
           <a:solidFill>
@@ -28382,14 +29021,14 @@
       </p:sp>
       <p:sp>
         <p:nvSpPr>
-          <p:cNvPr id="43" name="Text 41"/>
-          <p:cNvSpPr/>
-          <p:nvPr/>
-        </p:nvSpPr>
-        <p:spPr>
-          <a:xfrm>
-            <a:off x="7274052" y="4169664"/>
-            <a:ext cx="685800" cy="384048"/>
+          <p:cNvPr id="42" name="Text 40"/>
+          <p:cNvSpPr/>
+          <p:nvPr/>
+        </p:nvSpPr>
+        <p:spPr>
+          <a:xfrm>
+            <a:off x="6408638" y="4169664"/>
+            <a:ext cx="685800" cy="475488"/>
           </a:xfrm>
           <a:prstGeom prst="rect">
             <a:avLst/>
@@ -28413,7 +29052,73 @@
                 <a:ea typeface="Trebuchet MS" pitchFamily="34" charset="-122"/>
                 <a:cs typeface="Trebuchet MS" pitchFamily="34" charset="-120"/>
               </a:rPr>
-              <a:t>ile</a:t>
+              <a:t>c</a:t>
+            </a:r>
+            <a:endParaRPr lang="en-US" sz="900" dirty="0"/>
+          </a:p>
+        </p:txBody>
+      </p:sp>
+      <p:sp>
+        <p:nvSpPr>
+          <p:cNvPr id="43" name="Shape 41"/>
+          <p:cNvSpPr/>
+          <p:nvPr/>
+        </p:nvSpPr>
+        <p:spPr>
+          <a:xfrm>
+            <a:off x="7447135" y="4169664"/>
+            <a:ext cx="685800" cy="475488"/>
+          </a:xfrm>
+          <a:prstGeom prst="rect">
+            <a:avLst>
+              <a:gd name="adj" fmla="val 7692"/>
+            </a:avLst>
+          </a:prstGeom>
+          <a:solidFill>
+            <a:srgbClr val="FFFFFF"/>
+          </a:solidFill>
+          <a:ln w="12700">
+            <a:solidFill>
+              <a:srgbClr val="DB2777"/>
+            </a:solidFill>
+            <a:prstDash val="solid"/>
+          </a:ln>
+        </p:spPr>
+      </p:sp>
+      <p:sp>
+        <p:nvSpPr>
+          <p:cNvPr id="44" name="Text 42"/>
+          <p:cNvSpPr/>
+          <p:nvPr/>
+        </p:nvSpPr>
+        <p:spPr>
+          <a:xfrm>
+            <a:off x="7447135" y="4169664"/>
+            <a:ext cx="685800" cy="475488"/>
+          </a:xfrm>
+          <a:prstGeom prst="rect">
+            <a:avLst/>
+          </a:prstGeom>
+          <a:noFill/>
+          <a:ln/>
+        </p:spPr>
+        <p:txBody>
+          <a:bodyPr wrap="square" lIns="0" tIns="0" rIns="0" bIns="0" rtlCol="0" anchor="ctr"/>
+          <a:lstStyle/>
+          <a:p>
+            <a:pPr algn="ctr" indent="0" marL="0">
+              <a:buNone/>
+            </a:pPr>
+            <a:r>
+              <a:rPr lang="en-US" sz="900" b="1" dirty="0">
+                <a:solidFill>
+                  <a:srgbClr val="9D174D"/>
+                </a:solidFill>
+                <a:latin typeface="Trebuchet MS" pitchFamily="34" charset="0"/>
+                <a:ea typeface="Trebuchet MS" pitchFamily="34" charset="-122"/>
+                <a:cs typeface="Trebuchet MS" pitchFamily="34" charset="-120"/>
+              </a:rPr>
+              <a:t>t</a:t>
             </a:r>
             <a:endParaRPr lang="en-US" sz="900" dirty="0"/>
           </a:p>
@@ -28705,7 +29410,7 @@
                 <a:ea typeface="Calibri" pitchFamily="34" charset="-122"/>
                 <a:cs typeface="Calibri" pitchFamily="34" charset="-120"/>
               </a:rPr>
-              <a:t>Word Labs  •  wordlabs.app  •  Root: 'duct' = to lead or carry</a:t>
+              <a:t>Word Labs  •  wordlabs.app  •  Root: 'duct' = to lead or bring</a:t>
             </a:r>
             <a:endParaRPr lang="en-US" sz="800" dirty="0"/>
           </a:p>
@@ -28844,7 +29549,7 @@
                 <a:ea typeface="Trebuchet MS" pitchFamily="34" charset="-122"/>
                 <a:cs typeface="Trebuchet MS" pitchFamily="34" charset="-120"/>
               </a:rPr>
-              <a:t>conductive</a:t>
+              <a:t>reduction</a:t>
             </a:r>
             <a:endParaRPr lang="en-US" sz="2800" dirty="0"/>
           </a:p>
@@ -29532,7 +30237,7 @@
                 <a:ea typeface="Calibri" pitchFamily="34" charset="-122"/>
                 <a:cs typeface="Calibri" pitchFamily="34" charset="-120"/>
               </a:rPr>
-              <a:t>Word Labs  •  wordlabs.app  •  Root: 'duct' = to lead or carry</a:t>
+              <a:t>Word Labs  •  wordlabs.app  •  Root: 'duct' = to lead or bring</a:t>
             </a:r>
             <a:endParaRPr lang="en-US" sz="800" dirty="0"/>
           </a:p>
@@ -29671,7 +30376,7 @@
                 <a:ea typeface="Trebuchet MS" pitchFamily="34" charset="-122"/>
                 <a:cs typeface="Trebuchet MS" pitchFamily="34" charset="-120"/>
               </a:rPr>
-              <a:t>conductive</a:t>
+              <a:t>reduction</a:t>
             </a:r>
             <a:endParaRPr lang="en-US" sz="2800" dirty="0"/>
           </a:p>
@@ -29810,7 +30515,7 @@
                 <a:ea typeface="Trebuchet MS" pitchFamily="34" charset="-122"/>
                 <a:cs typeface="Trebuchet MS" pitchFamily="34" charset="-120"/>
               </a:rPr>
-              <a:t>con</a:t>
+              <a:t>re</a:t>
             </a:r>
             <a:endParaRPr lang="en-US" sz="1300" dirty="0"/>
           </a:p>
@@ -29849,7 +30554,7 @@
                 <a:ea typeface="Calibri" pitchFamily="34" charset="-122"/>
                 <a:cs typeface="Calibri" pitchFamily="34" charset="-120"/>
               </a:rPr>
-              <a:t>together, with</a:t>
+              <a:t>again, back</a:t>
             </a:r>
             <a:endParaRPr lang="en-US" sz="850" dirty="0"/>
           </a:p>
@@ -29872,11 +30577,11 @@
             </a:avLst>
           </a:prstGeom>
           <a:solidFill>
-            <a:srgbClr val="CCFBF1"/>
+            <a:srgbClr val="FCE7F3"/>
           </a:solidFill>
           <a:ln w="19050">
             <a:solidFill>
-              <a:srgbClr val="0D9488"/>
+              <a:srgbClr val="DB2777"/>
             </a:solidFill>
             <a:prstDash val="solid"/>
           </a:ln>
@@ -29916,13 +30621,13 @@
             <a:r>
               <a:rPr lang="en-US" sz="1300" b="1" dirty="0">
                 <a:solidFill>
-                  <a:srgbClr val="0F766E"/>
+                  <a:srgbClr val="9D174D"/>
                 </a:solidFill>
                 <a:latin typeface="Trebuchet MS" pitchFamily="34" charset="0"/>
                 <a:ea typeface="Trebuchet MS" pitchFamily="34" charset="-122"/>
                 <a:cs typeface="Trebuchet MS" pitchFamily="34" charset="-120"/>
               </a:rPr>
-              <a:t>duct</a:t>
+              <a:t>duc</a:t>
             </a:r>
             <a:endParaRPr lang="en-US" sz="1300" dirty="0"/>
           </a:p>
@@ -29961,7 +30666,7 @@
                 <a:ea typeface="Calibri" pitchFamily="34" charset="-122"/>
                 <a:cs typeface="Calibri" pitchFamily="34" charset="-120"/>
               </a:rPr>
-              <a:t>to lead or carry</a:t>
+              <a:t>to lead</a:t>
             </a:r>
             <a:endParaRPr lang="en-US" sz="850" dirty="0"/>
           </a:p>
@@ -29969,7 +30674,46 @@
       </p:sp>
       <p:sp>
         <p:nvSpPr>
-          <p:cNvPr id="22" name="Shape 20"/>
+          <p:cNvPr id="22" name="Text 20"/>
+          <p:cNvSpPr/>
+          <p:nvPr/>
+        </p:nvSpPr>
+        <p:spPr>
+          <a:xfrm>
+            <a:off x="4370832" y="2752344"/>
+            <a:ext cx="1828800" cy="182880"/>
+          </a:xfrm>
+          <a:prstGeom prst="rect">
+            <a:avLst/>
+          </a:prstGeom>
+          <a:noFill/>
+          <a:ln/>
+        </p:spPr>
+        <p:txBody>
+          <a:bodyPr wrap="square" lIns="0" tIns="0" rIns="0" bIns="0" rtlCol="0" anchor="t"/>
+          <a:lstStyle/>
+          <a:p>
+            <a:pPr algn="ctr" indent="0" marL="0">
+              <a:buNone/>
+            </a:pPr>
+            <a:r>
+              <a:rPr lang="en-US" sz="700" i="1" dirty="0">
+                <a:solidFill>
+                  <a:srgbClr val="94A3B8"/>
+                </a:solidFill>
+                <a:latin typeface="Calibri" pitchFamily="34" charset="0"/>
+                <a:ea typeface="Calibri" pitchFamily="34" charset="-122"/>
+                <a:cs typeface="Calibri" pitchFamily="34" charset="-120"/>
+              </a:rPr>
+              <a:t>spelling variant of 'duct' before 'tion'</a:t>
+            </a:r>
+            <a:endParaRPr lang="en-US" sz="700" dirty="0"/>
+          </a:p>
+        </p:txBody>
+      </p:sp>
+      <p:sp>
+        <p:nvSpPr>
+          <p:cNvPr id="23" name="Shape 21"/>
           <p:cNvSpPr/>
           <p:nvPr/>
         </p:nvSpPr>
@@ -30003,7 +30747,7 @@
       </p:sp>
       <p:sp>
         <p:nvSpPr>
-          <p:cNvPr id="23" name="Text 21"/>
+          <p:cNvPr id="24" name="Text 22"/>
           <p:cNvSpPr/>
           <p:nvPr/>
         </p:nvSpPr>
@@ -30034,7 +30778,7 @@
                 <a:ea typeface="Trebuchet MS" pitchFamily="34" charset="-122"/>
                 <a:cs typeface="Trebuchet MS" pitchFamily="34" charset="-120"/>
               </a:rPr>
-              <a:t>ive</a:t>
+              <a:t>tion</a:t>
             </a:r>
             <a:endParaRPr lang="en-US" sz="1300" dirty="0"/>
           </a:p>
@@ -30042,7 +30786,7 @@
       </p:sp>
       <p:sp>
         <p:nvSpPr>
-          <p:cNvPr id="24" name="Text 22"/>
+          <p:cNvPr id="25" name="Text 23"/>
           <p:cNvSpPr/>
           <p:nvPr/>
         </p:nvSpPr>
@@ -30073,7 +30817,7 @@
                 <a:ea typeface="Calibri" pitchFamily="34" charset="-122"/>
                 <a:cs typeface="Calibri" pitchFamily="34" charset="-120"/>
               </a:rPr>
-              <a:t>having the quality of</a:t>
+              <a:t>act or process of</a:t>
             </a:r>
             <a:endParaRPr lang="en-US" sz="850" dirty="0"/>
           </a:p>
@@ -30081,7 +30825,7 @@
       </p:sp>
       <p:sp>
         <p:nvSpPr>
-          <p:cNvPr id="25" name="Shape 23"/>
+          <p:cNvPr id="26" name="Shape 24"/>
           <p:cNvSpPr/>
           <p:nvPr/>
         </p:nvSpPr>
@@ -30108,7 +30852,7 @@
       </p:sp>
       <p:sp>
         <p:nvSpPr>
-          <p:cNvPr id="26" name="Text 24"/>
+          <p:cNvPr id="27" name="Text 25"/>
           <p:cNvSpPr/>
           <p:nvPr/>
         </p:nvSpPr>
@@ -30147,7 +30891,7 @@
       </p:sp>
       <p:sp>
         <p:nvSpPr>
-          <p:cNvPr id="27" name="Shape 25"/>
+          <p:cNvPr id="28" name="Shape 26"/>
           <p:cNvSpPr/>
           <p:nvPr/>
         </p:nvSpPr>
@@ -30174,7 +30918,7 @@
       </p:sp>
       <p:sp>
         <p:nvSpPr>
-          <p:cNvPr id="28" name="Text 26"/>
+          <p:cNvPr id="29" name="Text 27"/>
           <p:cNvSpPr/>
           <p:nvPr/>
         </p:nvSpPr>
@@ -30213,7 +30957,7 @@
       </p:sp>
       <p:sp>
         <p:nvSpPr>
-          <p:cNvPr id="29" name="Shape 27"/>
+          <p:cNvPr id="30" name="Shape 28"/>
           <p:cNvSpPr/>
           <p:nvPr/>
         </p:nvSpPr>
@@ -30240,7 +30984,7 @@
       </p:sp>
       <p:sp>
         <p:nvSpPr>
-          <p:cNvPr id="30" name="Text 28"/>
+          <p:cNvPr id="31" name="Text 29"/>
           <p:cNvSpPr/>
           <p:nvPr/>
         </p:nvSpPr>
@@ -30279,7 +31023,7 @@
       </p:sp>
       <p:sp>
         <p:nvSpPr>
-          <p:cNvPr id="31" name="Shape 29"/>
+          <p:cNvPr id="32" name="Shape 30"/>
           <p:cNvSpPr/>
           <p:nvPr/>
         </p:nvSpPr>
@@ -30306,7 +31050,7 @@
       </p:sp>
       <p:sp>
         <p:nvSpPr>
-          <p:cNvPr id="32" name="Text 30"/>
+          <p:cNvPr id="33" name="Text 31"/>
           <p:cNvSpPr/>
           <p:nvPr/>
         </p:nvSpPr>
@@ -30629,7 +31373,7 @@
                 <a:ea typeface="Calibri" pitchFamily="34" charset="-122"/>
                 <a:cs typeface="Calibri" pitchFamily="34" charset="-120"/>
               </a:rPr>
-              <a:t>Word Labs  •  wordlabs.app  •  Root: 'duct' = to lead or carry</a:t>
+              <a:t>Word Labs  •  wordlabs.app  •  Root: 'duct' = to lead or bring</a:t>
             </a:r>
             <a:endParaRPr lang="en-US" sz="800" dirty="0"/>
           </a:p>
@@ -30768,7 +31512,7 @@
                 <a:ea typeface="Trebuchet MS" pitchFamily="34" charset="-122"/>
                 <a:cs typeface="Trebuchet MS" pitchFamily="34" charset="-120"/>
               </a:rPr>
-              <a:t>conductive</a:t>
+              <a:t>reduction</a:t>
             </a:r>
             <a:endParaRPr lang="en-US" sz="2800" dirty="0"/>
           </a:p>
@@ -30907,7 +31651,7 @@
                 <a:ea typeface="Trebuchet MS" pitchFamily="34" charset="-122"/>
                 <a:cs typeface="Trebuchet MS" pitchFamily="34" charset="-120"/>
               </a:rPr>
-              <a:t>con</a:t>
+              <a:t>re</a:t>
             </a:r>
             <a:endParaRPr lang="en-US" sz="1300" dirty="0"/>
           </a:p>
@@ -30946,7 +31690,7 @@
                 <a:ea typeface="Calibri" pitchFamily="34" charset="-122"/>
                 <a:cs typeface="Calibri" pitchFamily="34" charset="-120"/>
               </a:rPr>
-              <a:t>together, with</a:t>
+              <a:t>again, back</a:t>
             </a:r>
             <a:endParaRPr lang="en-US" sz="850" dirty="0"/>
           </a:p>
@@ -30969,11 +31713,11 @@
             </a:avLst>
           </a:prstGeom>
           <a:solidFill>
-            <a:srgbClr val="CCFBF1"/>
+            <a:srgbClr val="FCE7F3"/>
           </a:solidFill>
           <a:ln w="19050">
             <a:solidFill>
-              <a:srgbClr val="0D9488"/>
+              <a:srgbClr val="DB2777"/>
             </a:solidFill>
             <a:prstDash val="solid"/>
           </a:ln>
@@ -31013,13 +31757,13 @@
             <a:r>
               <a:rPr lang="en-US" sz="1300" b="1" dirty="0">
                 <a:solidFill>
-                  <a:srgbClr val="0F766E"/>
+                  <a:srgbClr val="9D174D"/>
                 </a:solidFill>
                 <a:latin typeface="Trebuchet MS" pitchFamily="34" charset="0"/>
                 <a:ea typeface="Trebuchet MS" pitchFamily="34" charset="-122"/>
                 <a:cs typeface="Trebuchet MS" pitchFamily="34" charset="-120"/>
               </a:rPr>
-              <a:t>duct</a:t>
+              <a:t>duc</a:t>
             </a:r>
             <a:endParaRPr lang="en-US" sz="1300" dirty="0"/>
           </a:p>
@@ -31058,7 +31802,7 @@
                 <a:ea typeface="Calibri" pitchFamily="34" charset="-122"/>
                 <a:cs typeface="Calibri" pitchFamily="34" charset="-120"/>
               </a:rPr>
-              <a:t>to lead or carry</a:t>
+              <a:t>to lead</a:t>
             </a:r>
             <a:endParaRPr lang="en-US" sz="850" dirty="0"/>
           </a:p>
@@ -31066,7 +31810,46 @@
       </p:sp>
       <p:sp>
         <p:nvSpPr>
-          <p:cNvPr id="22" name="Shape 20"/>
+          <p:cNvPr id="22" name="Text 20"/>
+          <p:cNvSpPr/>
+          <p:nvPr/>
+        </p:nvSpPr>
+        <p:spPr>
+          <a:xfrm>
+            <a:off x="4370832" y="2752344"/>
+            <a:ext cx="1828800" cy="182880"/>
+          </a:xfrm>
+          <a:prstGeom prst="rect">
+            <a:avLst/>
+          </a:prstGeom>
+          <a:noFill/>
+          <a:ln/>
+        </p:spPr>
+        <p:txBody>
+          <a:bodyPr wrap="square" lIns="0" tIns="0" rIns="0" bIns="0" rtlCol="0" anchor="t"/>
+          <a:lstStyle/>
+          <a:p>
+            <a:pPr algn="ctr" indent="0" marL="0">
+              <a:buNone/>
+            </a:pPr>
+            <a:r>
+              <a:rPr lang="en-US" sz="700" i="1" dirty="0">
+                <a:solidFill>
+                  <a:srgbClr val="94A3B8"/>
+                </a:solidFill>
+                <a:latin typeface="Calibri" pitchFamily="34" charset="0"/>
+                <a:ea typeface="Calibri" pitchFamily="34" charset="-122"/>
+                <a:cs typeface="Calibri" pitchFamily="34" charset="-120"/>
+              </a:rPr>
+              <a:t>spelling variant of 'duct' before 'tion'</a:t>
+            </a:r>
+            <a:endParaRPr lang="en-US" sz="700" dirty="0"/>
+          </a:p>
+        </p:txBody>
+      </p:sp>
+      <p:sp>
+        <p:nvSpPr>
+          <p:cNvPr id="23" name="Shape 21"/>
           <p:cNvSpPr/>
           <p:nvPr/>
         </p:nvSpPr>
@@ -31100,7 +31883,7 @@
       </p:sp>
       <p:sp>
         <p:nvSpPr>
-          <p:cNvPr id="23" name="Text 21"/>
+          <p:cNvPr id="24" name="Text 22"/>
           <p:cNvSpPr/>
           <p:nvPr/>
         </p:nvSpPr>
@@ -31131,7 +31914,7 @@
                 <a:ea typeface="Trebuchet MS" pitchFamily="34" charset="-122"/>
                 <a:cs typeface="Trebuchet MS" pitchFamily="34" charset="-120"/>
               </a:rPr>
-              <a:t>ive</a:t>
+              <a:t>tion</a:t>
             </a:r>
             <a:endParaRPr lang="en-US" sz="1300" dirty="0"/>
           </a:p>
@@ -31139,7 +31922,7 @@
       </p:sp>
       <p:sp>
         <p:nvSpPr>
-          <p:cNvPr id="24" name="Text 22"/>
+          <p:cNvPr id="25" name="Text 23"/>
           <p:cNvSpPr/>
           <p:nvPr/>
         </p:nvSpPr>
@@ -31170,7 +31953,7 @@
                 <a:ea typeface="Calibri" pitchFamily="34" charset="-122"/>
                 <a:cs typeface="Calibri" pitchFamily="34" charset="-120"/>
               </a:rPr>
-              <a:t>having the quality of</a:t>
+              <a:t>act or process of</a:t>
             </a:r>
             <a:endParaRPr lang="en-US" sz="850" dirty="0"/>
           </a:p>
@@ -31178,7 +31961,7 @@
       </p:sp>
       <p:sp>
         <p:nvSpPr>
-          <p:cNvPr id="25" name="Shape 23"/>
+          <p:cNvPr id="26" name="Shape 24"/>
           <p:cNvSpPr/>
           <p:nvPr/>
         </p:nvSpPr>
@@ -31205,7 +31988,7 @@
       </p:sp>
       <p:sp>
         <p:nvSpPr>
-          <p:cNvPr id="26" name="Text 24"/>
+          <p:cNvPr id="27" name="Text 25"/>
           <p:cNvSpPr/>
           <p:nvPr/>
         </p:nvSpPr>
@@ -31244,7 +32027,7 @@
       </p:sp>
       <p:sp>
         <p:nvSpPr>
-          <p:cNvPr id="27" name="Shape 25"/>
+          <p:cNvPr id="28" name="Shape 26"/>
           <p:cNvSpPr/>
           <p:nvPr/>
         </p:nvSpPr>
@@ -31271,7 +32054,7 @@
       </p:sp>
       <p:sp>
         <p:nvSpPr>
-          <p:cNvPr id="28" name="Shape 26"/>
+          <p:cNvPr id="29" name="Shape 27"/>
           <p:cNvSpPr/>
           <p:nvPr/>
         </p:nvSpPr>
@@ -31298,7 +32081,7 @@
       </p:sp>
       <p:sp>
         <p:nvSpPr>
-          <p:cNvPr id="29" name="Text 27"/>
+          <p:cNvPr id="30" name="Text 28"/>
           <p:cNvSpPr/>
           <p:nvPr/>
         </p:nvSpPr>
@@ -31329,7 +32112,7 @@
                 <a:ea typeface="Trebuchet MS" pitchFamily="34" charset="-122"/>
                 <a:cs typeface="Trebuchet MS" pitchFamily="34" charset="-120"/>
               </a:rPr>
-              <a:t>con</a:t>
+              <a:t>re</a:t>
             </a:r>
             <a:endParaRPr lang="en-US" sz="1400" dirty="0"/>
           </a:p>
@@ -31337,7 +32120,7 @@
       </p:sp>
       <p:sp>
         <p:nvSpPr>
-          <p:cNvPr id="30" name="Text 28"/>
+          <p:cNvPr id="31" name="Text 29"/>
           <p:cNvSpPr/>
           <p:nvPr/>
         </p:nvSpPr>
@@ -31376,7 +32159,7 @@
       </p:sp>
       <p:sp>
         <p:nvSpPr>
-          <p:cNvPr id="31" name="Shape 29"/>
+          <p:cNvPr id="32" name="Shape 30"/>
           <p:cNvSpPr/>
           <p:nvPr/>
         </p:nvSpPr>
@@ -31403,7 +32186,7 @@
       </p:sp>
       <p:sp>
         <p:nvSpPr>
-          <p:cNvPr id="32" name="Text 30"/>
+          <p:cNvPr id="33" name="Text 31"/>
           <p:cNvSpPr/>
           <p:nvPr/>
         </p:nvSpPr>
@@ -31442,7 +32225,7 @@
       </p:sp>
       <p:sp>
         <p:nvSpPr>
-          <p:cNvPr id="33" name="Text 31"/>
+          <p:cNvPr id="34" name="Text 32"/>
           <p:cNvSpPr/>
           <p:nvPr/>
         </p:nvSpPr>
@@ -31481,7 +32264,7 @@
       </p:sp>
       <p:sp>
         <p:nvSpPr>
-          <p:cNvPr id="34" name="Shape 32"/>
+          <p:cNvPr id="35" name="Shape 33"/>
           <p:cNvSpPr/>
           <p:nvPr/>
         </p:nvSpPr>
@@ -31508,7 +32291,7 @@
       </p:sp>
       <p:sp>
         <p:nvSpPr>
-          <p:cNvPr id="35" name="Text 33"/>
+          <p:cNvPr id="36" name="Text 34"/>
           <p:cNvSpPr/>
           <p:nvPr/>
         </p:nvSpPr>
@@ -31539,7 +32322,7 @@
                 <a:ea typeface="Trebuchet MS" pitchFamily="34" charset="-122"/>
                 <a:cs typeface="Trebuchet MS" pitchFamily="34" charset="-120"/>
               </a:rPr>
-              <a:t>tive</a:t>
+              <a:t>tion</a:t>
             </a:r>
             <a:endParaRPr lang="en-US" sz="1400" dirty="0"/>
           </a:p>
@@ -31547,7 +32330,7 @@
       </p:sp>
       <p:sp>
         <p:nvSpPr>
-          <p:cNvPr id="36" name="Shape 34"/>
+          <p:cNvPr id="37" name="Shape 35"/>
           <p:cNvSpPr/>
           <p:nvPr/>
         </p:nvSpPr>
@@ -31574,7 +32357,7 @@
       </p:sp>
       <p:sp>
         <p:nvSpPr>
-          <p:cNvPr id="37" name="Text 35"/>
+          <p:cNvPr id="38" name="Text 36"/>
           <p:cNvSpPr/>
           <p:nvPr/>
         </p:nvSpPr>
@@ -31613,7 +32396,7 @@
       </p:sp>
       <p:sp>
         <p:nvSpPr>
-          <p:cNvPr id="38" name="Shape 36"/>
+          <p:cNvPr id="39" name="Shape 37"/>
           <p:cNvSpPr/>
           <p:nvPr/>
         </p:nvSpPr>
@@ -31640,7 +32423,7 @@
       </p:sp>
       <p:sp>
         <p:nvSpPr>
-          <p:cNvPr id="39" name="Text 37"/>
+          <p:cNvPr id="40" name="Text 38"/>
           <p:cNvSpPr/>
           <p:nvPr/>
         </p:nvSpPr>
@@ -31963,7 +32746,7 @@
                 <a:ea typeface="Calibri" pitchFamily="34" charset="-122"/>
                 <a:cs typeface="Calibri" pitchFamily="34" charset="-120"/>
               </a:rPr>
-              <a:t>Word Labs  •  wordlabs.app  •  Root: 'duct' = to lead or carry</a:t>
+              <a:t>Word Labs  •  wordlabs.app  •  Root: 'duct' = to lead or bring</a:t>
             </a:r>
             <a:endParaRPr lang="en-US" sz="800" dirty="0"/>
           </a:p>
@@ -32102,7 +32885,7 @@
                 <a:ea typeface="Trebuchet MS" pitchFamily="34" charset="-122"/>
                 <a:cs typeface="Trebuchet MS" pitchFamily="34" charset="-120"/>
               </a:rPr>
-              <a:t>conductive</a:t>
+              <a:t>reduction</a:t>
             </a:r>
             <a:endParaRPr lang="en-US" sz="2800" dirty="0"/>
           </a:p>
@@ -32241,7 +33024,7 @@
                 <a:ea typeface="Trebuchet MS" pitchFamily="34" charset="-122"/>
                 <a:cs typeface="Trebuchet MS" pitchFamily="34" charset="-120"/>
               </a:rPr>
-              <a:t>con</a:t>
+              <a:t>re</a:t>
             </a:r>
             <a:endParaRPr lang="en-US" sz="1300" dirty="0"/>
           </a:p>
@@ -32280,7 +33063,7 @@
                 <a:ea typeface="Calibri" pitchFamily="34" charset="-122"/>
                 <a:cs typeface="Calibri" pitchFamily="34" charset="-120"/>
               </a:rPr>
-              <a:t>together, with</a:t>
+              <a:t>again, back</a:t>
             </a:r>
             <a:endParaRPr lang="en-US" sz="850" dirty="0"/>
           </a:p>
@@ -32303,11 +33086,11 @@
             </a:avLst>
           </a:prstGeom>
           <a:solidFill>
-            <a:srgbClr val="CCFBF1"/>
+            <a:srgbClr val="FCE7F3"/>
           </a:solidFill>
           <a:ln w="19050">
             <a:solidFill>
-              <a:srgbClr val="0D9488"/>
+              <a:srgbClr val="DB2777"/>
             </a:solidFill>
             <a:prstDash val="solid"/>
           </a:ln>
@@ -32347,13 +33130,13 @@
             <a:r>
               <a:rPr lang="en-US" sz="1300" b="1" dirty="0">
                 <a:solidFill>
-                  <a:srgbClr val="0F766E"/>
+                  <a:srgbClr val="9D174D"/>
                 </a:solidFill>
                 <a:latin typeface="Trebuchet MS" pitchFamily="34" charset="0"/>
                 <a:ea typeface="Trebuchet MS" pitchFamily="34" charset="-122"/>
                 <a:cs typeface="Trebuchet MS" pitchFamily="34" charset="-120"/>
               </a:rPr>
-              <a:t>duct</a:t>
+              <a:t>duc</a:t>
             </a:r>
             <a:endParaRPr lang="en-US" sz="1300" dirty="0"/>
           </a:p>
@@ -32392,7 +33175,7 @@
                 <a:ea typeface="Calibri" pitchFamily="34" charset="-122"/>
                 <a:cs typeface="Calibri" pitchFamily="34" charset="-120"/>
               </a:rPr>
-              <a:t>to lead or carry</a:t>
+              <a:t>to lead</a:t>
             </a:r>
             <a:endParaRPr lang="en-US" sz="850" dirty="0"/>
           </a:p>
@@ -32400,7 +33183,46 @@
       </p:sp>
       <p:sp>
         <p:nvSpPr>
-          <p:cNvPr id="22" name="Shape 20"/>
+          <p:cNvPr id="22" name="Text 20"/>
+          <p:cNvSpPr/>
+          <p:nvPr/>
+        </p:nvSpPr>
+        <p:spPr>
+          <a:xfrm>
+            <a:off x="4370832" y="2752344"/>
+            <a:ext cx="1828800" cy="182880"/>
+          </a:xfrm>
+          <a:prstGeom prst="rect">
+            <a:avLst/>
+          </a:prstGeom>
+          <a:noFill/>
+          <a:ln/>
+        </p:spPr>
+        <p:txBody>
+          <a:bodyPr wrap="square" lIns="0" tIns="0" rIns="0" bIns="0" rtlCol="0" anchor="t"/>
+          <a:lstStyle/>
+          <a:p>
+            <a:pPr algn="ctr" indent="0" marL="0">
+              <a:buNone/>
+            </a:pPr>
+            <a:r>
+              <a:rPr lang="en-US" sz="700" i="1" dirty="0">
+                <a:solidFill>
+                  <a:srgbClr val="94A3B8"/>
+                </a:solidFill>
+                <a:latin typeface="Calibri" pitchFamily="34" charset="0"/>
+                <a:ea typeface="Calibri" pitchFamily="34" charset="-122"/>
+                <a:cs typeface="Calibri" pitchFamily="34" charset="-120"/>
+              </a:rPr>
+              <a:t>spelling variant of 'duct' before 'tion'</a:t>
+            </a:r>
+            <a:endParaRPr lang="en-US" sz="700" dirty="0"/>
+          </a:p>
+        </p:txBody>
+      </p:sp>
+      <p:sp>
+        <p:nvSpPr>
+          <p:cNvPr id="23" name="Shape 21"/>
           <p:cNvSpPr/>
           <p:nvPr/>
         </p:nvSpPr>
@@ -32434,7 +33256,7 @@
       </p:sp>
       <p:sp>
         <p:nvSpPr>
-          <p:cNvPr id="23" name="Text 21"/>
+          <p:cNvPr id="24" name="Text 22"/>
           <p:cNvSpPr/>
           <p:nvPr/>
         </p:nvSpPr>
@@ -32465,7 +33287,7 @@
                 <a:ea typeface="Trebuchet MS" pitchFamily="34" charset="-122"/>
                 <a:cs typeface="Trebuchet MS" pitchFamily="34" charset="-120"/>
               </a:rPr>
-              <a:t>ive</a:t>
+              <a:t>tion</a:t>
             </a:r>
             <a:endParaRPr lang="en-US" sz="1300" dirty="0"/>
           </a:p>
@@ -32473,7 +33295,7 @@
       </p:sp>
       <p:sp>
         <p:nvSpPr>
-          <p:cNvPr id="24" name="Text 22"/>
+          <p:cNvPr id="25" name="Text 23"/>
           <p:cNvSpPr/>
           <p:nvPr/>
         </p:nvSpPr>
@@ -32504,7 +33326,7 @@
                 <a:ea typeface="Calibri" pitchFamily="34" charset="-122"/>
                 <a:cs typeface="Calibri" pitchFamily="34" charset="-120"/>
               </a:rPr>
-              <a:t>having the quality of</a:t>
+              <a:t>act or process of</a:t>
             </a:r>
             <a:endParaRPr lang="en-US" sz="850" dirty="0"/>
           </a:p>
@@ -32512,7 +33334,7 @@
       </p:sp>
       <p:sp>
         <p:nvSpPr>
-          <p:cNvPr id="25" name="Shape 23"/>
+          <p:cNvPr id="26" name="Shape 24"/>
           <p:cNvSpPr/>
           <p:nvPr/>
         </p:nvSpPr>
@@ -32539,7 +33361,7 @@
       </p:sp>
       <p:sp>
         <p:nvSpPr>
-          <p:cNvPr id="26" name="Text 24"/>
+          <p:cNvPr id="27" name="Text 25"/>
           <p:cNvSpPr/>
           <p:nvPr/>
         </p:nvSpPr>
@@ -32578,7 +33400,7 @@
       </p:sp>
       <p:sp>
         <p:nvSpPr>
-          <p:cNvPr id="27" name="Shape 25"/>
+          <p:cNvPr id="28" name="Shape 26"/>
           <p:cNvSpPr/>
           <p:nvPr/>
         </p:nvSpPr>
@@ -32605,7 +33427,7 @@
       </p:sp>
       <p:sp>
         <p:nvSpPr>
-          <p:cNvPr id="28" name="Shape 26"/>
+          <p:cNvPr id="29" name="Shape 27"/>
           <p:cNvSpPr/>
           <p:nvPr/>
         </p:nvSpPr>
@@ -32632,7 +33454,7 @@
       </p:sp>
       <p:sp>
         <p:nvSpPr>
-          <p:cNvPr id="29" name="Text 27"/>
+          <p:cNvPr id="30" name="Text 28"/>
           <p:cNvSpPr/>
           <p:nvPr/>
         </p:nvSpPr>
@@ -32663,7 +33485,7 @@
                 <a:ea typeface="Trebuchet MS" pitchFamily="34" charset="-122"/>
                 <a:cs typeface="Trebuchet MS" pitchFamily="34" charset="-120"/>
               </a:rPr>
-              <a:t>con</a:t>
+              <a:t>re</a:t>
             </a:r>
             <a:endParaRPr lang="en-US" sz="1400" dirty="0"/>
           </a:p>
@@ -32671,7 +33493,7 @@
       </p:sp>
       <p:sp>
         <p:nvSpPr>
-          <p:cNvPr id="30" name="Text 28"/>
+          <p:cNvPr id="31" name="Text 29"/>
           <p:cNvSpPr/>
           <p:nvPr/>
         </p:nvSpPr>
@@ -32710,7 +33532,7 @@
       </p:sp>
       <p:sp>
         <p:nvSpPr>
-          <p:cNvPr id="31" name="Shape 29"/>
+          <p:cNvPr id="32" name="Shape 30"/>
           <p:cNvSpPr/>
           <p:nvPr/>
         </p:nvSpPr>
@@ -32737,7 +33559,7 @@
       </p:sp>
       <p:sp>
         <p:nvSpPr>
-          <p:cNvPr id="32" name="Text 30"/>
+          <p:cNvPr id="33" name="Text 31"/>
           <p:cNvSpPr/>
           <p:nvPr/>
         </p:nvSpPr>
@@ -32776,7 +33598,7 @@
       </p:sp>
       <p:sp>
         <p:nvSpPr>
-          <p:cNvPr id="33" name="Text 31"/>
+          <p:cNvPr id="34" name="Text 32"/>
           <p:cNvSpPr/>
           <p:nvPr/>
         </p:nvSpPr>
@@ -32815,7 +33637,7 @@
       </p:sp>
       <p:sp>
         <p:nvSpPr>
-          <p:cNvPr id="34" name="Shape 32"/>
+          <p:cNvPr id="35" name="Shape 33"/>
           <p:cNvSpPr/>
           <p:nvPr/>
         </p:nvSpPr>
@@ -32842,7 +33664,7 @@
       </p:sp>
       <p:sp>
         <p:nvSpPr>
-          <p:cNvPr id="35" name="Text 33"/>
+          <p:cNvPr id="36" name="Text 34"/>
           <p:cNvSpPr/>
           <p:nvPr/>
         </p:nvSpPr>
@@ -32873,7 +33695,7 @@
                 <a:ea typeface="Trebuchet MS" pitchFamily="34" charset="-122"/>
                 <a:cs typeface="Trebuchet MS" pitchFamily="34" charset="-120"/>
               </a:rPr>
-              <a:t>tive</a:t>
+              <a:t>tion</a:t>
             </a:r>
             <a:endParaRPr lang="en-US" sz="1400" dirty="0"/>
           </a:p>
@@ -32881,7 +33703,7 @@
       </p:sp>
       <p:sp>
         <p:nvSpPr>
-          <p:cNvPr id="36" name="Shape 34"/>
+          <p:cNvPr id="37" name="Shape 35"/>
           <p:cNvSpPr/>
           <p:nvPr/>
         </p:nvSpPr>
@@ -32908,7 +33730,7 @@
       </p:sp>
       <p:sp>
         <p:nvSpPr>
-          <p:cNvPr id="37" name="Text 35"/>
+          <p:cNvPr id="38" name="Text 36"/>
           <p:cNvSpPr/>
           <p:nvPr/>
         </p:nvSpPr>
@@ -32947,7 +33769,7 @@
       </p:sp>
       <p:sp>
         <p:nvSpPr>
-          <p:cNvPr id="38" name="Shape 36"/>
+          <p:cNvPr id="39" name="Shape 37"/>
           <p:cNvSpPr/>
           <p:nvPr/>
         </p:nvSpPr>
@@ -32974,7 +33796,7 @@
       </p:sp>
       <p:sp>
         <p:nvSpPr>
-          <p:cNvPr id="39" name="Shape 37"/>
+          <p:cNvPr id="40" name="Shape 38"/>
           <p:cNvSpPr/>
           <p:nvPr/>
         </p:nvSpPr>
@@ -33001,7 +33823,7 @@
       </p:sp>
       <p:sp>
         <p:nvSpPr>
-          <p:cNvPr id="40" name="Text 38"/>
+          <p:cNvPr id="41" name="Text 39"/>
           <p:cNvSpPr/>
           <p:nvPr/>
         </p:nvSpPr>
@@ -33032,6 +33854,270 @@
                 <a:ea typeface="Trebuchet MS" pitchFamily="34" charset="-122"/>
                 <a:cs typeface="Trebuchet MS" pitchFamily="34" charset="-120"/>
               </a:rPr>
+              <a:t>r</a:t>
+            </a:r>
+            <a:endParaRPr lang="en-US" sz="900" dirty="0"/>
+          </a:p>
+        </p:txBody>
+      </p:sp>
+      <p:sp>
+        <p:nvSpPr>
+          <p:cNvPr id="42" name="Shape 40"/>
+          <p:cNvSpPr/>
+          <p:nvPr/>
+        </p:nvSpPr>
+        <p:spPr>
+          <a:xfrm>
+            <a:off x="2831592" y="4169664"/>
+            <a:ext cx="685800" cy="384048"/>
+          </a:xfrm>
+          <a:prstGeom prst="rect">
+            <a:avLst>
+              <a:gd name="adj" fmla="val 9524"/>
+            </a:avLst>
+          </a:prstGeom>
+          <a:solidFill>
+            <a:srgbClr val="FFFFFF"/>
+          </a:solidFill>
+          <a:ln w="12700">
+            <a:solidFill>
+              <a:srgbClr val="DB2777"/>
+            </a:solidFill>
+            <a:prstDash val="solid"/>
+          </a:ln>
+        </p:spPr>
+      </p:sp>
+      <p:sp>
+        <p:nvSpPr>
+          <p:cNvPr id="43" name="Text 41"/>
+          <p:cNvSpPr/>
+          <p:nvPr/>
+        </p:nvSpPr>
+        <p:spPr>
+          <a:xfrm>
+            <a:off x="2831592" y="4169664"/>
+            <a:ext cx="685800" cy="384048"/>
+          </a:xfrm>
+          <a:prstGeom prst="rect">
+            <a:avLst/>
+          </a:prstGeom>
+          <a:noFill/>
+          <a:ln/>
+        </p:spPr>
+        <p:txBody>
+          <a:bodyPr wrap="square" lIns="0" tIns="0" rIns="0" bIns="0" rtlCol="0" anchor="ctr"/>
+          <a:lstStyle/>
+          <a:p>
+            <a:pPr algn="ctr" indent="0" marL="0">
+              <a:buNone/>
+            </a:pPr>
+            <a:r>
+              <a:rPr lang="en-US" sz="900" b="1" dirty="0">
+                <a:solidFill>
+                  <a:srgbClr val="9D174D"/>
+                </a:solidFill>
+                <a:latin typeface="Trebuchet MS" pitchFamily="34" charset="0"/>
+                <a:ea typeface="Trebuchet MS" pitchFamily="34" charset="-122"/>
+                <a:cs typeface="Trebuchet MS" pitchFamily="34" charset="-120"/>
+              </a:rPr>
+              <a:t>e</a:t>
+            </a:r>
+            <a:endParaRPr lang="en-US" sz="900" dirty="0"/>
+          </a:p>
+        </p:txBody>
+      </p:sp>
+      <p:sp>
+        <p:nvSpPr>
+          <p:cNvPr id="44" name="Shape 42"/>
+          <p:cNvSpPr/>
+          <p:nvPr/>
+        </p:nvSpPr>
+        <p:spPr>
+          <a:xfrm>
+            <a:off x="3639312" y="4169664"/>
+            <a:ext cx="685800" cy="384048"/>
+          </a:xfrm>
+          <a:prstGeom prst="rect">
+            <a:avLst>
+              <a:gd name="adj" fmla="val 9524"/>
+            </a:avLst>
+          </a:prstGeom>
+          <a:solidFill>
+            <a:srgbClr val="FFFFFF"/>
+          </a:solidFill>
+          <a:ln w="12700">
+            <a:solidFill>
+              <a:srgbClr val="DB2777"/>
+            </a:solidFill>
+            <a:prstDash val="solid"/>
+          </a:ln>
+        </p:spPr>
+      </p:sp>
+      <p:sp>
+        <p:nvSpPr>
+          <p:cNvPr id="45" name="Text 43"/>
+          <p:cNvSpPr/>
+          <p:nvPr/>
+        </p:nvSpPr>
+        <p:spPr>
+          <a:xfrm>
+            <a:off x="3639312" y="4169664"/>
+            <a:ext cx="685800" cy="384048"/>
+          </a:xfrm>
+          <a:prstGeom prst="rect">
+            <a:avLst/>
+          </a:prstGeom>
+          <a:noFill/>
+          <a:ln/>
+        </p:spPr>
+        <p:txBody>
+          <a:bodyPr wrap="square" lIns="0" tIns="0" rIns="0" bIns="0" rtlCol="0" anchor="ctr"/>
+          <a:lstStyle/>
+          <a:p>
+            <a:pPr algn="ctr" indent="0" marL="0">
+              <a:buNone/>
+            </a:pPr>
+            <a:r>
+              <a:rPr lang="en-US" sz="900" b="1" dirty="0">
+                <a:solidFill>
+                  <a:srgbClr val="9D174D"/>
+                </a:solidFill>
+                <a:latin typeface="Trebuchet MS" pitchFamily="34" charset="0"/>
+                <a:ea typeface="Trebuchet MS" pitchFamily="34" charset="-122"/>
+                <a:cs typeface="Trebuchet MS" pitchFamily="34" charset="-120"/>
+              </a:rPr>
+              <a:t>d</a:t>
+            </a:r>
+            <a:endParaRPr lang="en-US" sz="900" dirty="0"/>
+          </a:p>
+        </p:txBody>
+      </p:sp>
+      <p:sp>
+        <p:nvSpPr>
+          <p:cNvPr id="46" name="Shape 44"/>
+          <p:cNvSpPr/>
+          <p:nvPr/>
+        </p:nvSpPr>
+        <p:spPr>
+          <a:xfrm>
+            <a:off x="4447032" y="4169664"/>
+            <a:ext cx="685800" cy="384048"/>
+          </a:xfrm>
+          <a:prstGeom prst="rect">
+            <a:avLst>
+              <a:gd name="adj" fmla="val 9524"/>
+            </a:avLst>
+          </a:prstGeom>
+          <a:solidFill>
+            <a:srgbClr val="FFFFFF"/>
+          </a:solidFill>
+          <a:ln w="12700">
+            <a:solidFill>
+              <a:srgbClr val="DB2777"/>
+            </a:solidFill>
+            <a:prstDash val="solid"/>
+          </a:ln>
+        </p:spPr>
+      </p:sp>
+      <p:sp>
+        <p:nvSpPr>
+          <p:cNvPr id="47" name="Text 45"/>
+          <p:cNvSpPr/>
+          <p:nvPr/>
+        </p:nvSpPr>
+        <p:spPr>
+          <a:xfrm>
+            <a:off x="4447032" y="4169664"/>
+            <a:ext cx="685800" cy="384048"/>
+          </a:xfrm>
+          <a:prstGeom prst="rect">
+            <a:avLst/>
+          </a:prstGeom>
+          <a:noFill/>
+          <a:ln/>
+        </p:spPr>
+        <p:txBody>
+          <a:bodyPr wrap="square" lIns="0" tIns="0" rIns="0" bIns="0" rtlCol="0" anchor="ctr"/>
+          <a:lstStyle/>
+          <a:p>
+            <a:pPr algn="ctr" indent="0" marL="0">
+              <a:buNone/>
+            </a:pPr>
+            <a:r>
+              <a:rPr lang="en-US" sz="900" b="1" dirty="0">
+                <a:solidFill>
+                  <a:srgbClr val="9D174D"/>
+                </a:solidFill>
+                <a:latin typeface="Trebuchet MS" pitchFamily="34" charset="0"/>
+                <a:ea typeface="Trebuchet MS" pitchFamily="34" charset="-122"/>
+                <a:cs typeface="Trebuchet MS" pitchFamily="34" charset="-120"/>
+              </a:rPr>
+              <a:t>u</a:t>
+            </a:r>
+            <a:endParaRPr lang="en-US" sz="900" dirty="0"/>
+          </a:p>
+        </p:txBody>
+      </p:sp>
+      <p:sp>
+        <p:nvSpPr>
+          <p:cNvPr id="48" name="Shape 46"/>
+          <p:cNvSpPr/>
+          <p:nvPr/>
+        </p:nvSpPr>
+        <p:spPr>
+          <a:xfrm>
+            <a:off x="5254752" y="4169664"/>
+            <a:ext cx="685800" cy="384048"/>
+          </a:xfrm>
+          <a:prstGeom prst="rect">
+            <a:avLst>
+              <a:gd name="adj" fmla="val 9524"/>
+            </a:avLst>
+          </a:prstGeom>
+          <a:solidFill>
+            <a:srgbClr val="FFFFFF"/>
+          </a:solidFill>
+          <a:ln w="12700">
+            <a:solidFill>
+              <a:srgbClr val="DB2777"/>
+            </a:solidFill>
+            <a:prstDash val="solid"/>
+          </a:ln>
+        </p:spPr>
+      </p:sp>
+      <p:sp>
+        <p:nvSpPr>
+          <p:cNvPr id="49" name="Text 47"/>
+          <p:cNvSpPr/>
+          <p:nvPr/>
+        </p:nvSpPr>
+        <p:spPr>
+          <a:xfrm>
+            <a:off x="5254752" y="4169664"/>
+            <a:ext cx="685800" cy="384048"/>
+          </a:xfrm>
+          <a:prstGeom prst="rect">
+            <a:avLst/>
+          </a:prstGeom>
+          <a:noFill/>
+          <a:ln/>
+        </p:spPr>
+        <p:txBody>
+          <a:bodyPr wrap="square" lIns="0" tIns="0" rIns="0" bIns="0" rtlCol="0" anchor="ctr"/>
+          <a:lstStyle/>
+          <a:p>
+            <a:pPr algn="ctr" indent="0" marL="0">
+              <a:buNone/>
+            </a:pPr>
+            <a:r>
+              <a:rPr lang="en-US" sz="900" b="1" dirty="0">
+                <a:solidFill>
+                  <a:srgbClr val="9D174D"/>
+                </a:solidFill>
+                <a:latin typeface="Trebuchet MS" pitchFamily="34" charset="0"/>
+                <a:ea typeface="Trebuchet MS" pitchFamily="34" charset="-122"/>
+                <a:cs typeface="Trebuchet MS" pitchFamily="34" charset="-120"/>
+              </a:rPr>
               <a:t>c</a:t>
             </a:r>
             <a:endParaRPr lang="en-US" sz="900" dirty="0"/>
@@ -33040,13 +34126,79 @@
       </p:sp>
       <p:sp>
         <p:nvSpPr>
-          <p:cNvPr id="41" name="Text 39"/>
-          <p:cNvSpPr/>
-          <p:nvPr/>
-        </p:nvSpPr>
-        <p:spPr>
-          <a:xfrm>
-            <a:off x="2023872" y="4572000"/>
+          <p:cNvPr id="50" name="Shape 48"/>
+          <p:cNvSpPr/>
+          <p:nvPr/>
+        </p:nvSpPr>
+        <p:spPr>
+          <a:xfrm>
+            <a:off x="6062472" y="4169664"/>
+            <a:ext cx="685800" cy="384048"/>
+          </a:xfrm>
+          <a:prstGeom prst="rect">
+            <a:avLst>
+              <a:gd name="adj" fmla="val 9524"/>
+            </a:avLst>
+          </a:prstGeom>
+          <a:solidFill>
+            <a:srgbClr val="FFFFFF"/>
+          </a:solidFill>
+          <a:ln w="12700">
+            <a:solidFill>
+              <a:srgbClr val="DB2777"/>
+            </a:solidFill>
+            <a:prstDash val="solid"/>
+          </a:ln>
+        </p:spPr>
+      </p:sp>
+      <p:sp>
+        <p:nvSpPr>
+          <p:cNvPr id="51" name="Text 49"/>
+          <p:cNvSpPr/>
+          <p:nvPr/>
+        </p:nvSpPr>
+        <p:spPr>
+          <a:xfrm>
+            <a:off x="6062472" y="4169664"/>
+            <a:ext cx="685800" cy="384048"/>
+          </a:xfrm>
+          <a:prstGeom prst="rect">
+            <a:avLst/>
+          </a:prstGeom>
+          <a:noFill/>
+          <a:ln/>
+        </p:spPr>
+        <p:txBody>
+          <a:bodyPr wrap="square" lIns="0" tIns="0" rIns="0" bIns="0" rtlCol="0" anchor="ctr"/>
+          <a:lstStyle/>
+          <a:p>
+            <a:pPr algn="ctr" indent="0" marL="0">
+              <a:buNone/>
+            </a:pPr>
+            <a:r>
+              <a:rPr lang="en-US" sz="900" b="1" dirty="0">
+                <a:solidFill>
+                  <a:srgbClr val="9D174D"/>
+                </a:solidFill>
+                <a:latin typeface="Trebuchet MS" pitchFamily="34" charset="0"/>
+                <a:ea typeface="Trebuchet MS" pitchFamily="34" charset="-122"/>
+                <a:cs typeface="Trebuchet MS" pitchFamily="34" charset="-120"/>
+              </a:rPr>
+              <a:t>t</a:t>
+            </a:r>
+            <a:endParaRPr lang="en-US" sz="900" dirty="0"/>
+          </a:p>
+        </p:txBody>
+      </p:sp>
+      <p:sp>
+        <p:nvSpPr>
+          <p:cNvPr id="52" name="Text 50"/>
+          <p:cNvSpPr/>
+          <p:nvPr/>
+        </p:nvSpPr>
+        <p:spPr>
+          <a:xfrm>
+            <a:off x="6062472" y="4572000"/>
             <a:ext cx="685800" cy="219456"/>
           </a:xfrm>
           <a:prstGeom prst="rect">
@@ -33071,7 +34223,7 @@
                 <a:ea typeface="Calibri" pitchFamily="34" charset="-122"/>
                 <a:cs typeface="Calibri" pitchFamily="34" charset="-120"/>
               </a:rPr>
-              <a:t>/k/</a:t>
+              <a:t>/sh/</a:t>
             </a:r>
             <a:endParaRPr lang="en-US" sz="750" dirty="0"/>
           </a:p>
@@ -33079,13 +34231,13 @@
       </p:sp>
       <p:sp>
         <p:nvSpPr>
-          <p:cNvPr id="42" name="Shape 40"/>
-          <p:cNvSpPr/>
-          <p:nvPr/>
-        </p:nvSpPr>
-        <p:spPr>
-          <a:xfrm>
-            <a:off x="2831592" y="4169664"/>
+          <p:cNvPr id="53" name="Shape 51"/>
+          <p:cNvSpPr/>
+          <p:nvPr/>
+        </p:nvSpPr>
+        <p:spPr>
+          <a:xfrm>
+            <a:off x="6870192" y="4169664"/>
             <a:ext cx="685800" cy="384048"/>
           </a:xfrm>
           <a:prstGeom prst="rect">
@@ -33106,13 +34258,13 @@
       </p:sp>
       <p:sp>
         <p:nvSpPr>
-          <p:cNvPr id="43" name="Text 41"/>
-          <p:cNvSpPr/>
-          <p:nvPr/>
-        </p:nvSpPr>
-        <p:spPr>
-          <a:xfrm>
-            <a:off x="2831592" y="4169664"/>
+          <p:cNvPr id="54" name="Text 52"/>
+          <p:cNvSpPr/>
+          <p:nvPr/>
+        </p:nvSpPr>
+        <p:spPr>
+          <a:xfrm>
+            <a:off x="6870192" y="4169664"/>
             <a:ext cx="685800" cy="384048"/>
           </a:xfrm>
           <a:prstGeom prst="rect">
@@ -33137,7 +34289,7 @@
                 <a:ea typeface="Trebuchet MS" pitchFamily="34" charset="-122"/>
                 <a:cs typeface="Trebuchet MS" pitchFamily="34" charset="-120"/>
               </a:rPr>
-              <a:t>o</a:t>
+              <a:t>io</a:t>
             </a:r>
             <a:endParaRPr lang="en-US" sz="900" dirty="0"/>
           </a:p>
@@ -33145,13 +34297,13 @@
       </p:sp>
       <p:sp>
         <p:nvSpPr>
-          <p:cNvPr id="44" name="Shape 42"/>
-          <p:cNvSpPr/>
-          <p:nvPr/>
-        </p:nvSpPr>
-        <p:spPr>
-          <a:xfrm>
-            <a:off x="3639312" y="4169664"/>
+          <p:cNvPr id="55" name="Shape 53"/>
+          <p:cNvSpPr/>
+          <p:nvPr/>
+        </p:nvSpPr>
+        <p:spPr>
+          <a:xfrm>
+            <a:off x="7677912" y="4169664"/>
             <a:ext cx="685800" cy="384048"/>
           </a:xfrm>
           <a:prstGeom prst="rect">
@@ -33172,13 +34324,13 @@
       </p:sp>
       <p:sp>
         <p:nvSpPr>
-          <p:cNvPr id="45" name="Text 43"/>
-          <p:cNvSpPr/>
-          <p:nvPr/>
-        </p:nvSpPr>
-        <p:spPr>
-          <a:xfrm>
-            <a:off x="3639312" y="4169664"/>
+          <p:cNvPr id="56" name="Text 54"/>
+          <p:cNvSpPr/>
+          <p:nvPr/>
+        </p:nvSpPr>
+        <p:spPr>
+          <a:xfrm>
+            <a:off x="7677912" y="4169664"/>
             <a:ext cx="685800" cy="384048"/>
           </a:xfrm>
           <a:prstGeom prst="rect">
@@ -33204,375 +34356,6 @@
                 <a:cs typeface="Trebuchet MS" pitchFamily="34" charset="-120"/>
               </a:rPr>
               <a:t>n</a:t>
-            </a:r>
-            <a:endParaRPr lang="en-US" sz="900" dirty="0"/>
-          </a:p>
-        </p:txBody>
-      </p:sp>
-      <p:sp>
-        <p:nvSpPr>
-          <p:cNvPr id="46" name="Shape 44"/>
-          <p:cNvSpPr/>
-          <p:nvPr/>
-        </p:nvSpPr>
-        <p:spPr>
-          <a:xfrm>
-            <a:off x="4447032" y="4169664"/>
-            <a:ext cx="685800" cy="384048"/>
-          </a:xfrm>
-          <a:prstGeom prst="rect">
-            <a:avLst>
-              <a:gd name="adj" fmla="val 9524"/>
-            </a:avLst>
-          </a:prstGeom>
-          <a:solidFill>
-            <a:srgbClr val="FFFFFF"/>
-          </a:solidFill>
-          <a:ln w="12700">
-            <a:solidFill>
-              <a:srgbClr val="DB2777"/>
-            </a:solidFill>
-            <a:prstDash val="solid"/>
-          </a:ln>
-        </p:spPr>
-      </p:sp>
-      <p:sp>
-        <p:nvSpPr>
-          <p:cNvPr id="47" name="Text 45"/>
-          <p:cNvSpPr/>
-          <p:nvPr/>
-        </p:nvSpPr>
-        <p:spPr>
-          <a:xfrm>
-            <a:off x="4447032" y="4169664"/>
-            <a:ext cx="685800" cy="384048"/>
-          </a:xfrm>
-          <a:prstGeom prst="rect">
-            <a:avLst/>
-          </a:prstGeom>
-          <a:noFill/>
-          <a:ln/>
-        </p:spPr>
-        <p:txBody>
-          <a:bodyPr wrap="square" lIns="0" tIns="0" rIns="0" bIns="0" rtlCol="0" anchor="ctr"/>
-          <a:lstStyle/>
-          <a:p>
-            <a:pPr algn="ctr" indent="0" marL="0">
-              <a:buNone/>
-            </a:pPr>
-            <a:r>
-              <a:rPr lang="en-US" sz="900" b="1" dirty="0">
-                <a:solidFill>
-                  <a:srgbClr val="9D174D"/>
-                </a:solidFill>
-                <a:latin typeface="Trebuchet MS" pitchFamily="34" charset="0"/>
-                <a:ea typeface="Trebuchet MS" pitchFamily="34" charset="-122"/>
-                <a:cs typeface="Trebuchet MS" pitchFamily="34" charset="-120"/>
-              </a:rPr>
-              <a:t>d</a:t>
-            </a:r>
-            <a:endParaRPr lang="en-US" sz="900" dirty="0"/>
-          </a:p>
-        </p:txBody>
-      </p:sp>
-      <p:sp>
-        <p:nvSpPr>
-          <p:cNvPr id="48" name="Shape 46"/>
-          <p:cNvSpPr/>
-          <p:nvPr/>
-        </p:nvSpPr>
-        <p:spPr>
-          <a:xfrm>
-            <a:off x="5254752" y="4169664"/>
-            <a:ext cx="685800" cy="384048"/>
-          </a:xfrm>
-          <a:prstGeom prst="rect">
-            <a:avLst>
-              <a:gd name="adj" fmla="val 9524"/>
-            </a:avLst>
-          </a:prstGeom>
-          <a:solidFill>
-            <a:srgbClr val="FFFFFF"/>
-          </a:solidFill>
-          <a:ln w="12700">
-            <a:solidFill>
-              <a:srgbClr val="DB2777"/>
-            </a:solidFill>
-            <a:prstDash val="solid"/>
-          </a:ln>
-        </p:spPr>
-      </p:sp>
-      <p:sp>
-        <p:nvSpPr>
-          <p:cNvPr id="49" name="Text 47"/>
-          <p:cNvSpPr/>
-          <p:nvPr/>
-        </p:nvSpPr>
-        <p:spPr>
-          <a:xfrm>
-            <a:off x="5254752" y="4169664"/>
-            <a:ext cx="685800" cy="384048"/>
-          </a:xfrm>
-          <a:prstGeom prst="rect">
-            <a:avLst/>
-          </a:prstGeom>
-          <a:noFill/>
-          <a:ln/>
-        </p:spPr>
-        <p:txBody>
-          <a:bodyPr wrap="square" lIns="0" tIns="0" rIns="0" bIns="0" rtlCol="0" anchor="ctr"/>
-          <a:lstStyle/>
-          <a:p>
-            <a:pPr algn="ctr" indent="0" marL="0">
-              <a:buNone/>
-            </a:pPr>
-            <a:r>
-              <a:rPr lang="en-US" sz="900" b="1" dirty="0">
-                <a:solidFill>
-                  <a:srgbClr val="9D174D"/>
-                </a:solidFill>
-                <a:latin typeface="Trebuchet MS" pitchFamily="34" charset="0"/>
-                <a:ea typeface="Trebuchet MS" pitchFamily="34" charset="-122"/>
-                <a:cs typeface="Trebuchet MS" pitchFamily="34" charset="-120"/>
-              </a:rPr>
-              <a:t>u</a:t>
-            </a:r>
-            <a:endParaRPr lang="en-US" sz="900" dirty="0"/>
-          </a:p>
-        </p:txBody>
-      </p:sp>
-      <p:sp>
-        <p:nvSpPr>
-          <p:cNvPr id="50" name="Shape 48"/>
-          <p:cNvSpPr/>
-          <p:nvPr/>
-        </p:nvSpPr>
-        <p:spPr>
-          <a:xfrm>
-            <a:off x="6062472" y="4169664"/>
-            <a:ext cx="685800" cy="384048"/>
-          </a:xfrm>
-          <a:prstGeom prst="rect">
-            <a:avLst>
-              <a:gd name="adj" fmla="val 9524"/>
-            </a:avLst>
-          </a:prstGeom>
-          <a:solidFill>
-            <a:srgbClr val="FFFFFF"/>
-          </a:solidFill>
-          <a:ln w="12700">
-            <a:solidFill>
-              <a:srgbClr val="DB2777"/>
-            </a:solidFill>
-            <a:prstDash val="solid"/>
-          </a:ln>
-        </p:spPr>
-      </p:sp>
-      <p:sp>
-        <p:nvSpPr>
-          <p:cNvPr id="51" name="Text 49"/>
-          <p:cNvSpPr/>
-          <p:nvPr/>
-        </p:nvSpPr>
-        <p:spPr>
-          <a:xfrm>
-            <a:off x="6062472" y="4169664"/>
-            <a:ext cx="685800" cy="384048"/>
-          </a:xfrm>
-          <a:prstGeom prst="rect">
-            <a:avLst/>
-          </a:prstGeom>
-          <a:noFill/>
-          <a:ln/>
-        </p:spPr>
-        <p:txBody>
-          <a:bodyPr wrap="square" lIns="0" tIns="0" rIns="0" bIns="0" rtlCol="0" anchor="ctr"/>
-          <a:lstStyle/>
-          <a:p>
-            <a:pPr algn="ctr" indent="0" marL="0">
-              <a:buNone/>
-            </a:pPr>
-            <a:r>
-              <a:rPr lang="en-US" sz="900" b="1" dirty="0">
-                <a:solidFill>
-                  <a:srgbClr val="9D174D"/>
-                </a:solidFill>
-                <a:latin typeface="Trebuchet MS" pitchFamily="34" charset="0"/>
-                <a:ea typeface="Trebuchet MS" pitchFamily="34" charset="-122"/>
-                <a:cs typeface="Trebuchet MS" pitchFamily="34" charset="-120"/>
-              </a:rPr>
-              <a:t>c</a:t>
-            </a:r>
-            <a:endParaRPr lang="en-US" sz="900" dirty="0"/>
-          </a:p>
-        </p:txBody>
-      </p:sp>
-      <p:sp>
-        <p:nvSpPr>
-          <p:cNvPr id="52" name="Text 50"/>
-          <p:cNvSpPr/>
-          <p:nvPr/>
-        </p:nvSpPr>
-        <p:spPr>
-          <a:xfrm>
-            <a:off x="6062472" y="4572000"/>
-            <a:ext cx="685800" cy="219456"/>
-          </a:xfrm>
-          <a:prstGeom prst="rect">
-            <a:avLst/>
-          </a:prstGeom>
-          <a:noFill/>
-          <a:ln/>
-        </p:spPr>
-        <p:txBody>
-          <a:bodyPr wrap="square" lIns="0" tIns="0" rIns="0" bIns="0" rtlCol="0" anchor="t"/>
-          <a:lstStyle/>
-          <a:p>
-            <a:pPr algn="ctr" indent="0" marL="0">
-              <a:buNone/>
-            </a:pPr>
-            <a:r>
-              <a:rPr lang="en-US" sz="750" i="1" dirty="0">
-                <a:solidFill>
-                  <a:srgbClr val="94A3B8"/>
-                </a:solidFill>
-                <a:latin typeface="Calibri" pitchFamily="34" charset="0"/>
-                <a:ea typeface="Calibri" pitchFamily="34" charset="-122"/>
-                <a:cs typeface="Calibri" pitchFamily="34" charset="-120"/>
-              </a:rPr>
-              <a:t>/k/</a:t>
-            </a:r>
-            <a:endParaRPr lang="en-US" sz="750" dirty="0"/>
-          </a:p>
-        </p:txBody>
-      </p:sp>
-      <p:sp>
-        <p:nvSpPr>
-          <p:cNvPr id="53" name="Shape 51"/>
-          <p:cNvSpPr/>
-          <p:nvPr/>
-        </p:nvSpPr>
-        <p:spPr>
-          <a:xfrm>
-            <a:off x="6870192" y="4169664"/>
-            <a:ext cx="685800" cy="384048"/>
-          </a:xfrm>
-          <a:prstGeom prst="rect">
-            <a:avLst>
-              <a:gd name="adj" fmla="val 9524"/>
-            </a:avLst>
-          </a:prstGeom>
-          <a:solidFill>
-            <a:srgbClr val="FFFFFF"/>
-          </a:solidFill>
-          <a:ln w="12700">
-            <a:solidFill>
-              <a:srgbClr val="DB2777"/>
-            </a:solidFill>
-            <a:prstDash val="solid"/>
-          </a:ln>
-        </p:spPr>
-      </p:sp>
-      <p:sp>
-        <p:nvSpPr>
-          <p:cNvPr id="54" name="Text 52"/>
-          <p:cNvSpPr/>
-          <p:nvPr/>
-        </p:nvSpPr>
-        <p:spPr>
-          <a:xfrm>
-            <a:off x="6870192" y="4169664"/>
-            <a:ext cx="685800" cy="384048"/>
-          </a:xfrm>
-          <a:prstGeom prst="rect">
-            <a:avLst/>
-          </a:prstGeom>
-          <a:noFill/>
-          <a:ln/>
-        </p:spPr>
-        <p:txBody>
-          <a:bodyPr wrap="square" lIns="0" tIns="0" rIns="0" bIns="0" rtlCol="0" anchor="ctr"/>
-          <a:lstStyle/>
-          <a:p>
-            <a:pPr algn="ctr" indent="0" marL="0">
-              <a:buNone/>
-            </a:pPr>
-            <a:r>
-              <a:rPr lang="en-US" sz="900" b="1" dirty="0">
-                <a:solidFill>
-                  <a:srgbClr val="9D174D"/>
-                </a:solidFill>
-                <a:latin typeface="Trebuchet MS" pitchFamily="34" charset="0"/>
-                <a:ea typeface="Trebuchet MS" pitchFamily="34" charset="-122"/>
-                <a:cs typeface="Trebuchet MS" pitchFamily="34" charset="-120"/>
-              </a:rPr>
-              <a:t>t</a:t>
-            </a:r>
-            <a:endParaRPr lang="en-US" sz="900" dirty="0"/>
-          </a:p>
-        </p:txBody>
-      </p:sp>
-      <p:sp>
-        <p:nvSpPr>
-          <p:cNvPr id="55" name="Shape 53"/>
-          <p:cNvSpPr/>
-          <p:nvPr/>
-        </p:nvSpPr>
-        <p:spPr>
-          <a:xfrm>
-            <a:off x="7677912" y="4169664"/>
-            <a:ext cx="685800" cy="384048"/>
-          </a:xfrm>
-          <a:prstGeom prst="rect">
-            <a:avLst>
-              <a:gd name="adj" fmla="val 9524"/>
-            </a:avLst>
-          </a:prstGeom>
-          <a:solidFill>
-            <a:srgbClr val="FFFFFF"/>
-          </a:solidFill>
-          <a:ln w="12700">
-            <a:solidFill>
-              <a:srgbClr val="DB2777"/>
-            </a:solidFill>
-            <a:prstDash val="solid"/>
-          </a:ln>
-        </p:spPr>
-      </p:sp>
-      <p:sp>
-        <p:nvSpPr>
-          <p:cNvPr id="56" name="Text 54"/>
-          <p:cNvSpPr/>
-          <p:nvPr/>
-        </p:nvSpPr>
-        <p:spPr>
-          <a:xfrm>
-            <a:off x="7677912" y="4169664"/>
-            <a:ext cx="685800" cy="384048"/>
-          </a:xfrm>
-          <a:prstGeom prst="rect">
-            <a:avLst/>
-          </a:prstGeom>
-          <a:noFill/>
-          <a:ln/>
-        </p:spPr>
-        <p:txBody>
-          <a:bodyPr wrap="square" lIns="0" tIns="0" rIns="0" bIns="0" rtlCol="0" anchor="ctr"/>
-          <a:lstStyle/>
-          <a:p>
-            <a:pPr algn="ctr" indent="0" marL="0">
-              <a:buNone/>
-            </a:pPr>
-            <a:r>
-              <a:rPr lang="en-US" sz="900" b="1" dirty="0">
-                <a:solidFill>
-                  <a:srgbClr val="9D174D"/>
-                </a:solidFill>
-                <a:latin typeface="Trebuchet MS" pitchFamily="34" charset="0"/>
-                <a:ea typeface="Trebuchet MS" pitchFamily="34" charset="-122"/>
-                <a:cs typeface="Trebuchet MS" pitchFamily="34" charset="-120"/>
-              </a:rPr>
-              <a:t>ive</a:t>
             </a:r>
             <a:endParaRPr lang="en-US" sz="900" dirty="0"/>
           </a:p>
@@ -33864,7 +34647,7 @@
                 <a:ea typeface="Calibri" pitchFamily="34" charset="-122"/>
                 <a:cs typeface="Calibri" pitchFamily="34" charset="-120"/>
               </a:rPr>
-              <a:t>Word Labs  •  wordlabs.app  •  Root: 'duct' = to lead or carry</a:t>
+              <a:t>Word Labs  •  wordlabs.app  •  Root: 'duct' = to lead or bring</a:t>
             </a:r>
             <a:endParaRPr lang="en-US" sz="800" dirty="0"/>
           </a:p>
@@ -35033,7 +35816,7 @@
                 <a:ea typeface="Calibri" pitchFamily="34" charset="-122"/>
                 <a:cs typeface="Calibri" pitchFamily="34" charset="-120"/>
               </a:rPr>
-              <a:t>Word Labs  •  wordlabs.app  •  Root: 'duct' = to lead or carry</a:t>
+              <a:t>Word Labs  •  wordlabs.app  •  Root: 'duct' = to lead or bring</a:t>
             </a:r>
             <a:endParaRPr lang="en-US" sz="800" dirty="0"/>
           </a:p>
@@ -36074,7 +36857,7 @@
                 <a:ea typeface="Trebuchet MS" pitchFamily="34" charset="-122"/>
                 <a:cs typeface="Trebuchet MS" pitchFamily="34" charset="-120"/>
               </a:rPr>
-              <a:t>-ure</a:t>
+              <a:t>-ing</a:t>
             </a:r>
             <a:endParaRPr lang="en-US" sz="1300" dirty="0"/>
           </a:p>
@@ -36933,7 +37716,7 @@
                 <a:ea typeface="Calibri" pitchFamily="34" charset="-122"/>
                 <a:cs typeface="Calibri" pitchFamily="34" charset="-120"/>
               </a:rPr>
-              <a:t>Word Labs  •  wordlabs.app  •  Root: 'duct' = to lead or carry</a:t>
+              <a:t>Word Labs  •  wordlabs.app  •  Root: 'duct' = to lead or bring</a:t>
             </a:r>
             <a:endParaRPr lang="en-US" sz="800" dirty="0"/>
           </a:p>
@@ -37097,7 +37880,7 @@
                 <a:ea typeface="Calibri" pitchFamily="34" charset="-122"/>
                 <a:cs typeface="Calibri" pitchFamily="34" charset="-120"/>
               </a:rPr>
-              <a:t>The core part of a word carrying its basic meaning. For example, 'duct' means 'to lead or carry'.</a:t>
+              <a:t>The core part of a word carrying its basic meaning. For example, 'duct' means 'to lead or bring'.</a:t>
             </a:r>
             <a:endParaRPr lang="en-US" sz="1350" dirty="0"/>
           </a:p>
@@ -37717,7 +38500,7 @@
                 <a:ea typeface="Calibri" pitchFamily="34" charset="-122"/>
                 <a:cs typeface="Calibri" pitchFamily="34" charset="-120"/>
               </a:rPr>
-              <a:t>Word Labs  •  wordlabs.app  •  Root: 'duct' = to lead or carry</a:t>
+              <a:t>Word Labs  •  wordlabs.app  •  Root: 'duct' = to lead or bring</a:t>
             </a:r>
             <a:endParaRPr lang="en-US" sz="800" dirty="0"/>
           </a:p>
@@ -37829,7 +38612,7 @@
                 <a:ea typeface="Calibri" pitchFamily="34" charset="-122"/>
                 <a:cs typeface="Calibri" pitchFamily="34" charset="-120"/>
               </a:rPr>
-              <a:t>1.  The root 'duct' comes from a Latin word meaning to lead or carry.</a:t>
+              <a:t>1.  The root 'duct' comes from a Latin word meaning 'to lead'.</a:t>
             </a:r>
             <a:endParaRPr lang="en-US" sz="1300" dirty="0"/>
           </a:p>
@@ -37968,7 +38751,7 @@
                 <a:ea typeface="Calibri" pitchFamily="34" charset="-122"/>
                 <a:cs typeface="Calibri" pitchFamily="34" charset="-120"/>
               </a:rPr>
-              <a:t>2.  A conductor is someone who always works alone and never leads others.</a:t>
+              <a:t>2.  The prefix 'de-' in 'deduct' means 'to take away or remove'.</a:t>
             </a:r>
             <a:endParaRPr lang="en-US" sz="1300" dirty="0"/>
           </a:p>
@@ -37991,11 +38774,11 @@
             </a:avLst>
           </a:prstGeom>
           <a:solidFill>
-            <a:srgbClr val="FEE2E2"/>
-          </a:solidFill>
-          <a:ln w="12700">
-            <a:solidFill>
-              <a:srgbClr val="DC2626"/>
+            <a:srgbClr val="DCFCE7"/>
+          </a:solidFill>
+          <a:ln w="12700">
+            <a:solidFill>
+              <a:srgbClr val="16A34A"/>
             </a:solidFill>
             <a:prstDash val="solid"/>
           </a:ln>
@@ -38028,13 +38811,13 @@
             <a:r>
               <a:rPr lang="en-US" sz="1100" b="1" dirty="0">
                 <a:solidFill>
-                  <a:srgbClr val="DC2626"/>
+                  <a:srgbClr val="16A34A"/>
                 </a:solidFill>
                 <a:latin typeface="Trebuchet MS" pitchFamily="34" charset="0"/>
                 <a:ea typeface="Trebuchet MS" pitchFamily="34" charset="-122"/>
                 <a:cs typeface="Trebuchet MS" pitchFamily="34" charset="-120"/>
               </a:rPr>
-              <a:t>FALSE</a:t>
+              <a:t>TRUE</a:t>
             </a:r>
             <a:endParaRPr lang="en-US" sz="1100" dirty="0"/>
           </a:p>
@@ -38107,7 +38890,7 @@
                 <a:ea typeface="Calibri" pitchFamily="34" charset="-122"/>
                 <a:cs typeface="Calibri" pitchFamily="34" charset="-120"/>
               </a:rPr>
-              <a:t>3.  The word 'deduct' contains the root 'duct', meaning to lead or carry away.</a:t>
+              <a:t>3.  The word 'conductor' has nothing to do with the root 'duct'.</a:t>
             </a:r>
             <a:endParaRPr lang="en-US" sz="1300" dirty="0"/>
           </a:p>
@@ -38130,11 +38913,11 @@
             </a:avLst>
           </a:prstGeom>
           <a:solidFill>
-            <a:srgbClr val="DCFCE7"/>
-          </a:solidFill>
-          <a:ln w="12700">
-            <a:solidFill>
-              <a:srgbClr val="16A34A"/>
+            <a:srgbClr val="FEE2E2"/>
+          </a:solidFill>
+          <a:ln w="12700">
+            <a:solidFill>
+              <a:srgbClr val="DC2626"/>
             </a:solidFill>
             <a:prstDash val="solid"/>
           </a:ln>
@@ -38167,13 +38950,13 @@
             <a:r>
               <a:rPr lang="en-US" sz="1100" b="1" dirty="0">
                 <a:solidFill>
-                  <a:srgbClr val="16A34A"/>
+                  <a:srgbClr val="DC2626"/>
                 </a:solidFill>
                 <a:latin typeface="Trebuchet MS" pitchFamily="34" charset="0"/>
                 <a:ea typeface="Trebuchet MS" pitchFamily="34" charset="-122"/>
                 <a:cs typeface="Trebuchet MS" pitchFamily="34" charset="-120"/>
               </a:rPr>
-              <a:t>TRUE</a:t>
+              <a:t>FALSE</a:t>
             </a:r>
             <a:endParaRPr lang="en-US" sz="1100" dirty="0"/>
           </a:p>
@@ -38246,7 +39029,7 @@
                 <a:ea typeface="Calibri" pitchFamily="34" charset="-122"/>
                 <a:cs typeface="Calibri" pitchFamily="34" charset="-120"/>
               </a:rPr>
-              <a:t>4.  The prefix 'con' in 'conduct' means together, so conduct means to lead together.</a:t>
+              <a:t>4.  The root 'duct' originally came from the Greek word for 'water'.</a:t>
             </a:r>
             <a:endParaRPr lang="en-US" sz="1300" dirty="0"/>
           </a:p>
@@ -38269,11 +39052,11 @@
             </a:avLst>
           </a:prstGeom>
           <a:solidFill>
-            <a:srgbClr val="DCFCE7"/>
-          </a:solidFill>
-          <a:ln w="12700">
-            <a:solidFill>
-              <a:srgbClr val="16A34A"/>
+            <a:srgbClr val="FEE2E2"/>
+          </a:solidFill>
+          <a:ln w="12700">
+            <a:solidFill>
+              <a:srgbClr val="DC2626"/>
             </a:solidFill>
             <a:prstDash val="solid"/>
           </a:ln>
@@ -38306,13 +39089,13 @@
             <a:r>
               <a:rPr lang="en-US" sz="1100" b="1" dirty="0">
                 <a:solidFill>
-                  <a:srgbClr val="16A34A"/>
+                  <a:srgbClr val="DC2626"/>
                 </a:solidFill>
                 <a:latin typeface="Trebuchet MS" pitchFamily="34" charset="0"/>
                 <a:ea typeface="Trebuchet MS" pitchFamily="34" charset="-122"/>
                 <a:cs typeface="Trebuchet MS" pitchFamily="34" charset="-120"/>
               </a:rPr>
-              <a:t>TRUE</a:t>
+              <a:t>FALSE</a:t>
             </a:r>
             <a:endParaRPr lang="en-US" sz="1100" dirty="0"/>
           </a:p>
@@ -38385,7 +39168,7 @@
                 <a:ea typeface="Calibri" pitchFamily="34" charset="-122"/>
                 <a:cs typeface="Calibri" pitchFamily="34" charset="-120"/>
               </a:rPr>
-              <a:t>5.  The root 'duct' comes from a Greek word meaning to push.</a:t>
+              <a:t>5.  A duct in a building is a tube or channel that leads air from one place to another.</a:t>
             </a:r>
             <a:endParaRPr lang="en-US" sz="1300" dirty="0"/>
           </a:p>
@@ -38408,11 +39191,11 @@
             </a:avLst>
           </a:prstGeom>
           <a:solidFill>
-            <a:srgbClr val="FEE2E2"/>
-          </a:solidFill>
-          <a:ln w="12700">
-            <a:solidFill>
-              <a:srgbClr val="DC2626"/>
+            <a:srgbClr val="DCFCE7"/>
+          </a:solidFill>
+          <a:ln w="12700">
+            <a:solidFill>
+              <a:srgbClr val="16A34A"/>
             </a:solidFill>
             <a:prstDash val="solid"/>
           </a:ln>
@@ -38445,13 +39228,13 @@
             <a:r>
               <a:rPr lang="en-US" sz="1100" b="1" dirty="0">
                 <a:solidFill>
-                  <a:srgbClr val="DC2626"/>
+                  <a:srgbClr val="16A34A"/>
                 </a:solidFill>
                 <a:latin typeface="Trebuchet MS" pitchFamily="34" charset="0"/>
                 <a:ea typeface="Trebuchet MS" pitchFamily="34" charset="-122"/>
                 <a:cs typeface="Trebuchet MS" pitchFamily="34" charset="-120"/>
               </a:rPr>
-              <a:t>FALSE</a:t>
+              <a:t>TRUE</a:t>
             </a:r>
             <a:endParaRPr lang="en-US" sz="1100" dirty="0"/>
           </a:p>
@@ -38743,7 +39526,7 @@
                 <a:ea typeface="Calibri" pitchFamily="34" charset="-122"/>
                 <a:cs typeface="Calibri" pitchFamily="34" charset="-120"/>
               </a:rPr>
-              <a:t>Word Labs  •  wordlabs.app  •  Root: 'duct' = to lead or carry</a:t>
+              <a:t>Word Labs  •  wordlabs.app  •  Root: 'duct' = to lead or bring</a:t>
             </a:r>
             <a:endParaRPr lang="en-US" sz="800" dirty="0"/>
           </a:p>
@@ -38880,7 +39663,7 @@
                 <a:ea typeface="Trebuchet MS" pitchFamily="34" charset="-122"/>
                 <a:cs typeface="Trebuchet MS" pitchFamily="34" charset="-120"/>
               </a:rPr>
-              <a:t>to lead or carry</a:t>
+              <a:t>to lead or bring</a:t>
             </a:r>
             <a:endParaRPr lang="en-US" sz="2000" dirty="0"/>
           </a:p>
@@ -39712,7 +40495,7 @@
                 <a:ea typeface="Calibri" pitchFamily="34" charset="-122"/>
                 <a:cs typeface="Calibri" pitchFamily="34" charset="-120"/>
               </a:rPr>
-              <a:t>Word Labs  •  wordlabs.app  •  Root: 'duct' = to lead or carry</a:t>
+              <a:t>Word Labs  •  wordlabs.app  •  Root: 'duct' = to lead or bring</a:t>
             </a:r>
             <a:endParaRPr lang="en-US" sz="800" dirty="0"/>
           </a:p>
@@ -40753,7 +41536,7 @@
                 <a:ea typeface="Trebuchet MS" pitchFamily="34" charset="-122"/>
                 <a:cs typeface="Trebuchet MS" pitchFamily="34" charset="-120"/>
               </a:rPr>
-              <a:t>-ure</a:t>
+              <a:t>-ing</a:t>
             </a:r>
             <a:endParaRPr lang="en-US" sz="1300" dirty="0"/>
           </a:p>
@@ -41486,7 +42269,7 @@
                 <a:ea typeface="Calibri" pitchFamily="34" charset="-122"/>
                 <a:cs typeface="Calibri" pitchFamily="34" charset="-120"/>
               </a:rPr>
-              <a:t>Word Labs  •  wordlabs.app  •  Root: 'duct' = to lead or carry</a:t>
+              <a:t>Word Labs  •  wordlabs.app  •  Root: 'duct' = to lead or bring</a:t>
             </a:r>
             <a:endParaRPr lang="en-US" sz="800" dirty="0"/>
           </a:p>
@@ -41664,7 +42447,7 @@
                 <a:ea typeface="Calibri" pitchFamily="34" charset="-122"/>
                 <a:cs typeface="Calibri" pitchFamily="34" charset="-120"/>
               </a:rPr>
-              <a:t>To take away an amount from a total, like deducting points for wrong answers.</a:t>
+              <a:t>To take away an amount from a total, like removing marks from a score.</a:t>
             </a:r>
             <a:endParaRPr lang="en-US" sz="1200" dirty="0"/>
           </a:p>
@@ -41803,7 +42586,7 @@
                 <a:ea typeface="Calibri" pitchFamily="34" charset="-122"/>
                 <a:cs typeface="Calibri" pitchFamily="34" charset="-120"/>
               </a:rPr>
-              <a:t>The process of leading or working something out step by step using logic.</a:t>
+              <a:t>The process of figuring something out by using clues and reasoning.</a:t>
             </a:r>
             <a:endParaRPr lang="en-US" sz="1200" dirty="0"/>
           </a:p>
@@ -41942,7 +42725,7 @@
                 <a:ea typeface="Calibri" pitchFamily="34" charset="-122"/>
                 <a:cs typeface="Calibri" pitchFamily="34" charset="-120"/>
               </a:rPr>
-              <a:t>To lead or guide something, like an orchestra conductor leads musicians.</a:t>
+              <a:t>To lead or guide people, or the way someone behaves.</a:t>
             </a:r>
             <a:endParaRPr lang="en-US" sz="1200" dirty="0"/>
           </a:p>
@@ -42081,7 +42864,7 @@
                 <a:ea typeface="Calibri" pitchFamily="34" charset="-122"/>
                 <a:cs typeface="Calibri" pitchFamily="34" charset="-120"/>
               </a:rPr>
-              <a:t>A person who leads a group of musicians, or something that lets electricity or heat pass through it.</a:t>
+              <a:t>A person who leads an orchestra, or something that carries electricity or heat.</a:t>
             </a:r>
             <a:endParaRPr lang="en-US" sz="1200" dirty="0"/>
           </a:p>
@@ -42220,7 +43003,7 @@
                 <a:ea typeface="Calibri" pitchFamily="34" charset="-122"/>
                 <a:cs typeface="Calibri" pitchFamily="34" charset="-120"/>
               </a:rPr>
-              <a:t>To make something smaller or less, like reducing the amount of rubbish you throw away.</a:t>
+              <a:t>To make something smaller or less in size or amount.</a:t>
             </a:r>
             <a:endParaRPr lang="en-US" sz="1200" dirty="0"/>
           </a:p>
@@ -42359,7 +43142,7 @@
                 <a:ea typeface="Calibri" pitchFamily="34" charset="-122"/>
                 <a:cs typeface="Calibri" pitchFamily="34" charset="-120"/>
               </a:rPr>
-              <a:t>To officially bring someone into a group or organisation, like being inducted into a sports hall of fame.</a:t>
+              <a:t>To officially bring someone into a group or organisation.</a:t>
             </a:r>
             <a:endParaRPr lang="en-US" sz="1200" dirty="0"/>
           </a:p>
@@ -42498,7 +43281,7 @@
                 <a:ea typeface="Calibri" pitchFamily="34" charset="-122"/>
                 <a:cs typeface="Calibri" pitchFamily="34" charset="-120"/>
               </a:rPr>
-              <a:t>To make or bring something into existence, like a factory produces goods.</a:t>
+              <a:t>To make or create something, like a factory produces goods.</a:t>
             </a:r>
             <a:endParaRPr lang="en-US" sz="1200" dirty="0"/>
           </a:p>
@@ -42790,7 +43573,7 @@
                 <a:ea typeface="Calibri" pitchFamily="34" charset="-122"/>
                 <a:cs typeface="Calibri" pitchFamily="34" charset="-120"/>
               </a:rPr>
-              <a:t>Word Labs  •  wordlabs.app  •  Root: 'duct' = to lead or carry</a:t>
+              <a:t>Word Labs  •  wordlabs.app  •  Root: 'duct' = to lead or bring</a:t>
             </a:r>
             <a:endParaRPr lang="en-US" sz="800" dirty="0"/>
           </a:p>
@@ -42993,7 +43776,7 @@
                 <a:ea typeface="Calibri" pitchFamily="34" charset="-122"/>
                 <a:cs typeface="Calibri" pitchFamily="34" charset="-120"/>
               </a:rPr>
-              <a:t>The conductor raised her baton and the orchestra began to play a beautiful symphony.</a:t>
+              <a:t>The conductor raised her baton and led the orchestra through a beautiful piece of music.</a:t>
             </a:r>
             <a:endParaRPr lang="en-US" sz="1500" dirty="0"/>
           </a:p>
@@ -43157,7 +43940,7 @@
                 <a:ea typeface="Calibri" pitchFamily="34" charset="-122"/>
                 <a:cs typeface="Calibri" pitchFamily="34" charset="-120"/>
               </a:rPr>
-              <a:t>Our teacher asked us to deduce the answer by using clues from the text — that is a form of deduction.</a:t>
+              <a:t>We need to deduct five points from your score because of the incorrect answer.</a:t>
             </a:r>
             <a:endParaRPr lang="en-US" sz="1500" dirty="0"/>
           </a:p>
@@ -43321,7 +44104,7 @@
                 <a:ea typeface="Calibri" pitchFamily="34" charset="-122"/>
                 <a:cs typeface="Calibri" pitchFamily="34" charset="-120"/>
               </a:rPr>
-              <a:t>The school will induct the new student council members at a special assembly on Friday.</a:t>
+              <a:t>The air duct in our classroom carries fresh air from outside into the room.</a:t>
             </a:r>
             <a:endParaRPr lang="en-US" sz="1500" dirty="0"/>
           </a:p>
